--- a/Campaignly.AI - FYP Proposal Presentation.pptx
+++ b/Campaignly.AI - FYP Proposal Presentation.pptx
@@ -4,6 +4,9 @@
   <p:sldMasterIdLst>
     <p:sldMasterId id="2147483648" r:id="rId1"/>
   </p:sldMasterIdLst>
+  <p:notesMasterIdLst>
+    <p:notesMasterId r:id="rId13"/>
+  </p:notesMasterIdLst>
   <p:sldIdLst>
     <p:sldId id="256" r:id="rId2"/>
     <p:sldId id="257" r:id="rId3"/>
@@ -17,9 +20,6 @@
     <p:sldId id="265" r:id="rId11"/>
     <p:sldId id="266" r:id="rId12"/>
   </p:sldIdLst>
-  <p:notesMasterIdLst>
-    <p:notesMasterId r:id="rId13"/>
-  </p:notesMasterIdLst>
   <p:sldSz cx="12192000" cy="6858000"/>
   <p:notesSz cx="6858000" cy="12192000"/>
   <p:defaultTextStyle>
@@ -114,6 +114,11 @@
       </a:defRPr>
     </a:lvl9pPr>
   </p:defaultTextStyle>
+  <p:extLst>
+    <p:ext uri="{EFAFB233-063F-42B5-8137-9DF3F51BA10A}">
+      <p15:sldGuideLst xmlns:p15="http://schemas.microsoft.com/office/powerpoint/2012/main"/>
+    </p:ext>
+  </p:extLst>
 </p:presentation>
 </file>
 
@@ -139,234 +144,10 @@
           <a:chExt cx="0" cy="0"/>
         </a:xfrm>
       </p:grpSpPr>
-      <p:sp>
-        <p:nvSpPr>
-          <p:cNvPr id="2" name="Header Placeholder 1"/>
-          <p:cNvSpPr>
-            <a:spLocks noGrp="1"/>
-          </p:cNvSpPr>
-          <p:nvPr>
-            <p:ph type="hdr" sz="quarter"/>
-          </p:nvPr>
-        </p:nvSpPr>
-        <p:spPr>
-          <a:xfrm>
-            <a:off x="0" y="0"/>
-            <a:ext cx="2971800" cy="458788"/>
-          </a:xfrm>
-          <a:prstGeom prst="rect">
-            <a:avLst/>
-          </a:prstGeom>
-        </p:spPr>
-        <p:txBody>
-          <a:bodyPr vert="horz" lIns="91440" tIns="45720" rIns="91440" bIns="45720" rtlCol="0"/>
-          <a:lstStyle>
-            <a:lvl1pPr algn="l">
-              <a:defRPr sz="1200"/>
-            </a:lvl1pPr>
-          </a:lstStyle>
-          <a:p>
-            <a:endParaRPr lang="en-US"/>
-          </a:p>
-        </p:txBody>
-      </p:sp>
-      <p:sp>
-        <p:nvSpPr>
-          <p:cNvPr id="3" name="Date Placeholder 2"/>
-          <p:cNvSpPr>
-            <a:spLocks noGrp="1"/>
-          </p:cNvSpPr>
-          <p:nvPr>
-            <p:ph type="dt" idx="1"/>
-          </p:nvPr>
-        </p:nvSpPr>
-        <p:spPr>
-          <a:xfrm>
-            <a:off x="3884613" y="0"/>
-            <a:ext cx="2971800" cy="458788"/>
-          </a:xfrm>
-          <a:prstGeom prst="rect">
-            <a:avLst/>
-          </a:prstGeom>
-        </p:spPr>
-        <p:txBody>
-          <a:bodyPr vert="horz" lIns="91440" tIns="45720" rIns="91440" bIns="45720" rtlCol="0"/>
-          <a:lstStyle>
-            <a:lvl1pPr algn="r">
-              <a:defRPr sz="1200"/>
-            </a:lvl1pPr>
-          </a:lstStyle>
-          <a:p>
-            <a:fld id="{5282F153-3F37-0F45-9E97-73ACFA13230C}" type="datetimeFigureOut">
-              <a:rPr lang="en-US"/>
-              <a:t>7/23/19</a:t>
-            </a:fld>
-            <a:endParaRPr lang="en-US"/>
-          </a:p>
-        </p:txBody>
-      </p:sp>
-      <p:sp>
-        <p:nvSpPr>
-          <p:cNvPr id="4" name="Slide Image Placeholder 3"/>
-          <p:cNvSpPr>
-            <a:spLocks noGrp="1" noRot="1" noChangeAspect="1"/>
-          </p:cNvSpPr>
-          <p:nvPr>
-            <p:ph type="sldImg" idx="2"/>
-          </p:nvPr>
-        </p:nvSpPr>
-        <p:spPr>
-          <a:xfrm>
-            <a:off x="685800" y="1143000"/>
-            <a:ext cx="5486400" cy="3086100"/>
-          </a:xfrm>
-          <a:prstGeom prst="rect">
-            <a:avLst/>
-          </a:prstGeom>
-          <a:noFill/>
-          <a:ln w="12700">
-            <a:solidFill>
-              <a:prstClr val="black"/>
-            </a:solidFill>
-          </a:ln>
-        </p:spPr>
-        <p:txBody>
-          <a:bodyPr vert="horz" lIns="91440" tIns="45720" rIns="91440" bIns="45720" rtlCol="0" anchor="ctr"/>
-          <a:lstStyle/>
-          <a:p>
-            <a:endParaRPr lang="en-US"/>
-          </a:p>
-        </p:txBody>
-      </p:sp>
-      <p:sp>
-        <p:nvSpPr>
-          <p:cNvPr id="5" name="Notes Placeholder 4"/>
-          <p:cNvSpPr>
-            <a:spLocks noGrp="1"/>
-          </p:cNvSpPr>
-          <p:nvPr>
-            <p:ph type="body" sz="quarter" idx="3"/>
-          </p:nvPr>
-        </p:nvSpPr>
-        <p:spPr>
-          <a:xfrm>
-            <a:off x="685800" y="4400550"/>
-            <a:ext cx="5486400" cy="3600450"/>
-          </a:xfrm>
-          <a:prstGeom prst="rect">
-            <a:avLst/>
-          </a:prstGeom>
-        </p:spPr>
-        <p:txBody>
-          <a:bodyPr vert="horz" lIns="91440" tIns="45720" rIns="91440" bIns="45720" rtlCol="0"/>
-          <a:lstStyle/>
-          <a:p>
-            <a:pPr lvl="0"/>
-            <a:r>
-              <a:rPr lang="en-US"/>
-              <a:t>Click to edit Master text styles</a:t>
-            </a:r>
-          </a:p>
-          <a:p>
-            <a:pPr lvl="1"/>
-            <a:r>
-              <a:rPr lang="en-US"/>
-              <a:t>Second level</a:t>
-            </a:r>
-          </a:p>
-          <a:p>
-            <a:pPr lvl="2"/>
-            <a:r>
-              <a:rPr lang="en-US"/>
-              <a:t>Third level</a:t>
-            </a:r>
-          </a:p>
-          <a:p>
-            <a:pPr lvl="3"/>
-            <a:r>
-              <a:rPr lang="en-US"/>
-              <a:t>Fourth level</a:t>
-            </a:r>
-          </a:p>
-          <a:p>
-            <a:pPr lvl="4"/>
-            <a:r>
-              <a:rPr lang="en-US"/>
-              <a:t>Fifth level</a:t>
-            </a:r>
-          </a:p>
-        </p:txBody>
-      </p:sp>
-      <p:sp>
-        <p:nvSpPr>
-          <p:cNvPr id="6" name="Footer Placeholder 5"/>
-          <p:cNvSpPr>
-            <a:spLocks noGrp="1"/>
-          </p:cNvSpPr>
-          <p:nvPr>
-            <p:ph type="ftr" sz="quarter" idx="4"/>
-          </p:nvPr>
-        </p:nvSpPr>
-        <p:spPr>
-          <a:xfrm>
-            <a:off x="0" y="8685213"/>
-            <a:ext cx="2971800" cy="458787"/>
-          </a:xfrm>
-          <a:prstGeom prst="rect">
-            <a:avLst/>
-          </a:prstGeom>
-        </p:spPr>
-        <p:txBody>
-          <a:bodyPr vert="horz" lIns="91440" tIns="45720" rIns="91440" bIns="45720" rtlCol="0" anchor="b"/>
-          <a:lstStyle>
-            <a:lvl1pPr algn="l">
-              <a:defRPr sz="1200"/>
-            </a:lvl1pPr>
-          </a:lstStyle>
-          <a:p>
-            <a:endParaRPr lang="en-US"/>
-          </a:p>
-        </p:txBody>
-      </p:sp>
-      <p:sp>
-        <p:nvSpPr>
-          <p:cNvPr id="7" name="Slide Number Placeholder 6"/>
-          <p:cNvSpPr>
-            <a:spLocks noGrp="1"/>
-          </p:cNvSpPr>
-          <p:nvPr>
-            <p:ph type="sldNum" sz="quarter" idx="5"/>
-          </p:nvPr>
-        </p:nvSpPr>
-        <p:spPr>
-          <a:xfrm>
-            <a:off x="3884613" y="8685213"/>
-            <a:ext cx="2971800" cy="458787"/>
-          </a:xfrm>
-          <a:prstGeom prst="rect">
-            <a:avLst/>
-          </a:prstGeom>
-        </p:spPr>
-        <p:txBody>
-          <a:bodyPr vert="horz" lIns="91440" tIns="45720" rIns="91440" bIns="45720" rtlCol="0" anchor="b"/>
-          <a:lstStyle>
-            <a:lvl1pPr algn="r">
-              <a:defRPr sz="1200"/>
-            </a:lvl1pPr>
-          </a:lstStyle>
-          <a:p>
-            <a:fld id="{CE5E9CC1-C706-0F49-92D6-E571CC5EEA8F}" type="slidenum">
-              <a:rPr lang="en-US"/>
-              <a:t>‹#›</a:t>
-            </a:fld>
-            <a:endParaRPr lang="en-US"/>
-          </a:p>
-        </p:txBody>
-      </p:sp>
     </p:spTree>
     <p:extLst>
       <p:ext uri="{BB962C8B-B14F-4D97-AF65-F5344CB8AC3E}">
-        <p14:creationId xmlns:p14="http://schemas.microsoft.com/office/powerpoint/2010/main" val="1024086991"/>
+        <p14:creationId xmlns:p14="http://schemas.microsoft.com/office/powerpoint/2010/main" val="2609852688"/>
       </p:ext>
     </p:extLst>
   </p:cSld>
@@ -510,10 +291,6 @@
           <a:bodyPr/>
           <a:lstStyle/>
           <a:p>
-            <a:r>
-              <a:rPr lang="en-US" dirty="0"/>
-              <a:t/>
-            </a:r>
             <a:endParaRPr lang="en-US" dirty="0"/>
           </a:p>
         </p:txBody>
@@ -598,10 +375,6 @@
           <a:bodyPr/>
           <a:lstStyle/>
           <a:p>
-            <a:r>
-              <a:rPr lang="en-US" dirty="0"/>
-              <a:t/>
-            </a:r>
             <a:endParaRPr lang="en-US" dirty="0"/>
           </a:p>
         </p:txBody>
@@ -686,10 +459,6 @@
           <a:bodyPr/>
           <a:lstStyle/>
           <a:p>
-            <a:r>
-              <a:rPr lang="en-US" dirty="0"/>
-              <a:t/>
-            </a:r>
             <a:endParaRPr lang="en-US" dirty="0"/>
           </a:p>
         </p:txBody>
@@ -774,10 +543,6 @@
           <a:bodyPr/>
           <a:lstStyle/>
           <a:p>
-            <a:r>
-              <a:rPr lang="en-US" dirty="0"/>
-              <a:t/>
-            </a:r>
             <a:endParaRPr lang="en-US" dirty="0"/>
           </a:p>
         </p:txBody>
@@ -862,10 +627,6 @@
           <a:bodyPr/>
           <a:lstStyle/>
           <a:p>
-            <a:r>
-              <a:rPr lang="en-US" dirty="0"/>
-              <a:t/>
-            </a:r>
             <a:endParaRPr lang="en-US" dirty="0"/>
           </a:p>
         </p:txBody>
@@ -950,10 +711,6 @@
           <a:bodyPr/>
           <a:lstStyle/>
           <a:p>
-            <a:r>
-              <a:rPr lang="en-US" dirty="0"/>
-              <a:t/>
-            </a:r>
             <a:endParaRPr lang="en-US" dirty="0"/>
           </a:p>
         </p:txBody>
@@ -1038,10 +795,6 @@
           <a:bodyPr/>
           <a:lstStyle/>
           <a:p>
-            <a:r>
-              <a:rPr lang="en-US" dirty="0"/>
-              <a:t/>
-            </a:r>
             <a:endParaRPr lang="en-US" dirty="0"/>
           </a:p>
         </p:txBody>
@@ -1126,10 +879,6 @@
           <a:bodyPr/>
           <a:lstStyle/>
           <a:p>
-            <a:r>
-              <a:rPr lang="en-US" dirty="0"/>
-              <a:t/>
-            </a:r>
             <a:endParaRPr lang="en-US" dirty="0"/>
           </a:p>
         </p:txBody>
@@ -1214,10 +963,6 @@
           <a:bodyPr/>
           <a:lstStyle/>
           <a:p>
-            <a:r>
-              <a:rPr lang="en-US" dirty="0"/>
-              <a:t/>
-            </a:r>
             <a:endParaRPr lang="en-US" dirty="0"/>
           </a:p>
         </p:txBody>
@@ -1302,10 +1047,6 @@
           <a:bodyPr/>
           <a:lstStyle/>
           <a:p>
-            <a:r>
-              <a:rPr lang="en-US" dirty="0"/>
-              <a:t/>
-            </a:r>
             <a:endParaRPr lang="en-US" dirty="0"/>
           </a:p>
         </p:txBody>
@@ -1390,10 +1131,6 @@
           <a:bodyPr/>
           <a:lstStyle/>
           <a:p>
-            <a:r>
-              <a:rPr lang="en-US" dirty="0"/>
-              <a:t/>
-            </a:r>
             <a:endParaRPr lang="en-US" dirty="0"/>
           </a:p>
         </p:txBody>
@@ -1467,6 +1204,11 @@
 <file path=ppt/slideMasters/slideMaster1.xml><?xml version="1.0" encoding="utf-8"?>
 <p:sldMaster xmlns:a="http://schemas.openxmlformats.org/drawingml/2006/main" xmlns:r="http://schemas.openxmlformats.org/officeDocument/2006/relationships" xmlns:p="http://schemas.openxmlformats.org/presentationml/2006/main">
   <p:cSld>
+    <p:bg>
+      <p:bgRef idx="1001">
+        <a:schemeClr val="bg1"/>
+      </p:bgRef>
+    </p:bg>
     <p:spTree>
       <p:nvGrpSpPr>
         <p:cNvPr id="1" name=""/>
@@ -1749,6 +1491,7 @@
         <a:solidFill>
           <a:srgbClr val="042F2E"/>
         </a:solidFill>
+        <a:effectLst/>
       </p:bgPr>
     </p:bg>
     <p:spTree>
@@ -1784,6 +1527,13 @@
           </a:solidFill>
           <a:ln/>
         </p:spPr>
+        <p:txBody>
+          <a:bodyPr/>
+          <a:lstStyle/>
+          <a:p>
+            <a:endParaRPr lang="en-PK"/>
+          </a:p>
+        </p:txBody>
       </p:sp>
       <p:sp>
         <p:nvSpPr>
@@ -1804,6 +1554,13 @@
           </a:solidFill>
           <a:ln/>
         </p:spPr>
+        <p:txBody>
+          <a:bodyPr/>
+          <a:lstStyle/>
+          <a:p>
+            <a:endParaRPr lang="en-PK"/>
+          </a:p>
+        </p:txBody>
       </p:sp>
       <p:sp>
         <p:nvSpPr>
@@ -1824,6 +1581,13 @@
           </a:solidFill>
           <a:ln/>
         </p:spPr>
+        <p:txBody>
+          <a:bodyPr/>
+          <a:lstStyle/>
+          <a:p>
+            <a:endParaRPr lang="en-PK"/>
+          </a:p>
+        </p:txBody>
       </p:sp>
       <p:sp>
         <p:nvSpPr>
@@ -1844,6 +1608,13 @@
           </a:solidFill>
           <a:ln/>
         </p:spPr>
+        <p:txBody>
+          <a:bodyPr/>
+          <a:lstStyle/>
+          <a:p>
+            <a:endParaRPr lang="en-PK"/>
+          </a:p>
+        </p:txBody>
       </p:sp>
       <p:sp>
         <p:nvSpPr>
@@ -1866,6 +1637,13 @@
           </a:solidFill>
           <a:ln/>
         </p:spPr>
+        <p:txBody>
+          <a:bodyPr/>
+          <a:lstStyle/>
+          <a:p>
+            <a:endParaRPr lang="en-PK"/>
+          </a:p>
+        </p:txBody>
       </p:sp>
       <p:sp>
         <p:nvSpPr>
@@ -1886,6 +1664,13 @@
           </a:solidFill>
           <a:ln/>
         </p:spPr>
+        <p:txBody>
+          <a:bodyPr/>
+          <a:lstStyle/>
+          <a:p>
+            <a:endParaRPr lang="en-PK"/>
+          </a:p>
+        </p:txBody>
       </p:sp>
       <p:sp>
         <p:nvSpPr>
@@ -1906,6 +1691,13 @@
           </a:solidFill>
           <a:ln/>
         </p:spPr>
+        <p:txBody>
+          <a:bodyPr/>
+          <a:lstStyle/>
+          <a:p>
+            <a:endParaRPr lang="en-PK"/>
+          </a:p>
+        </p:txBody>
       </p:sp>
       <p:sp>
         <p:nvSpPr>
@@ -1926,6 +1718,13 @@
           </a:solidFill>
           <a:ln/>
         </p:spPr>
+        <p:txBody>
+          <a:bodyPr/>
+          <a:lstStyle/>
+          <a:p>
+            <a:endParaRPr lang="en-PK"/>
+          </a:p>
+        </p:txBody>
       </p:sp>
       <p:sp>
         <p:nvSpPr>
@@ -1946,6 +1745,13 @@
           </a:solidFill>
           <a:ln/>
         </p:spPr>
+        <p:txBody>
+          <a:bodyPr/>
+          <a:lstStyle/>
+          <a:p>
+            <a:endParaRPr lang="en-PK"/>
+          </a:p>
+        </p:txBody>
       </p:sp>
       <p:sp>
         <p:nvSpPr>
@@ -1968,11 +1774,11 @@
           <a:bodyPr wrap="square" rtlCol="0" anchor="ctr"/>
           <a:lstStyle/>
           <a:p>
-            <a:pPr indent="0" marL="0">
+            <a:pPr marL="0" indent="0">
               <a:buNone/>
             </a:pPr>
             <a:r>
-              <a:rPr lang="en-US" sz="1400" b="1" spc="250" kern="0" dirty="0">
+              <a:rPr lang="en-US" sz="1400" b="1" kern="0" spc="250" dirty="0">
                 <a:solidFill>
                   <a:srgbClr val="5EEAD4"/>
                 </a:solidFill>
@@ -2007,7 +1813,7 @@
           <a:bodyPr wrap="square" rtlCol="0" anchor="ctr"/>
           <a:lstStyle/>
           <a:p>
-            <a:pPr indent="0" marL="0">
+            <a:pPr marL="0" indent="0">
               <a:buNone/>
             </a:pPr>
             <a:r>
@@ -2044,6 +1850,13 @@
           </a:solidFill>
           <a:ln/>
         </p:spPr>
+        <p:txBody>
+          <a:bodyPr/>
+          <a:lstStyle/>
+          <a:p>
+            <a:endParaRPr lang="en-PK"/>
+          </a:p>
+        </p:txBody>
       </p:sp>
       <p:sp>
         <p:nvSpPr>
@@ -2066,7 +1879,7 @@
           <a:bodyPr wrap="square" rtlCol="0" anchor="ctr"/>
           <a:lstStyle/>
           <a:p>
-            <a:pPr indent="0" marL="0">
+            <a:pPr marL="0" indent="0">
               <a:buNone/>
             </a:pPr>
             <a:r>
@@ -2103,6 +1916,13 @@
           </a:solidFill>
           <a:ln/>
         </p:spPr>
+        <p:txBody>
+          <a:bodyPr/>
+          <a:lstStyle/>
+          <a:p>
+            <a:endParaRPr lang="en-PK"/>
+          </a:p>
+        </p:txBody>
       </p:sp>
       <p:sp>
         <p:nvSpPr>
@@ -2125,11 +1945,11 @@
           <a:bodyPr wrap="square" rtlCol="0" anchor="ctr"/>
           <a:lstStyle/>
           <a:p>
-            <a:pPr indent="0" marL="0">
+            <a:pPr marL="0" indent="0">
               <a:buNone/>
             </a:pPr>
             <a:r>
-              <a:rPr lang="en-US" sz="1100" b="1" spc="150" kern="0" dirty="0">
+              <a:rPr lang="en-US" sz="1100" b="1" kern="0" spc="150" dirty="0">
                 <a:solidFill>
                   <a:srgbClr val="5EEAD4"/>
                 </a:solidFill>
@@ -2164,7 +1984,7 @@
           <a:bodyPr wrap="square" rtlCol="0" anchor="t"/>
           <a:lstStyle/>
           <a:p>
-            <a:pPr indent="0" marL="0">
+            <a:pPr marL="0" indent="0">
               <a:lnSpc>
                 <a:spcPts val="2000"/>
               </a:lnSpc>
@@ -2184,7 +2004,7 @@
             <a:endParaRPr lang="en-US" sz="1100" dirty="0"/>
           </a:p>
           <a:p>
-            <a:pPr indent="0" marL="0">
+            <a:pPr marL="0" indent="0">
               <a:lnSpc>
                 <a:spcPts val="2000"/>
               </a:lnSpc>
@@ -2224,6 +2044,13 @@
           </a:solidFill>
           <a:ln/>
         </p:spPr>
+        <p:txBody>
+          <a:bodyPr/>
+          <a:lstStyle/>
+          <a:p>
+            <a:endParaRPr lang="en-PK"/>
+          </a:p>
+        </p:txBody>
       </p:sp>
       <p:sp>
         <p:nvSpPr>
@@ -2246,11 +2073,11 @@
           <a:bodyPr wrap="square" rtlCol="0" anchor="ctr"/>
           <a:lstStyle/>
           <a:p>
-            <a:pPr indent="0" marL="0">
+            <a:pPr marL="0" indent="0">
               <a:buNone/>
             </a:pPr>
             <a:r>
-              <a:rPr lang="en-US" sz="1100" b="1" spc="150" kern="0" dirty="0">
+              <a:rPr lang="en-US" sz="1100" b="1" kern="0" spc="150" dirty="0">
                 <a:solidFill>
                   <a:srgbClr val="5EEAD4"/>
                 </a:solidFill>
@@ -2285,7 +2112,7 @@
           <a:bodyPr wrap="square" rtlCol="0" anchor="t"/>
           <a:lstStyle/>
           <a:p>
-            <a:pPr indent="0" marL="0">
+            <a:pPr marL="0" indent="0">
               <a:lnSpc>
                 <a:spcPts val="2000"/>
               </a:lnSpc>
@@ -2325,6 +2152,13 @@
           </a:solidFill>
           <a:ln/>
         </p:spPr>
+        <p:txBody>
+          <a:bodyPr/>
+          <a:lstStyle/>
+          <a:p>
+            <a:endParaRPr lang="en-PK"/>
+          </a:p>
+        </p:txBody>
       </p:sp>
       <p:sp>
         <p:nvSpPr>
@@ -2347,11 +2181,11 @@
           <a:bodyPr wrap="square" rtlCol="0" anchor="ctr"/>
           <a:lstStyle/>
           <a:p>
-            <a:pPr indent="0" marL="0">
+            <a:pPr marL="0" indent="0">
               <a:buNone/>
             </a:pPr>
             <a:r>
-              <a:rPr lang="en-US" sz="1100" b="1" spc="150" kern="0" dirty="0">
+              <a:rPr lang="en-US" sz="1100" b="1" kern="0" spc="150" dirty="0">
                 <a:solidFill>
                   <a:srgbClr val="5EEAD4"/>
                 </a:solidFill>
@@ -2386,7 +2220,7 @@
           <a:bodyPr wrap="square" rtlCol="0" anchor="t"/>
           <a:lstStyle/>
           <a:p>
-            <a:pPr indent="0" marL="0">
+            <a:pPr marL="0" indent="0">
               <a:lnSpc>
                 <a:spcPts val="2000"/>
               </a:lnSpc>
@@ -2406,7 +2240,7 @@
             <a:endParaRPr lang="en-US" sz="1100" dirty="0"/>
           </a:p>
           <a:p>
-            <a:pPr indent="0" marL="0">
+            <a:pPr marL="0" indent="0">
               <a:lnSpc>
                 <a:spcPts val="2000"/>
               </a:lnSpc>
@@ -2443,6 +2277,7 @@
         <a:solidFill>
           <a:srgbClr val="F4F7F6"/>
         </a:solidFill>
+        <a:effectLst/>
       </p:bgPr>
     </p:bg>
     <p:spTree>
@@ -2478,6 +2313,13 @@
           </a:solidFill>
           <a:ln/>
         </p:spPr>
+        <p:txBody>
+          <a:bodyPr/>
+          <a:lstStyle/>
+          <a:p>
+            <a:endParaRPr lang="en-PK"/>
+          </a:p>
+        </p:txBody>
       </p:sp>
       <p:sp>
         <p:nvSpPr>
@@ -2498,6 +2340,13 @@
           </a:solidFill>
           <a:ln/>
         </p:spPr>
+        <p:txBody>
+          <a:bodyPr/>
+          <a:lstStyle/>
+          <a:p>
+            <a:endParaRPr lang="en-PK"/>
+          </a:p>
+        </p:txBody>
       </p:sp>
       <p:sp>
         <p:nvSpPr>
@@ -2518,6 +2367,13 @@
           </a:solidFill>
           <a:ln/>
         </p:spPr>
+        <p:txBody>
+          <a:bodyPr/>
+          <a:lstStyle/>
+          <a:p>
+            <a:endParaRPr lang="en-PK"/>
+          </a:p>
+        </p:txBody>
       </p:sp>
       <p:sp>
         <p:nvSpPr>
@@ -2540,11 +2396,11 @@
           <a:bodyPr wrap="square" rtlCol="0" anchor="ctr"/>
           <a:lstStyle/>
           <a:p>
-            <a:pPr indent="0" marL="0">
+            <a:pPr marL="0" indent="0">
               <a:buNone/>
             </a:pPr>
             <a:r>
-              <a:rPr lang="en-US" sz="1150" b="1" spc="200" kern="0" dirty="0">
+              <a:rPr lang="en-US" sz="1150" b="1" kern="0" spc="200" dirty="0">
                 <a:solidFill>
                   <a:srgbClr val="5EEAD4"/>
                 </a:solidFill>
@@ -2579,7 +2435,7 @@
           <a:bodyPr wrap="square" rtlCol="0" anchor="ctr"/>
           <a:lstStyle/>
           <a:p>
-            <a:pPr indent="0" marL="0">
+            <a:pPr marL="0" indent="0">
               <a:buNone/>
             </a:pPr>
             <a:r>
@@ -2618,6 +2474,13 @@
           </a:solidFill>
           <a:ln/>
         </p:spPr>
+        <p:txBody>
+          <a:bodyPr/>
+          <a:lstStyle/>
+          <a:p>
+            <a:endParaRPr lang="en-PK"/>
+          </a:p>
+        </p:txBody>
       </p:sp>
       <p:sp>
         <p:nvSpPr>
@@ -2638,6 +2501,13 @@
           </a:solidFill>
           <a:ln/>
         </p:spPr>
+        <p:txBody>
+          <a:bodyPr/>
+          <a:lstStyle/>
+          <a:p>
+            <a:endParaRPr lang="en-PK"/>
+          </a:p>
+        </p:txBody>
       </p:sp>
       <p:sp>
         <p:nvSpPr>
@@ -2658,6 +2528,13 @@
           </a:solidFill>
           <a:ln/>
         </p:spPr>
+        <p:txBody>
+          <a:bodyPr/>
+          <a:lstStyle/>
+          <a:p>
+            <a:endParaRPr lang="en-PK"/>
+          </a:p>
+        </p:txBody>
       </p:sp>
       <p:sp>
         <p:nvSpPr>
@@ -2678,6 +2555,13 @@
           </a:solidFill>
           <a:ln/>
         </p:spPr>
+        <p:txBody>
+          <a:bodyPr/>
+          <a:lstStyle/>
+          <a:p>
+            <a:endParaRPr lang="en-PK"/>
+          </a:p>
+        </p:txBody>
       </p:sp>
       <p:sp>
         <p:nvSpPr>
@@ -2698,6 +2582,13 @@
           </a:solidFill>
           <a:ln/>
         </p:spPr>
+        <p:txBody>
+          <a:bodyPr/>
+          <a:lstStyle/>
+          <a:p>
+            <a:endParaRPr lang="en-PK"/>
+          </a:p>
+        </p:txBody>
       </p:sp>
       <p:sp>
         <p:nvSpPr>
@@ -2718,6 +2609,13 @@
           </a:solidFill>
           <a:ln/>
         </p:spPr>
+        <p:txBody>
+          <a:bodyPr/>
+          <a:lstStyle/>
+          <a:p>
+            <a:endParaRPr lang="en-PK"/>
+          </a:p>
+        </p:txBody>
       </p:sp>
       <p:sp>
         <p:nvSpPr>
@@ -2738,6 +2636,13 @@
           </a:solidFill>
           <a:ln/>
         </p:spPr>
+        <p:txBody>
+          <a:bodyPr/>
+          <a:lstStyle/>
+          <a:p>
+            <a:endParaRPr lang="en-PK"/>
+          </a:p>
+        </p:txBody>
       </p:sp>
       <p:sp>
         <p:nvSpPr>
@@ -2760,7 +2665,7 @@
           <a:bodyPr wrap="square" rtlCol="0" anchor="ctr"/>
           <a:lstStyle/>
           <a:p>
-            <a:pPr indent="0" marL="0">
+            <a:pPr marL="0" indent="0">
               <a:buNone/>
             </a:pPr>
             <a:r>
@@ -2799,6 +2704,13 @@
           </a:solidFill>
           <a:ln/>
         </p:spPr>
+        <p:txBody>
+          <a:bodyPr/>
+          <a:lstStyle/>
+          <a:p>
+            <a:endParaRPr lang="en-PK"/>
+          </a:p>
+        </p:txBody>
       </p:sp>
       <p:sp>
         <p:nvSpPr>
@@ -2821,7 +2733,7 @@
           <a:bodyPr wrap="square" rtlCol="0" anchor="ctr"/>
           <a:lstStyle/>
           <a:p>
-            <a:pPr algn="ctr" indent="0" marL="0">
+            <a:pPr marL="0" indent="0" algn="ctr">
               <a:buNone/>
             </a:pPr>
             <a:r>
@@ -2865,13 +2777,20 @@
             <a:prstDash val="solid"/>
           </a:ln>
           <a:effectLst>
-            <a:outerShdw sx="100000" sy="100000" kx="0" ky="0" algn="bl" rotWithShape="0" blurRad="127000" dist="25400" dir="5400000">
+            <a:outerShdw blurRad="127000" dist="25400" dir="5400000" algn="bl" rotWithShape="0">
               <a:srgbClr val="0C1A1A">
                 <a:alpha val="10000"/>
               </a:srgbClr>
             </a:outerShdw>
           </a:effectLst>
         </p:spPr>
+        <p:txBody>
+          <a:bodyPr/>
+          <a:lstStyle/>
+          <a:p>
+            <a:endParaRPr lang="en-PK"/>
+          </a:p>
+        </p:txBody>
       </p:sp>
       <p:sp>
         <p:nvSpPr>
@@ -2892,6 +2811,13 @@
           </a:solidFill>
           <a:ln/>
         </p:spPr>
+        <p:txBody>
+          <a:bodyPr/>
+          <a:lstStyle/>
+          <a:p>
+            <a:endParaRPr lang="en-PK"/>
+          </a:p>
+        </p:txBody>
       </p:sp>
       <p:sp>
         <p:nvSpPr>
@@ -2914,7 +2840,7 @@
           <a:bodyPr wrap="square" rtlCol="0" anchor="ctr"/>
           <a:lstStyle/>
           <a:p>
-            <a:pPr indent="0" marL="0">
+            <a:pPr marL="0" indent="0">
               <a:lnSpc>
                 <a:spcPts val="2800"/>
               </a:lnSpc>
@@ -2956,7 +2882,7 @@
           <a:bodyPr wrap="square" rtlCol="0" anchor="ctr"/>
           <a:lstStyle/>
           <a:p>
-            <a:pPr indent="0" marL="0">
+            <a:pPr marL="0" indent="0">
               <a:buNone/>
             </a:pPr>
             <a:r>
@@ -3000,13 +2926,20 @@
             <a:prstDash val="solid"/>
           </a:ln>
           <a:effectLst>
-            <a:outerShdw sx="100000" sy="100000" kx="0" ky="0" algn="bl" rotWithShape="0" blurRad="127000" dist="25400" dir="5400000">
+            <a:outerShdw blurRad="127000" dist="25400" dir="5400000" algn="bl" rotWithShape="0">
               <a:srgbClr val="0C1A1A">
                 <a:alpha val="10000"/>
               </a:srgbClr>
             </a:outerShdw>
           </a:effectLst>
         </p:spPr>
+        <p:txBody>
+          <a:bodyPr/>
+          <a:lstStyle/>
+          <a:p>
+            <a:endParaRPr lang="en-PK"/>
+          </a:p>
+        </p:txBody>
       </p:sp>
       <p:sp>
         <p:nvSpPr>
@@ -3041,13 +2974,16 @@
                 <a:solidFill>
                   <a:srgbClr val="2E3B3D"/>
                 </a:solidFill>
-                <a:latin typeface="Verdana" pitchFamily="34" charset="0"/>
-                <a:ea typeface="Verdana" pitchFamily="34" charset="-122"/>
+                <a:latin typeface="Verdana" panose="020B0604030504040204" pitchFamily="34" charset="0"/>
+                <a:ea typeface="Verdana" panose="020B0604030504040204" pitchFamily="34" charset="0"/>
                 <a:cs typeface="Verdana" pitchFamily="34" charset="-120"/>
               </a:rPr>
               <a:t>Meta only - no Google or TikTok Ads</a:t>
             </a:r>
-            <a:endParaRPr lang="en-US" sz="1450" dirty="0"/>
+            <a:endParaRPr lang="en-US" sz="1450" dirty="0">
+              <a:latin typeface="Verdana" panose="020B0604030504040204" pitchFamily="34" charset="0"/>
+              <a:ea typeface="Verdana" panose="020B0604030504040204" pitchFamily="34" charset="0"/>
+            </a:endParaRPr>
           </a:p>
           <a:p>
             <a:pPr marL="177800" indent="-177800">
@@ -3062,13 +2998,16 @@
                 <a:solidFill>
                   <a:srgbClr val="2E3B3D"/>
                 </a:solidFill>
-                <a:latin typeface="Verdana" pitchFamily="34" charset="0"/>
-                <a:ea typeface="Verdana" pitchFamily="34" charset="-122"/>
+                <a:latin typeface="Verdana" panose="020B0604030504040204" pitchFamily="34" charset="0"/>
+                <a:ea typeface="Verdana" panose="020B0604030504040204" pitchFamily="34" charset="0"/>
                 <a:cs typeface="Verdana" pitchFamily="34" charset="-120"/>
               </a:rPr>
               <a:t>Final ad approval rests with Meta's review</a:t>
             </a:r>
-            <a:endParaRPr lang="en-US" sz="1450" dirty="0"/>
+            <a:endParaRPr lang="en-US" sz="1450" dirty="0">
+              <a:latin typeface="Verdana" panose="020B0604030504040204" pitchFamily="34" charset="0"/>
+              <a:ea typeface="Verdana" panose="020B0604030504040204" pitchFamily="34" charset="0"/>
+            </a:endParaRPr>
           </a:p>
           <a:p>
             <a:pPr marL="177800" indent="-177800">
@@ -3083,13 +3022,16 @@
                 <a:solidFill>
                   <a:srgbClr val="2E3B3D"/>
                 </a:solidFill>
-                <a:latin typeface="Verdana" pitchFamily="34" charset="0"/>
-                <a:ea typeface="Verdana" pitchFamily="34" charset="-122"/>
+                <a:latin typeface="Verdana" panose="020B0604030504040204" pitchFamily="34" charset="0"/>
+                <a:ea typeface="Verdana" panose="020B0604030504040204" pitchFamily="34" charset="0"/>
                 <a:cs typeface="Verdana" pitchFamily="34" charset="-120"/>
               </a:rPr>
               <a:t>Targeting depends on third-party geocoding</a:t>
             </a:r>
-            <a:endParaRPr lang="en-US" sz="1450" dirty="0"/>
+            <a:endParaRPr lang="en-US" sz="1450" dirty="0">
+              <a:latin typeface="Verdana" panose="020B0604030504040204" pitchFamily="34" charset="0"/>
+              <a:ea typeface="Verdana" panose="020B0604030504040204" pitchFamily="34" charset="0"/>
+            </a:endParaRPr>
           </a:p>
           <a:p>
             <a:pPr marL="177800" indent="-177800">
@@ -3104,13 +3046,16 @@
                 <a:solidFill>
                   <a:srgbClr val="2E3B3D"/>
                 </a:solidFill>
-                <a:latin typeface="Verdana" pitchFamily="34" charset="0"/>
-                <a:ea typeface="Verdana" pitchFamily="34" charset="-122"/>
+                <a:latin typeface="Verdana" panose="020B0604030504040204" pitchFamily="34" charset="0"/>
+                <a:ea typeface="Verdana" panose="020B0604030504040204" pitchFamily="34" charset="0"/>
                 <a:cs typeface="Verdana" pitchFamily="34" charset="-120"/>
               </a:rPr>
               <a:t>No A/B testing or budget optimisation yet</a:t>
             </a:r>
-            <a:endParaRPr lang="en-US" sz="1450" dirty="0"/>
+            <a:endParaRPr lang="en-US" sz="1450" dirty="0">
+              <a:latin typeface="Verdana" panose="020B0604030504040204" pitchFamily="34" charset="0"/>
+              <a:ea typeface="Verdana" panose="020B0604030504040204" pitchFamily="34" charset="0"/>
+            </a:endParaRPr>
           </a:p>
           <a:p>
             <a:pPr marL="177800" indent="-177800">
@@ -3125,11 +3070,22 @@
                 <a:solidFill>
                   <a:srgbClr val="2E3B3D"/>
                 </a:solidFill>
-                <a:latin typeface="Verdana" pitchFamily="34" charset="0"/>
-                <a:ea typeface="Verdana" pitchFamily="34" charset="-122"/>
-                <a:cs typeface="Verdana" pitchFamily="34" charset="-120"/>
-              </a:rPr>
-              <a:t>Meta OAuth tokens need periodic reconnection</a:t>
+                <a:latin typeface="Verdana" panose="020B0604030504040204" pitchFamily="34" charset="0"/>
+                <a:ea typeface="Verdana" panose="020B0604030504040204" pitchFamily="34" charset="0"/>
+                <a:cs typeface="Verdana" pitchFamily="34" charset="-120"/>
+              </a:rPr>
+              <a:t>Meta OAuth tokens need periodic reconnectio</a:t>
+            </a:r>
+            <a:r>
+              <a:rPr lang="en-US" sz="1450" dirty="0">
+                <a:solidFill>
+                  <a:srgbClr val="2E3B3D"/>
+                </a:solidFill>
+                <a:latin typeface="Verdana" pitchFamily="34" charset="0"/>
+                <a:ea typeface="Verdana" pitchFamily="34" charset="-122"/>
+                <a:cs typeface="Verdana" pitchFamily="34" charset="-120"/>
+              </a:rPr>
+              <a:t>n</a:t>
             </a:r>
             <a:endParaRPr lang="en-US" sz="1450" dirty="0"/>
           </a:p>
@@ -3156,7 +3112,7 @@
           <a:bodyPr wrap="square" rtlCol="0" anchor="ctr"/>
           <a:lstStyle/>
           <a:p>
-            <a:pPr indent="0" marL="0">
+            <a:pPr marL="0" indent="0">
               <a:buNone/>
             </a:pPr>
             <a:r>
@@ -3200,13 +3156,20 @@
             <a:prstDash val="solid"/>
           </a:ln>
           <a:effectLst>
-            <a:outerShdw sx="100000" sy="100000" kx="0" ky="0" algn="bl" rotWithShape="0" blurRad="127000" dist="25400" dir="5400000">
+            <a:outerShdw blurRad="127000" dist="25400" dir="5400000" algn="bl" rotWithShape="0">
               <a:srgbClr val="0C1A1A">
                 <a:alpha val="10000"/>
               </a:srgbClr>
             </a:outerShdw>
           </a:effectLst>
         </p:spPr>
+        <p:txBody>
+          <a:bodyPr/>
+          <a:lstStyle/>
+          <a:p>
+            <a:endParaRPr lang="en-PK"/>
+          </a:p>
+        </p:txBody>
       </p:sp>
       <p:sp>
         <p:nvSpPr>
@@ -3241,13 +3204,16 @@
                 <a:solidFill>
                   <a:srgbClr val="2E3B3D"/>
                 </a:solidFill>
-                <a:latin typeface="Verdana" pitchFamily="34" charset="0"/>
-                <a:ea typeface="Verdana" pitchFamily="34" charset="-122"/>
+                <a:latin typeface="Verdana" panose="020B0604030504040204" pitchFamily="34" charset="0"/>
+                <a:ea typeface="Verdana" panose="020B0604030504040204" pitchFamily="34" charset="0"/>
                 <a:cs typeface="Verdana" pitchFamily="34" charset="-120"/>
               </a:rPr>
               <a:t>Extend to Google, TikTok and LinkedIn Ads</a:t>
             </a:r>
-            <a:endParaRPr lang="en-US" sz="1450" dirty="0"/>
+            <a:endParaRPr lang="en-US" sz="1450" dirty="0">
+              <a:latin typeface="Verdana" panose="020B0604030504040204" pitchFamily="34" charset="0"/>
+              <a:ea typeface="Verdana" panose="020B0604030504040204" pitchFamily="34" charset="0"/>
+            </a:endParaRPr>
           </a:p>
           <a:p>
             <a:pPr marL="177800" indent="-177800">
@@ -3262,13 +3228,16 @@
                 <a:solidFill>
                   <a:srgbClr val="2E3B3D"/>
                 </a:solidFill>
-                <a:latin typeface="Verdana" pitchFamily="34" charset="0"/>
-                <a:ea typeface="Verdana" pitchFamily="34" charset="-122"/>
+                <a:latin typeface="Verdana" panose="020B0604030504040204" pitchFamily="34" charset="0"/>
+                <a:ea typeface="Verdana" panose="020B0604030504040204" pitchFamily="34" charset="0"/>
                 <a:cs typeface="Verdana" pitchFamily="34" charset="-120"/>
               </a:rPr>
               <a:t>Automated A/B testing and budget optimisation</a:t>
             </a:r>
-            <a:endParaRPr lang="en-US" sz="1450" dirty="0"/>
+            <a:endParaRPr lang="en-US" sz="1450" dirty="0">
+              <a:latin typeface="Verdana" panose="020B0604030504040204" pitchFamily="34" charset="0"/>
+              <a:ea typeface="Verdana" panose="020B0604030504040204" pitchFamily="34" charset="0"/>
+            </a:endParaRPr>
           </a:p>
           <a:p>
             <a:pPr marL="177800" indent="-177800">
@@ -3283,13 +3252,16 @@
                 <a:solidFill>
                   <a:srgbClr val="2E3B3D"/>
                 </a:solidFill>
-                <a:latin typeface="Verdana" pitchFamily="34" charset="0"/>
-                <a:ea typeface="Verdana" pitchFamily="34" charset="-122"/>
+                <a:latin typeface="Verdana" panose="020B0604030504040204" pitchFamily="34" charset="0"/>
+                <a:ea typeface="Verdana" panose="020B0604030504040204" pitchFamily="34" charset="0"/>
                 <a:cs typeface="Verdana" pitchFamily="34" charset="-120"/>
               </a:rPr>
               <a:t>Fine-tune a model on performance data</a:t>
             </a:r>
-            <a:endParaRPr lang="en-US" sz="1450" dirty="0"/>
+            <a:endParaRPr lang="en-US" sz="1450" dirty="0">
+              <a:latin typeface="Verdana" panose="020B0604030504040204" pitchFamily="34" charset="0"/>
+              <a:ea typeface="Verdana" panose="020B0604030504040204" pitchFamily="34" charset="0"/>
+            </a:endParaRPr>
           </a:p>
           <a:p>
             <a:pPr marL="177800" indent="-177800">
@@ -3304,13 +3276,16 @@
                 <a:solidFill>
                   <a:srgbClr val="2E3B3D"/>
                 </a:solidFill>
-                <a:latin typeface="Verdana" pitchFamily="34" charset="0"/>
-                <a:ea typeface="Verdana" pitchFamily="34" charset="-122"/>
+                <a:latin typeface="Verdana" panose="020B0604030504040204" pitchFamily="34" charset="0"/>
+                <a:ea typeface="Verdana" panose="020B0604030504040204" pitchFamily="34" charset="0"/>
                 <a:cs typeface="Verdana" pitchFamily="34" charset="-120"/>
               </a:rPr>
               <a:t>Nurturing via Instagram DM, email and voice</a:t>
             </a:r>
-            <a:endParaRPr lang="en-US" sz="1450" dirty="0"/>
+            <a:endParaRPr lang="en-US" sz="1450" dirty="0">
+              <a:latin typeface="Verdana" panose="020B0604030504040204" pitchFamily="34" charset="0"/>
+              <a:ea typeface="Verdana" panose="020B0604030504040204" pitchFamily="34" charset="0"/>
+            </a:endParaRPr>
           </a:p>
           <a:p>
             <a:pPr marL="177800" indent="-177800">
@@ -3325,13 +3300,16 @@
                 <a:solidFill>
                   <a:srgbClr val="2E3B3D"/>
                 </a:solidFill>
-                <a:latin typeface="Verdana" pitchFamily="34" charset="0"/>
-                <a:ea typeface="Verdana" pitchFamily="34" charset="-122"/>
+                <a:latin typeface="Verdana" panose="020B0604030504040204" pitchFamily="34" charset="0"/>
+                <a:ea typeface="Verdana" panose="020B0604030504040204" pitchFamily="34" charset="0"/>
                 <a:cs typeface="Verdana" pitchFamily="34" charset="-120"/>
               </a:rPr>
               <a:t>Multilingual ads and regional compliance</a:t>
             </a:r>
-            <a:endParaRPr lang="en-US" sz="1450" dirty="0"/>
+            <a:endParaRPr lang="en-US" sz="1450" dirty="0">
+              <a:latin typeface="Verdana" panose="020B0604030504040204" pitchFamily="34" charset="0"/>
+              <a:ea typeface="Verdana" panose="020B0604030504040204" pitchFamily="34" charset="0"/>
+            </a:endParaRPr>
           </a:p>
         </p:txBody>
       </p:sp>
@@ -3351,6 +3329,7 @@
         <a:solidFill>
           <a:srgbClr val="042F2E"/>
         </a:solidFill>
+        <a:effectLst/>
       </p:bgPr>
     </p:bg>
     <p:spTree>
@@ -3386,6 +3365,13 @@
           </a:solidFill>
           <a:ln/>
         </p:spPr>
+        <p:txBody>
+          <a:bodyPr/>
+          <a:lstStyle/>
+          <a:p>
+            <a:endParaRPr lang="en-PK"/>
+          </a:p>
+        </p:txBody>
       </p:sp>
       <p:sp>
         <p:nvSpPr>
@@ -3406,6 +3392,13 @@
           </a:solidFill>
           <a:ln/>
         </p:spPr>
+        <p:txBody>
+          <a:bodyPr/>
+          <a:lstStyle/>
+          <a:p>
+            <a:endParaRPr lang="en-PK"/>
+          </a:p>
+        </p:txBody>
       </p:sp>
       <p:sp>
         <p:nvSpPr>
@@ -3426,6 +3419,13 @@
           </a:solidFill>
           <a:ln/>
         </p:spPr>
+        <p:txBody>
+          <a:bodyPr/>
+          <a:lstStyle/>
+          <a:p>
+            <a:endParaRPr lang="en-PK"/>
+          </a:p>
+        </p:txBody>
       </p:sp>
       <p:sp>
         <p:nvSpPr>
@@ -3448,6 +3448,13 @@
           </a:solidFill>
           <a:ln/>
         </p:spPr>
+        <p:txBody>
+          <a:bodyPr/>
+          <a:lstStyle/>
+          <a:p>
+            <a:endParaRPr lang="en-PK"/>
+          </a:p>
+        </p:txBody>
       </p:sp>
       <p:sp>
         <p:nvSpPr>
@@ -3468,6 +3475,13 @@
           </a:solidFill>
           <a:ln/>
         </p:spPr>
+        <p:txBody>
+          <a:bodyPr/>
+          <a:lstStyle/>
+          <a:p>
+            <a:endParaRPr lang="en-PK"/>
+          </a:p>
+        </p:txBody>
       </p:sp>
       <p:sp>
         <p:nvSpPr>
@@ -3488,6 +3502,13 @@
           </a:solidFill>
           <a:ln/>
         </p:spPr>
+        <p:txBody>
+          <a:bodyPr/>
+          <a:lstStyle/>
+          <a:p>
+            <a:endParaRPr lang="en-PK"/>
+          </a:p>
+        </p:txBody>
       </p:sp>
       <p:sp>
         <p:nvSpPr>
@@ -3508,6 +3529,13 @@
           </a:solidFill>
           <a:ln/>
         </p:spPr>
+        <p:txBody>
+          <a:bodyPr/>
+          <a:lstStyle/>
+          <a:p>
+            <a:endParaRPr lang="en-PK"/>
+          </a:p>
+        </p:txBody>
       </p:sp>
       <p:sp>
         <p:nvSpPr>
@@ -3528,6 +3556,13 @@
           </a:solidFill>
           <a:ln/>
         </p:spPr>
+        <p:txBody>
+          <a:bodyPr/>
+          <a:lstStyle/>
+          <a:p>
+            <a:endParaRPr lang="en-PK"/>
+          </a:p>
+        </p:txBody>
       </p:sp>
       <p:sp>
         <p:nvSpPr>
@@ -3550,7 +3585,7 @@
           <a:bodyPr wrap="square" rtlCol="0" anchor="ctr"/>
           <a:lstStyle/>
           <a:p>
-            <a:pPr algn="ctr" indent="0" marL="0">
+            <a:pPr marL="0" indent="0" algn="ctr">
               <a:buNone/>
             </a:pPr>
             <a:r>
@@ -3587,6 +3622,13 @@
           </a:solidFill>
           <a:ln/>
         </p:spPr>
+        <p:txBody>
+          <a:bodyPr/>
+          <a:lstStyle/>
+          <a:p>
+            <a:endParaRPr lang="en-PK"/>
+          </a:p>
+        </p:txBody>
       </p:sp>
       <p:sp>
         <p:nvSpPr>
@@ -3609,7 +3651,7 @@
           <a:bodyPr wrap="square" rtlCol="0" anchor="ctr"/>
           <a:lstStyle/>
           <a:p>
-            <a:pPr algn="ctr" indent="0" marL="0">
+            <a:pPr marL="0" indent="0" algn="ctr">
               <a:buNone/>
             </a:pPr>
             <a:r>
@@ -3648,7 +3690,7 @@
           <a:bodyPr wrap="square" rtlCol="0" anchor="ctr"/>
           <a:lstStyle/>
           <a:p>
-            <a:pPr algn="ctr" indent="0" marL="0">
+            <a:pPr marL="0" indent="0" algn="ctr">
               <a:lnSpc>
                 <a:spcPts val="2400"/>
               </a:lnSpc>
@@ -3668,7 +3710,7 @@
             <a:endParaRPr lang="en-US" sz="1400" dirty="0"/>
           </a:p>
           <a:p>
-            <a:pPr algn="ctr" indent="0" marL="0">
+            <a:pPr marL="0" indent="0" algn="ctr">
               <a:lnSpc>
                 <a:spcPts val="2400"/>
               </a:lnSpc>
@@ -3705,6 +3747,7 @@
         <a:solidFill>
           <a:srgbClr val="F4F7F6"/>
         </a:solidFill>
+        <a:effectLst/>
       </p:bgPr>
     </p:bg>
     <p:spTree>
@@ -3740,6 +3783,13 @@
           </a:solidFill>
           <a:ln/>
         </p:spPr>
+        <p:txBody>
+          <a:bodyPr/>
+          <a:lstStyle/>
+          <a:p>
+            <a:endParaRPr lang="en-PK"/>
+          </a:p>
+        </p:txBody>
       </p:sp>
       <p:sp>
         <p:nvSpPr>
@@ -3760,6 +3810,13 @@
           </a:solidFill>
           <a:ln/>
         </p:spPr>
+        <p:txBody>
+          <a:bodyPr/>
+          <a:lstStyle/>
+          <a:p>
+            <a:endParaRPr lang="en-PK"/>
+          </a:p>
+        </p:txBody>
       </p:sp>
       <p:sp>
         <p:nvSpPr>
@@ -3780,6 +3837,13 @@
           </a:solidFill>
           <a:ln/>
         </p:spPr>
+        <p:txBody>
+          <a:bodyPr/>
+          <a:lstStyle/>
+          <a:p>
+            <a:endParaRPr lang="en-PK"/>
+          </a:p>
+        </p:txBody>
       </p:sp>
       <p:sp>
         <p:nvSpPr>
@@ -3802,11 +3866,11 @@
           <a:bodyPr wrap="square" rtlCol="0" anchor="ctr"/>
           <a:lstStyle/>
           <a:p>
-            <a:pPr indent="0" marL="0">
+            <a:pPr marL="0" indent="0">
               <a:buNone/>
             </a:pPr>
             <a:r>
-              <a:rPr lang="en-US" sz="1150" b="1" spc="200" kern="0" dirty="0">
+              <a:rPr lang="en-US" sz="1150" b="1" kern="0" spc="200" dirty="0">
                 <a:solidFill>
                   <a:srgbClr val="5EEAD4"/>
                 </a:solidFill>
@@ -3841,7 +3905,7 @@
           <a:bodyPr wrap="square" rtlCol="0" anchor="ctr"/>
           <a:lstStyle/>
           <a:p>
-            <a:pPr indent="0" marL="0">
+            <a:pPr marL="0" indent="0">
               <a:buNone/>
             </a:pPr>
             <a:r>
@@ -3880,6 +3944,13 @@
           </a:solidFill>
           <a:ln/>
         </p:spPr>
+        <p:txBody>
+          <a:bodyPr/>
+          <a:lstStyle/>
+          <a:p>
+            <a:endParaRPr lang="en-PK"/>
+          </a:p>
+        </p:txBody>
       </p:sp>
       <p:sp>
         <p:nvSpPr>
@@ -3900,6 +3971,13 @@
           </a:solidFill>
           <a:ln/>
         </p:spPr>
+        <p:txBody>
+          <a:bodyPr/>
+          <a:lstStyle/>
+          <a:p>
+            <a:endParaRPr lang="en-PK"/>
+          </a:p>
+        </p:txBody>
       </p:sp>
       <p:sp>
         <p:nvSpPr>
@@ -3920,6 +3998,13 @@
           </a:solidFill>
           <a:ln/>
         </p:spPr>
+        <p:txBody>
+          <a:bodyPr/>
+          <a:lstStyle/>
+          <a:p>
+            <a:endParaRPr lang="en-PK"/>
+          </a:p>
+        </p:txBody>
       </p:sp>
       <p:sp>
         <p:nvSpPr>
@@ -3940,6 +4025,13 @@
           </a:solidFill>
           <a:ln/>
         </p:spPr>
+        <p:txBody>
+          <a:bodyPr/>
+          <a:lstStyle/>
+          <a:p>
+            <a:endParaRPr lang="en-PK"/>
+          </a:p>
+        </p:txBody>
       </p:sp>
       <p:sp>
         <p:nvSpPr>
@@ -3960,6 +4052,13 @@
           </a:solidFill>
           <a:ln/>
         </p:spPr>
+        <p:txBody>
+          <a:bodyPr/>
+          <a:lstStyle/>
+          <a:p>
+            <a:endParaRPr lang="en-PK"/>
+          </a:p>
+        </p:txBody>
       </p:sp>
       <p:sp>
         <p:nvSpPr>
@@ -3980,6 +4079,13 @@
           </a:solidFill>
           <a:ln/>
         </p:spPr>
+        <p:txBody>
+          <a:bodyPr/>
+          <a:lstStyle/>
+          <a:p>
+            <a:endParaRPr lang="en-PK"/>
+          </a:p>
+        </p:txBody>
       </p:sp>
       <p:sp>
         <p:nvSpPr>
@@ -4000,6 +4106,13 @@
           </a:solidFill>
           <a:ln/>
         </p:spPr>
+        <p:txBody>
+          <a:bodyPr/>
+          <a:lstStyle/>
+          <a:p>
+            <a:endParaRPr lang="en-PK"/>
+          </a:p>
+        </p:txBody>
       </p:sp>
       <p:sp>
         <p:nvSpPr>
@@ -4022,7 +4135,7 @@
           <a:bodyPr wrap="square" rtlCol="0" anchor="ctr"/>
           <a:lstStyle/>
           <a:p>
-            <a:pPr indent="0" marL="0">
+            <a:pPr marL="0" indent="0">
               <a:buNone/>
             </a:pPr>
             <a:r>
@@ -4061,6 +4174,13 @@
           </a:solidFill>
           <a:ln/>
         </p:spPr>
+        <p:txBody>
+          <a:bodyPr/>
+          <a:lstStyle/>
+          <a:p>
+            <a:endParaRPr lang="en-PK"/>
+          </a:p>
+        </p:txBody>
       </p:sp>
       <p:sp>
         <p:nvSpPr>
@@ -4083,7 +4203,7 @@
           <a:bodyPr wrap="square" rtlCol="0" anchor="ctr"/>
           <a:lstStyle/>
           <a:p>
-            <a:pPr algn="ctr" indent="0" marL="0">
+            <a:pPr marL="0" indent="0" algn="ctr">
               <a:buNone/>
             </a:pPr>
             <a:r>
@@ -4127,13 +4247,20 @@
             <a:prstDash val="solid"/>
           </a:ln>
           <a:effectLst>
-            <a:outerShdw sx="100000" sy="100000" kx="0" ky="0" algn="bl" rotWithShape="0" blurRad="127000" dist="25400" dir="5400000">
+            <a:outerShdw blurRad="127000" dist="25400" dir="5400000" algn="bl" rotWithShape="0">
               <a:srgbClr val="0C1A1A">
                 <a:alpha val="10000"/>
               </a:srgbClr>
             </a:outerShdw>
           </a:effectLst>
         </p:spPr>
+        <p:txBody>
+          <a:bodyPr/>
+          <a:lstStyle/>
+          <a:p>
+            <a:endParaRPr lang="en-PK"/>
+          </a:p>
+        </p:txBody>
       </p:sp>
       <p:sp>
         <p:nvSpPr>
@@ -4154,6 +4281,13 @@
           </a:solidFill>
           <a:ln/>
         </p:spPr>
+        <p:txBody>
+          <a:bodyPr/>
+          <a:lstStyle/>
+          <a:p>
+            <a:endParaRPr lang="en-PK"/>
+          </a:p>
+        </p:txBody>
       </p:sp>
       <p:sp>
         <p:nvSpPr>
@@ -4176,11 +4310,11 @@
           <a:bodyPr wrap="square" rtlCol="0" anchor="ctr"/>
           <a:lstStyle/>
           <a:p>
-            <a:pPr indent="0" marL="0">
+            <a:pPr marL="0" indent="0">
               <a:buNone/>
             </a:pPr>
             <a:r>
-              <a:rPr lang="en-US" sz="1200" b="1" spc="150" kern="0" dirty="0">
+              <a:rPr lang="en-US" sz="1200" b="1" kern="0" spc="150" dirty="0">
                 <a:solidFill>
                   <a:srgbClr val="0F766E"/>
                 </a:solidFill>
@@ -4215,7 +4349,7 @@
           <a:bodyPr wrap="square" rtlCol="0" anchor="ctr"/>
           <a:lstStyle/>
           <a:p>
-            <a:pPr indent="0" marL="0">
+            <a:pPr marL="0" indent="0">
               <a:buNone/>
             </a:pPr>
             <a:r>
@@ -4254,7 +4388,7 @@
           <a:bodyPr wrap="square" rtlCol="0" anchor="ctr"/>
           <a:lstStyle/>
           <a:p>
-            <a:pPr indent="0" marL="0">
+            <a:pPr marL="0" indent="0">
               <a:buNone/>
             </a:pPr>
             <a:r>
@@ -4298,13 +4432,20 @@
             <a:prstDash val="solid"/>
           </a:ln>
           <a:effectLst>
-            <a:outerShdw sx="100000" sy="100000" kx="0" ky="0" algn="bl" rotWithShape="0" blurRad="127000" dist="25400" dir="5400000">
+            <a:outerShdw blurRad="127000" dist="25400" dir="5400000" algn="bl" rotWithShape="0">
               <a:srgbClr val="0C1A1A">
                 <a:alpha val="10000"/>
               </a:srgbClr>
             </a:outerShdw>
           </a:effectLst>
         </p:spPr>
+        <p:txBody>
+          <a:bodyPr/>
+          <a:lstStyle/>
+          <a:p>
+            <a:endParaRPr lang="en-PK"/>
+          </a:p>
+        </p:txBody>
       </p:sp>
       <p:sp>
         <p:nvSpPr>
@@ -4327,6 +4468,13 @@
           </a:solidFill>
           <a:ln/>
         </p:spPr>
+        <p:txBody>
+          <a:bodyPr/>
+          <a:lstStyle/>
+          <a:p>
+            <a:endParaRPr lang="en-PK"/>
+          </a:p>
+        </p:txBody>
       </p:sp>
       <p:sp>
         <p:nvSpPr>
@@ -4349,7 +4497,7 @@
           <a:bodyPr wrap="square" rtlCol="0" anchor="ctr"/>
           <a:lstStyle/>
           <a:p>
-            <a:pPr algn="ctr" indent="0" marL="0">
+            <a:pPr marL="0" indent="0" algn="ctr">
               <a:buNone/>
             </a:pPr>
             <a:r>
@@ -4388,7 +4536,7 @@
           <a:bodyPr wrap="square" rtlCol="0" anchor="ctr"/>
           <a:lstStyle/>
           <a:p>
-            <a:pPr indent="0" marL="0">
+            <a:pPr marL="0" indent="0">
               <a:buNone/>
             </a:pPr>
             <a:r>
@@ -4427,7 +4575,7 @@
           <a:bodyPr wrap="square" rtlCol="0" anchor="ctr"/>
           <a:lstStyle/>
           <a:p>
-            <a:pPr indent="0" marL="0">
+            <a:pPr marL="0" indent="0">
               <a:lnSpc>
                 <a:spcPts val="2400"/>
               </a:lnSpc>
@@ -4474,13 +4622,20 @@
             <a:prstDash val="solid"/>
           </a:ln>
           <a:effectLst>
-            <a:outerShdw sx="100000" sy="100000" kx="0" ky="0" algn="bl" rotWithShape="0" blurRad="127000" dist="25400" dir="5400000">
+            <a:outerShdw blurRad="127000" dist="25400" dir="5400000" algn="bl" rotWithShape="0">
               <a:srgbClr val="0C1A1A">
                 <a:alpha val="10000"/>
               </a:srgbClr>
             </a:outerShdw>
           </a:effectLst>
         </p:spPr>
+        <p:txBody>
+          <a:bodyPr/>
+          <a:lstStyle/>
+          <a:p>
+            <a:endParaRPr lang="en-PK"/>
+          </a:p>
+        </p:txBody>
       </p:sp>
       <p:sp>
         <p:nvSpPr>
@@ -4503,6 +4658,13 @@
           </a:solidFill>
           <a:ln/>
         </p:spPr>
+        <p:txBody>
+          <a:bodyPr/>
+          <a:lstStyle/>
+          <a:p>
+            <a:endParaRPr lang="en-PK"/>
+          </a:p>
+        </p:txBody>
       </p:sp>
       <p:sp>
         <p:nvSpPr>
@@ -4525,7 +4687,7 @@
           <a:bodyPr wrap="square" rtlCol="0" anchor="ctr"/>
           <a:lstStyle/>
           <a:p>
-            <a:pPr algn="ctr" indent="0" marL="0">
+            <a:pPr marL="0" indent="0" algn="ctr">
               <a:buNone/>
             </a:pPr>
             <a:r>
@@ -4564,7 +4726,7 @@
           <a:bodyPr wrap="square" rtlCol="0" anchor="ctr"/>
           <a:lstStyle/>
           <a:p>
-            <a:pPr indent="0" marL="0">
+            <a:pPr marL="0" indent="0">
               <a:buNone/>
             </a:pPr>
             <a:r>
@@ -4603,7 +4765,7 @@
           <a:bodyPr wrap="square" rtlCol="0" anchor="ctr"/>
           <a:lstStyle/>
           <a:p>
-            <a:pPr indent="0" marL="0">
+            <a:pPr marL="0" indent="0">
               <a:lnSpc>
                 <a:spcPts val="2400"/>
               </a:lnSpc>
@@ -4650,13 +4812,20 @@
             <a:prstDash val="solid"/>
           </a:ln>
           <a:effectLst>
-            <a:outerShdw sx="100000" sy="100000" kx="0" ky="0" algn="bl" rotWithShape="0" blurRad="127000" dist="25400" dir="5400000">
+            <a:outerShdw blurRad="127000" dist="25400" dir="5400000" algn="bl" rotWithShape="0">
               <a:srgbClr val="0C1A1A">
                 <a:alpha val="10000"/>
               </a:srgbClr>
             </a:outerShdw>
           </a:effectLst>
         </p:spPr>
+        <p:txBody>
+          <a:bodyPr/>
+          <a:lstStyle/>
+          <a:p>
+            <a:endParaRPr lang="en-PK"/>
+          </a:p>
+        </p:txBody>
       </p:sp>
       <p:sp>
         <p:nvSpPr>
@@ -4679,6 +4848,13 @@
           </a:solidFill>
           <a:ln/>
         </p:spPr>
+        <p:txBody>
+          <a:bodyPr/>
+          <a:lstStyle/>
+          <a:p>
+            <a:endParaRPr lang="en-PK"/>
+          </a:p>
+        </p:txBody>
       </p:sp>
       <p:sp>
         <p:nvSpPr>
@@ -4701,7 +4877,7 @@
           <a:bodyPr wrap="square" rtlCol="0" anchor="ctr"/>
           <a:lstStyle/>
           <a:p>
-            <a:pPr algn="ctr" indent="0" marL="0">
+            <a:pPr marL="0" indent="0" algn="ctr">
               <a:buNone/>
             </a:pPr>
             <a:r>
@@ -4740,7 +4916,7 @@
           <a:bodyPr wrap="square" rtlCol="0" anchor="ctr"/>
           <a:lstStyle/>
           <a:p>
-            <a:pPr indent="0" marL="0">
+            <a:pPr marL="0" indent="0">
               <a:buNone/>
             </a:pPr>
             <a:r>
@@ -4779,7 +4955,7 @@
           <a:bodyPr wrap="square" rtlCol="0" anchor="ctr"/>
           <a:lstStyle/>
           <a:p>
-            <a:pPr indent="0" marL="0">
+            <a:pPr marL="0" indent="0">
               <a:lnSpc>
                 <a:spcPts val="2400"/>
               </a:lnSpc>
@@ -4816,6 +4992,7 @@
         <a:solidFill>
           <a:srgbClr val="F4F7F6"/>
         </a:solidFill>
+        <a:effectLst/>
       </p:bgPr>
     </p:bg>
     <p:spTree>
@@ -4851,6 +5028,13 @@
           </a:solidFill>
           <a:ln/>
         </p:spPr>
+        <p:txBody>
+          <a:bodyPr/>
+          <a:lstStyle/>
+          <a:p>
+            <a:endParaRPr lang="en-PK"/>
+          </a:p>
+        </p:txBody>
       </p:sp>
       <p:sp>
         <p:nvSpPr>
@@ -4871,6 +5055,13 @@
           </a:solidFill>
           <a:ln/>
         </p:spPr>
+        <p:txBody>
+          <a:bodyPr/>
+          <a:lstStyle/>
+          <a:p>
+            <a:endParaRPr lang="en-PK"/>
+          </a:p>
+        </p:txBody>
       </p:sp>
       <p:sp>
         <p:nvSpPr>
@@ -4891,6 +5082,13 @@
           </a:solidFill>
           <a:ln/>
         </p:spPr>
+        <p:txBody>
+          <a:bodyPr/>
+          <a:lstStyle/>
+          <a:p>
+            <a:endParaRPr lang="en-PK"/>
+          </a:p>
+        </p:txBody>
       </p:sp>
       <p:sp>
         <p:nvSpPr>
@@ -4913,11 +5111,11 @@
           <a:bodyPr wrap="square" rtlCol="0" anchor="ctr"/>
           <a:lstStyle/>
           <a:p>
-            <a:pPr indent="0" marL="0">
+            <a:pPr marL="0" indent="0">
               <a:buNone/>
             </a:pPr>
             <a:r>
-              <a:rPr lang="en-US" sz="1150" b="1" spc="200" kern="0" dirty="0">
+              <a:rPr lang="en-US" sz="1150" b="1" kern="0" spc="200" dirty="0">
                 <a:solidFill>
                   <a:srgbClr val="5EEAD4"/>
                 </a:solidFill>
@@ -4952,7 +5150,7 @@
           <a:bodyPr wrap="square" rtlCol="0" anchor="ctr"/>
           <a:lstStyle/>
           <a:p>
-            <a:pPr indent="0" marL="0">
+            <a:pPr marL="0" indent="0">
               <a:buNone/>
             </a:pPr>
             <a:r>
@@ -4991,6 +5189,13 @@
           </a:solidFill>
           <a:ln/>
         </p:spPr>
+        <p:txBody>
+          <a:bodyPr/>
+          <a:lstStyle/>
+          <a:p>
+            <a:endParaRPr lang="en-PK"/>
+          </a:p>
+        </p:txBody>
       </p:sp>
       <p:sp>
         <p:nvSpPr>
@@ -5011,6 +5216,13 @@
           </a:solidFill>
           <a:ln/>
         </p:spPr>
+        <p:txBody>
+          <a:bodyPr/>
+          <a:lstStyle/>
+          <a:p>
+            <a:endParaRPr lang="en-PK"/>
+          </a:p>
+        </p:txBody>
       </p:sp>
       <p:sp>
         <p:nvSpPr>
@@ -5031,6 +5243,13 @@
           </a:solidFill>
           <a:ln/>
         </p:spPr>
+        <p:txBody>
+          <a:bodyPr/>
+          <a:lstStyle/>
+          <a:p>
+            <a:endParaRPr lang="en-PK"/>
+          </a:p>
+        </p:txBody>
       </p:sp>
       <p:sp>
         <p:nvSpPr>
@@ -5051,6 +5270,13 @@
           </a:solidFill>
           <a:ln/>
         </p:spPr>
+        <p:txBody>
+          <a:bodyPr/>
+          <a:lstStyle/>
+          <a:p>
+            <a:endParaRPr lang="en-PK"/>
+          </a:p>
+        </p:txBody>
       </p:sp>
       <p:sp>
         <p:nvSpPr>
@@ -5071,6 +5297,13 @@
           </a:solidFill>
           <a:ln/>
         </p:spPr>
+        <p:txBody>
+          <a:bodyPr/>
+          <a:lstStyle/>
+          <a:p>
+            <a:endParaRPr lang="en-PK"/>
+          </a:p>
+        </p:txBody>
       </p:sp>
       <p:sp>
         <p:nvSpPr>
@@ -5091,6 +5324,13 @@
           </a:solidFill>
           <a:ln/>
         </p:spPr>
+        <p:txBody>
+          <a:bodyPr/>
+          <a:lstStyle/>
+          <a:p>
+            <a:endParaRPr lang="en-PK"/>
+          </a:p>
+        </p:txBody>
       </p:sp>
       <p:sp>
         <p:nvSpPr>
@@ -5111,6 +5351,13 @@
           </a:solidFill>
           <a:ln/>
         </p:spPr>
+        <p:txBody>
+          <a:bodyPr/>
+          <a:lstStyle/>
+          <a:p>
+            <a:endParaRPr lang="en-PK"/>
+          </a:p>
+        </p:txBody>
       </p:sp>
       <p:sp>
         <p:nvSpPr>
@@ -5133,7 +5380,7 @@
           <a:bodyPr wrap="square" rtlCol="0" anchor="ctr"/>
           <a:lstStyle/>
           <a:p>
-            <a:pPr indent="0" marL="0">
+            <a:pPr marL="0" indent="0">
               <a:buNone/>
             </a:pPr>
             <a:r>
@@ -5172,6 +5419,13 @@
           </a:solidFill>
           <a:ln/>
         </p:spPr>
+        <p:txBody>
+          <a:bodyPr/>
+          <a:lstStyle/>
+          <a:p>
+            <a:endParaRPr lang="en-PK"/>
+          </a:p>
+        </p:txBody>
       </p:sp>
       <p:sp>
         <p:nvSpPr>
@@ -5194,7 +5448,7 @@
           <a:bodyPr wrap="square" rtlCol="0" anchor="ctr"/>
           <a:lstStyle/>
           <a:p>
-            <a:pPr algn="ctr" indent="0" marL="0">
+            <a:pPr marL="0" indent="0" algn="ctr">
               <a:buNone/>
             </a:pPr>
             <a:r>
@@ -5214,30 +5468,48 @@
       </p:sp>
       <p:graphicFrame>
         <p:nvGraphicFramePr>
-          <p:cNvPr id="4" name="Table 0"/>
+          <p:cNvPr id="17" name="Table 0"/>
           <p:cNvGraphicFramePr>
             <a:graphicFrameLocks noGrp="1"/>
           </p:cNvGraphicFramePr>
           <p:nvPr>
             <p:extLst>
               <p:ext uri="{D42A27DB-BD31-4B8C-83A1-F6EECF244321}">
-                <p14:modId xmlns:p14="http://schemas.microsoft.com/office/powerpoint/2010/main" val="1579011935"/>
+                <p14:modId xmlns:p14="http://schemas.microsoft.com/office/powerpoint/2010/main" val="1734085058"/>
               </p:ext>
             </p:extLst>
           </p:nvPr>
         </p:nvGraphicFramePr>
         <p:xfrm>
           <a:off x="502920" y="1691640"/>
-          <a:ext cx="11155680" cy="914400"/>
+          <a:ext cx="11155680" cy="3944112"/>
         </p:xfrm>
         <a:graphic>
           <a:graphicData uri="http://schemas.openxmlformats.org/drawingml/2006/table">
             <a:tbl>
               <a:tblPr/>
               <a:tblGrid>
-                <a:gridCol w="2926080"/>
-                <a:gridCol w="4114800"/>
-                <a:gridCol w="4114800"/>
+                <a:gridCol w="2926080">
+                  <a:extLst>
+                    <a:ext uri="{9D8B030D-6E8A-4147-A177-3AD203B41FA5}">
+                      <a16:colId xmlns:a16="http://schemas.microsoft.com/office/drawing/2014/main" val="20000"/>
+                    </a:ext>
+                  </a:extLst>
+                </a:gridCol>
+                <a:gridCol w="4114800">
+                  <a:extLst>
+                    <a:ext uri="{9D8B030D-6E8A-4147-A177-3AD203B41FA5}">
+                      <a16:colId xmlns:a16="http://schemas.microsoft.com/office/drawing/2014/main" val="20001"/>
+                    </a:ext>
+                  </a:extLst>
+                </a:gridCol>
+                <a:gridCol w="4114800">
+                  <a:extLst>
+                    <a:ext uri="{9D8B030D-6E8A-4147-A177-3AD203B41FA5}">
+                      <a16:colId xmlns:a16="http://schemas.microsoft.com/office/drawing/2014/main" val="20002"/>
+                    </a:ext>
+                  </a:extLst>
+                </a:gridCol>
               </a:tblGrid>
               <a:tr h="457200">
                 <a:tc>
@@ -5245,7 +5517,7 @@
                     <a:bodyPr/>
                     <a:lstStyle/>
                     <a:p>
-                      <a:pPr algn="l" indent="0" marL="0">
+                      <a:pPr marL="0" indent="0" algn="l">
                         <a:buNone/>
                       </a:pPr>
                       <a:r>
@@ -5313,7 +5585,7 @@
                     <a:bodyPr/>
                     <a:lstStyle/>
                     <a:p>
-                      <a:pPr algn="l" indent="0" marL="0">
+                      <a:pPr marL="0" indent="0" algn="l">
                         <a:buNone/>
                       </a:pPr>
                       <a:r>
@@ -5381,7 +5653,7 @@
                     <a:bodyPr/>
                     <a:lstStyle/>
                     <a:p>
-                      <a:pPr algn="l" indent="0" marL="0">
+                      <a:pPr marL="0" indent="0" algn="l">
                         <a:buNone/>
                       </a:pPr>
                       <a:r>
@@ -5444,6 +5716,11 @@
                     </a:solidFill>
                   </a:tcPr>
                 </a:tc>
+                <a:extLst>
+                  <a:ext uri="{0D108BD9-81ED-4DB2-BD59-A6C34878D82A}">
+                    <a16:rowId xmlns:a16="http://schemas.microsoft.com/office/drawing/2014/main" val="10000"/>
+                  </a:ext>
+                </a:extLst>
               </a:tr>
               <a:tr h="658368">
                 <a:tc>
@@ -5451,7 +5728,7 @@
                     <a:bodyPr/>
                     <a:lstStyle/>
                     <a:p>
-                      <a:pPr indent="0" marL="0">
+                      <a:pPr marL="0" indent="0">
                         <a:buNone/>
                       </a:pPr>
                       <a:r>
@@ -5519,11 +5796,11 @@
                     <a:bodyPr/>
                     <a:lstStyle/>
                     <a:p>
-                      <a:pPr indent="0" marL="0">
+                      <a:pPr marL="0" indent="0">
                         <a:buNone/>
                       </a:pPr>
                       <a:r>
-                        <a:rPr lang="en-US" sz="1350" dirty="0">
+                        <a:rPr lang="en-US" sz="1600" dirty="0">
                           <a:solidFill>
                             <a:srgbClr val="2E3B3D"/>
                           </a:solidFill>
@@ -5533,7 +5810,7 @@
                         </a:rPr>
                         <a:t>Steep learning curve, no lead management</a:t>
                       </a:r>
-                      <a:endParaRPr lang="en-US" sz="1350" dirty="0">
+                      <a:endParaRPr lang="en-US" sz="1600" dirty="0">
                         <a:latin typeface="Verdana" charset="0"/>
                         <a:ea typeface="Verdana" charset="0"/>
                         <a:cs typeface="Verdana" charset="0"/>
@@ -5587,11 +5864,11 @@
                     <a:bodyPr/>
                     <a:lstStyle/>
                     <a:p>
-                      <a:pPr indent="0" marL="0">
+                      <a:pPr marL="0" indent="0">
                         <a:buNone/>
                       </a:pPr>
                       <a:r>
-                        <a:rPr lang="en-US" sz="1350" dirty="0">
+                        <a:rPr lang="en-US" sz="1600" dirty="0">
                           <a:solidFill>
                             <a:srgbClr val="0A5C56"/>
                           </a:solidFill>
@@ -5601,7 +5878,7 @@
                         </a:rPr>
                         <a:t>Automates campaigns, centralises leads</a:t>
                       </a:r>
-                      <a:endParaRPr lang="en-US" sz="1350" dirty="0">
+                      <a:endParaRPr lang="en-US" sz="1600" dirty="0">
                         <a:latin typeface="Verdana" charset="0"/>
                         <a:ea typeface="Verdana" charset="0"/>
                         <a:cs typeface="Verdana" charset="0"/>
@@ -5650,6 +5927,11 @@
                     </a:solidFill>
                   </a:tcPr>
                 </a:tc>
+                <a:extLst>
+                  <a:ext uri="{0D108BD9-81ED-4DB2-BD59-A6C34878D82A}">
+                    <a16:rowId xmlns:a16="http://schemas.microsoft.com/office/drawing/2014/main" val="10001"/>
+                  </a:ext>
+                </a:extLst>
               </a:tr>
               <a:tr h="658368">
                 <a:tc>
@@ -5657,7 +5939,7 @@
                     <a:bodyPr/>
                     <a:lstStyle/>
                     <a:p>
-                      <a:pPr indent="0" marL="0">
+                      <a:pPr marL="0" indent="0">
                         <a:buNone/>
                       </a:pPr>
                       <a:r>
@@ -5725,11 +6007,11 @@
                     <a:bodyPr/>
                     <a:lstStyle/>
                     <a:p>
-                      <a:pPr indent="0" marL="0">
+                      <a:pPr marL="0" indent="0">
                         <a:buNone/>
                       </a:pPr>
                       <a:r>
-                        <a:rPr lang="en-US" sz="1350" dirty="0">
+                        <a:rPr lang="en-US" sz="1600" dirty="0">
                           <a:solidFill>
                             <a:srgbClr val="2E3B3D"/>
                           </a:solidFill>
@@ -5739,7 +6021,7 @@
                         </a:rPr>
                         <a:t>Weak AI, no onboarding personalisation</a:t>
                       </a:r>
-                      <a:endParaRPr lang="en-US" sz="1350" dirty="0">
+                      <a:endParaRPr lang="en-US" sz="1600" dirty="0">
                         <a:latin typeface="Verdana" charset="0"/>
                         <a:ea typeface="Verdana" charset="0"/>
                         <a:cs typeface="Verdana" charset="0"/>
@@ -5793,11 +6075,11 @@
                     <a:bodyPr/>
                     <a:lstStyle/>
                     <a:p>
-                      <a:pPr indent="0" marL="0">
+                      <a:pPr marL="0" indent="0">
                         <a:buNone/>
                       </a:pPr>
                       <a:r>
-                        <a:rPr lang="en-US" sz="1350" dirty="0">
+                        <a:rPr lang="en-US" sz="1600" dirty="0">
                           <a:solidFill>
                             <a:srgbClr val="0A5C56"/>
                           </a:solidFill>
@@ -5807,7 +6089,7 @@
                         </a:rPr>
                         <a:t>Industry-aware AI with guided onboarding</a:t>
                       </a:r>
-                      <a:endParaRPr lang="en-US" sz="1350" dirty="0">
+                      <a:endParaRPr lang="en-US" sz="1600" dirty="0">
                         <a:latin typeface="Verdana" charset="0"/>
                         <a:ea typeface="Verdana" charset="0"/>
                         <a:cs typeface="Verdana" charset="0"/>
@@ -5856,6 +6138,11 @@
                     </a:solidFill>
                   </a:tcPr>
                 </a:tc>
+                <a:extLst>
+                  <a:ext uri="{0D108BD9-81ED-4DB2-BD59-A6C34878D82A}">
+                    <a16:rowId xmlns:a16="http://schemas.microsoft.com/office/drawing/2014/main" val="10002"/>
+                  </a:ext>
+                </a:extLst>
               </a:tr>
               <a:tr h="658368">
                 <a:tc>
@@ -5863,7 +6150,7 @@
                     <a:bodyPr/>
                     <a:lstStyle/>
                     <a:p>
-                      <a:pPr indent="0" marL="0">
+                      <a:pPr marL="0" indent="0">
                         <a:buNone/>
                       </a:pPr>
                       <a:r>
@@ -5931,11 +6218,11 @@
                     <a:bodyPr/>
                     <a:lstStyle/>
                     <a:p>
-                      <a:pPr indent="0" marL="0">
+                      <a:pPr marL="0" indent="0">
                         <a:buNone/>
                       </a:pPr>
                       <a:r>
-                        <a:rPr lang="en-US" sz="1350" dirty="0">
+                        <a:rPr lang="en-US" sz="1600" dirty="0">
                           <a:solidFill>
                             <a:srgbClr val="2E3B3D"/>
                           </a:solidFill>
@@ -5945,7 +6232,7 @@
                         </a:rPr>
                         <a:t>Post-launch optimisation only</a:t>
                       </a:r>
-                      <a:endParaRPr lang="en-US" sz="1350" dirty="0">
+                      <a:endParaRPr lang="en-US" sz="1600" dirty="0">
                         <a:latin typeface="Verdana" charset="0"/>
                         <a:ea typeface="Verdana" charset="0"/>
                         <a:cs typeface="Verdana" charset="0"/>
@@ -5999,11 +6286,11 @@
                     <a:bodyPr/>
                     <a:lstStyle/>
                     <a:p>
-                      <a:pPr indent="0" marL="0">
+                      <a:pPr marL="0" indent="0">
                         <a:buNone/>
                       </a:pPr>
                       <a:r>
-                        <a:rPr lang="en-US" sz="1350" dirty="0">
+                        <a:rPr lang="en-US" sz="1600" dirty="0">
                           <a:solidFill>
                             <a:srgbClr val="0A5C56"/>
                           </a:solidFill>
@@ -6013,7 +6300,7 @@
                         </a:rPr>
                         <a:t>Full lifecycle, onboarding to conversion</a:t>
                       </a:r>
-                      <a:endParaRPr lang="en-US" sz="1350" dirty="0">
+                      <a:endParaRPr lang="en-US" sz="1600" dirty="0">
                         <a:latin typeface="Verdana" charset="0"/>
                         <a:ea typeface="Verdana" charset="0"/>
                         <a:cs typeface="Verdana" charset="0"/>
@@ -6062,6 +6349,11 @@
                     </a:solidFill>
                   </a:tcPr>
                 </a:tc>
+                <a:extLst>
+                  <a:ext uri="{0D108BD9-81ED-4DB2-BD59-A6C34878D82A}">
+                    <a16:rowId xmlns:a16="http://schemas.microsoft.com/office/drawing/2014/main" val="10003"/>
+                  </a:ext>
+                </a:extLst>
               </a:tr>
               <a:tr h="658368">
                 <a:tc>
@@ -6069,7 +6361,7 @@
                     <a:bodyPr/>
                     <a:lstStyle/>
                     <a:p>
-                      <a:pPr indent="0" marL="0">
+                      <a:pPr marL="0" indent="0">
                         <a:buNone/>
                       </a:pPr>
                       <a:r>
@@ -6137,11 +6429,11 @@
                     <a:bodyPr/>
                     <a:lstStyle/>
                     <a:p>
-                      <a:pPr indent="0" marL="0">
+                      <a:pPr marL="0" indent="0">
                         <a:buNone/>
                       </a:pPr>
                       <a:r>
-                        <a:rPr lang="en-US" sz="1350" dirty="0">
+                        <a:rPr lang="en-US" sz="1600" dirty="0">
                           <a:solidFill>
                             <a:srgbClr val="2E3B3D"/>
                           </a:solidFill>
@@ -6151,7 +6443,7 @@
                         </a:rPr>
                         <a:t>No Meta integration or compliance</a:t>
                       </a:r>
-                      <a:endParaRPr lang="en-US" sz="1350" dirty="0">
+                      <a:endParaRPr lang="en-US" sz="1600" dirty="0">
                         <a:latin typeface="Verdana" charset="0"/>
                         <a:ea typeface="Verdana" charset="0"/>
                         <a:cs typeface="Verdana" charset="0"/>
@@ -6205,11 +6497,11 @@
                     <a:bodyPr/>
                     <a:lstStyle/>
                     <a:p>
-                      <a:pPr indent="0" marL="0">
+                      <a:pPr marL="0" indent="0">
                         <a:buNone/>
                       </a:pPr>
                       <a:r>
-                        <a:rPr lang="en-US" sz="1350" dirty="0">
+                        <a:rPr lang="en-US" sz="1600" dirty="0">
                           <a:solidFill>
                             <a:srgbClr val="0A5C56"/>
                           </a:solidFill>
@@ -6219,7 +6511,7 @@
                         </a:rPr>
                         <a:t>Compliant, Meta-ready ads auto-deployed</a:t>
                       </a:r>
-                      <a:endParaRPr lang="en-US" sz="1350" dirty="0">
+                      <a:endParaRPr lang="en-US" sz="1600" dirty="0">
                         <a:latin typeface="Verdana" charset="0"/>
                         <a:ea typeface="Verdana" charset="0"/>
                         <a:cs typeface="Verdana" charset="0"/>
@@ -6268,6 +6560,11 @@
                     </a:solidFill>
                   </a:tcPr>
                 </a:tc>
+                <a:extLst>
+                  <a:ext uri="{0D108BD9-81ED-4DB2-BD59-A6C34878D82A}">
+                    <a16:rowId xmlns:a16="http://schemas.microsoft.com/office/drawing/2014/main" val="10004"/>
+                  </a:ext>
+                </a:extLst>
               </a:tr>
               <a:tr h="658368">
                 <a:tc>
@@ -6275,7 +6572,7 @@
                     <a:bodyPr/>
                     <a:lstStyle/>
                     <a:p>
-                      <a:pPr indent="0" marL="0">
+                      <a:pPr marL="0" indent="0">
                         <a:buNone/>
                       </a:pPr>
                       <a:r>
@@ -6343,11 +6640,11 @@
                     <a:bodyPr/>
                     <a:lstStyle/>
                     <a:p>
-                      <a:pPr indent="0" marL="0">
+                      <a:pPr marL="0" indent="0">
                         <a:buNone/>
                       </a:pPr>
                       <a:r>
-                        <a:rPr lang="en-US" sz="1350" dirty="0">
+                        <a:rPr lang="en-US" sz="1600" dirty="0">
                           <a:solidFill>
                             <a:srgbClr val="2E3B3D"/>
                           </a:solidFill>
@@ -6357,7 +6654,7 @@
                         </a:rPr>
                         <a:t>Complex setup, weak AI generation</a:t>
                       </a:r>
-                      <a:endParaRPr lang="en-US" sz="1350" dirty="0">
+                      <a:endParaRPr lang="en-US" sz="1600" dirty="0">
                         <a:latin typeface="Verdana" charset="0"/>
                         <a:ea typeface="Verdana" charset="0"/>
                         <a:cs typeface="Verdana" charset="0"/>
@@ -6411,11 +6708,11 @@
                     <a:bodyPr/>
                     <a:lstStyle/>
                     <a:p>
-                      <a:pPr indent="0" marL="0">
+                      <a:pPr marL="0" indent="0">
                         <a:buNone/>
                       </a:pPr>
                       <a:r>
-                        <a:rPr lang="en-US" sz="1350" dirty="0">
+                        <a:rPr lang="en-US" sz="1600" dirty="0">
                           <a:solidFill>
                             <a:srgbClr val="0A5C56"/>
                           </a:solidFill>
@@ -6425,7 +6722,7 @@
                         </a:rPr>
                         <a:t>AI-first, simplified end-to-end system</a:t>
                       </a:r>
-                      <a:endParaRPr lang="en-US" sz="1350" dirty="0">
+                      <a:endParaRPr lang="en-US" sz="1600" dirty="0">
                         <a:latin typeface="Verdana" charset="0"/>
                         <a:ea typeface="Verdana" charset="0"/>
                         <a:cs typeface="Verdana" charset="0"/>
@@ -6474,6 +6771,11 @@
                     </a:solidFill>
                   </a:tcPr>
                 </a:tc>
+                <a:extLst>
+                  <a:ext uri="{0D108BD9-81ED-4DB2-BD59-A6C34878D82A}">
+                    <a16:rowId xmlns:a16="http://schemas.microsoft.com/office/drawing/2014/main" val="10005"/>
+                  </a:ext>
+                </a:extLst>
               </a:tr>
             </a:tbl>
           </a:graphicData>
@@ -6505,13 +6807,20 @@
             <a:prstDash val="solid"/>
           </a:ln>
           <a:effectLst>
-            <a:outerShdw sx="100000" sy="100000" kx="0" ky="0" algn="bl" rotWithShape="0" blurRad="127000" dist="25400" dir="5400000">
+            <a:outerShdw blurRad="127000" dist="25400" dir="5400000" algn="bl" rotWithShape="0">
               <a:srgbClr val="0C1A1A">
                 <a:alpha val="10000"/>
               </a:srgbClr>
             </a:outerShdw>
           </a:effectLst>
         </p:spPr>
+        <p:txBody>
+          <a:bodyPr/>
+          <a:lstStyle/>
+          <a:p>
+            <a:endParaRPr lang="en-PK"/>
+          </a:p>
+        </p:txBody>
       </p:sp>
       <p:sp>
         <p:nvSpPr>
@@ -6534,7 +6843,7 @@
           <a:bodyPr wrap="square" rtlCol="0" anchor="ctr"/>
           <a:lstStyle/>
           <a:p>
-            <a:pPr indent="0" marL="0">
+            <a:pPr marL="0" indent="0">
               <a:buNone/>
             </a:pPr>
             <a:r>
@@ -6568,6 +6877,7 @@
         <a:solidFill>
           <a:srgbClr val="F4F7F6"/>
         </a:solidFill>
+        <a:effectLst/>
       </p:bgPr>
     </p:bg>
     <p:spTree>
@@ -6603,6 +6913,13 @@
           </a:solidFill>
           <a:ln/>
         </p:spPr>
+        <p:txBody>
+          <a:bodyPr/>
+          <a:lstStyle/>
+          <a:p>
+            <a:endParaRPr lang="en-PK"/>
+          </a:p>
+        </p:txBody>
       </p:sp>
       <p:sp>
         <p:nvSpPr>
@@ -6623,6 +6940,13 @@
           </a:solidFill>
           <a:ln/>
         </p:spPr>
+        <p:txBody>
+          <a:bodyPr/>
+          <a:lstStyle/>
+          <a:p>
+            <a:endParaRPr lang="en-PK"/>
+          </a:p>
+        </p:txBody>
       </p:sp>
       <p:sp>
         <p:nvSpPr>
@@ -6643,6 +6967,13 @@
           </a:solidFill>
           <a:ln/>
         </p:spPr>
+        <p:txBody>
+          <a:bodyPr/>
+          <a:lstStyle/>
+          <a:p>
+            <a:endParaRPr lang="en-PK"/>
+          </a:p>
+        </p:txBody>
       </p:sp>
       <p:sp>
         <p:nvSpPr>
@@ -6665,11 +6996,11 @@
           <a:bodyPr wrap="square" rtlCol="0" anchor="ctr"/>
           <a:lstStyle/>
           <a:p>
-            <a:pPr indent="0" marL="0">
+            <a:pPr marL="0" indent="0">
               <a:buNone/>
             </a:pPr>
             <a:r>
-              <a:rPr lang="en-US" sz="1150" b="1" spc="200" kern="0" dirty="0">
+              <a:rPr lang="en-US" sz="1150" b="1" kern="0" spc="200" dirty="0">
                 <a:solidFill>
                   <a:srgbClr val="5EEAD4"/>
                 </a:solidFill>
@@ -6704,7 +7035,7 @@
           <a:bodyPr wrap="square" rtlCol="0" anchor="ctr"/>
           <a:lstStyle/>
           <a:p>
-            <a:pPr indent="0" marL="0">
+            <a:pPr marL="0" indent="0">
               <a:buNone/>
             </a:pPr>
             <a:r>
@@ -6743,6 +7074,13 @@
           </a:solidFill>
           <a:ln/>
         </p:spPr>
+        <p:txBody>
+          <a:bodyPr/>
+          <a:lstStyle/>
+          <a:p>
+            <a:endParaRPr lang="en-PK"/>
+          </a:p>
+        </p:txBody>
       </p:sp>
       <p:sp>
         <p:nvSpPr>
@@ -6763,6 +7101,13 @@
           </a:solidFill>
           <a:ln/>
         </p:spPr>
+        <p:txBody>
+          <a:bodyPr/>
+          <a:lstStyle/>
+          <a:p>
+            <a:endParaRPr lang="en-PK"/>
+          </a:p>
+        </p:txBody>
       </p:sp>
       <p:sp>
         <p:nvSpPr>
@@ -6783,6 +7128,13 @@
           </a:solidFill>
           <a:ln/>
         </p:spPr>
+        <p:txBody>
+          <a:bodyPr/>
+          <a:lstStyle/>
+          <a:p>
+            <a:endParaRPr lang="en-PK"/>
+          </a:p>
+        </p:txBody>
       </p:sp>
       <p:sp>
         <p:nvSpPr>
@@ -6803,6 +7155,13 @@
           </a:solidFill>
           <a:ln/>
         </p:spPr>
+        <p:txBody>
+          <a:bodyPr/>
+          <a:lstStyle/>
+          <a:p>
+            <a:endParaRPr lang="en-PK"/>
+          </a:p>
+        </p:txBody>
       </p:sp>
       <p:sp>
         <p:nvSpPr>
@@ -6823,6 +7182,13 @@
           </a:solidFill>
           <a:ln/>
         </p:spPr>
+        <p:txBody>
+          <a:bodyPr/>
+          <a:lstStyle/>
+          <a:p>
+            <a:endParaRPr lang="en-PK"/>
+          </a:p>
+        </p:txBody>
       </p:sp>
       <p:sp>
         <p:nvSpPr>
@@ -6843,6 +7209,13 @@
           </a:solidFill>
           <a:ln/>
         </p:spPr>
+        <p:txBody>
+          <a:bodyPr/>
+          <a:lstStyle/>
+          <a:p>
+            <a:endParaRPr lang="en-PK"/>
+          </a:p>
+        </p:txBody>
       </p:sp>
       <p:sp>
         <p:nvSpPr>
@@ -6863,6 +7236,13 @@
           </a:solidFill>
           <a:ln/>
         </p:spPr>
+        <p:txBody>
+          <a:bodyPr/>
+          <a:lstStyle/>
+          <a:p>
+            <a:endParaRPr lang="en-PK"/>
+          </a:p>
+        </p:txBody>
       </p:sp>
       <p:sp>
         <p:nvSpPr>
@@ -6885,7 +7265,7 @@
           <a:bodyPr wrap="square" rtlCol="0" anchor="ctr"/>
           <a:lstStyle/>
           <a:p>
-            <a:pPr indent="0" marL="0">
+            <a:pPr marL="0" indent="0">
               <a:buNone/>
             </a:pPr>
             <a:r>
@@ -6924,6 +7304,13 @@
           </a:solidFill>
           <a:ln/>
         </p:spPr>
+        <p:txBody>
+          <a:bodyPr/>
+          <a:lstStyle/>
+          <a:p>
+            <a:endParaRPr lang="en-PK"/>
+          </a:p>
+        </p:txBody>
       </p:sp>
       <p:sp>
         <p:nvSpPr>
@@ -6946,7 +7333,7 @@
           <a:bodyPr wrap="square" rtlCol="0" anchor="ctr"/>
           <a:lstStyle/>
           <a:p>
-            <a:pPr algn="ctr" indent="0" marL="0">
+            <a:pPr marL="0" indent="0" algn="ctr">
               <a:buNone/>
             </a:pPr>
             <a:r>
@@ -6990,13 +7377,20 @@
             <a:prstDash val="solid"/>
           </a:ln>
           <a:effectLst>
-            <a:outerShdw sx="100000" sy="100000" kx="0" ky="0" algn="bl" rotWithShape="0" blurRad="127000" dist="25400" dir="5400000">
+            <a:outerShdw blurRad="127000" dist="25400" dir="5400000" algn="bl" rotWithShape="0">
               <a:srgbClr val="0C1A1A">
                 <a:alpha val="10000"/>
               </a:srgbClr>
             </a:outerShdw>
           </a:effectLst>
         </p:spPr>
+        <p:txBody>
+          <a:bodyPr/>
+          <a:lstStyle/>
+          <a:p>
+            <a:endParaRPr lang="en-PK"/>
+          </a:p>
+        </p:txBody>
       </p:sp>
       <p:sp>
         <p:nvSpPr>
@@ -7019,6 +7413,13 @@
           </a:solidFill>
           <a:ln/>
         </p:spPr>
+        <p:txBody>
+          <a:bodyPr/>
+          <a:lstStyle/>
+          <a:p>
+            <a:endParaRPr lang="en-PK"/>
+          </a:p>
+        </p:txBody>
       </p:sp>
       <p:sp>
         <p:nvSpPr>
@@ -7041,7 +7442,7 @@
           <a:bodyPr wrap="square" rtlCol="0" anchor="ctr"/>
           <a:lstStyle/>
           <a:p>
-            <a:pPr algn="ctr" indent="0" marL="0">
+            <a:pPr marL="0" indent="0" algn="ctr">
               <a:buNone/>
             </a:pPr>
             <a:r>
@@ -7080,7 +7481,7 @@
           <a:bodyPr wrap="square" rtlCol="0" anchor="ctr"/>
           <a:lstStyle/>
           <a:p>
-            <a:pPr indent="0" marL="0">
+            <a:pPr marL="0" indent="0">
               <a:lnSpc>
                 <a:spcPts val="2200"/>
               </a:lnSpc>
@@ -7127,13 +7528,20 @@
             <a:prstDash val="solid"/>
           </a:ln>
           <a:effectLst>
-            <a:outerShdw sx="100000" sy="100000" kx="0" ky="0" algn="bl" rotWithShape="0" blurRad="127000" dist="25400" dir="5400000">
+            <a:outerShdw blurRad="127000" dist="25400" dir="5400000" algn="bl" rotWithShape="0">
               <a:srgbClr val="0C1A1A">
                 <a:alpha val="10000"/>
               </a:srgbClr>
             </a:outerShdw>
           </a:effectLst>
         </p:spPr>
+        <p:txBody>
+          <a:bodyPr/>
+          <a:lstStyle/>
+          <a:p>
+            <a:endParaRPr lang="en-PK"/>
+          </a:p>
+        </p:txBody>
       </p:sp>
       <p:sp>
         <p:nvSpPr>
@@ -7156,6 +7564,13 @@
           </a:solidFill>
           <a:ln/>
         </p:spPr>
+        <p:txBody>
+          <a:bodyPr/>
+          <a:lstStyle/>
+          <a:p>
+            <a:endParaRPr lang="en-PK"/>
+          </a:p>
+        </p:txBody>
       </p:sp>
       <p:sp>
         <p:nvSpPr>
@@ -7178,7 +7593,7 @@
           <a:bodyPr wrap="square" rtlCol="0" anchor="ctr"/>
           <a:lstStyle/>
           <a:p>
-            <a:pPr algn="ctr" indent="0" marL="0">
+            <a:pPr marL="0" indent="0" algn="ctr">
               <a:buNone/>
             </a:pPr>
             <a:r>
@@ -7217,7 +7632,7 @@
           <a:bodyPr wrap="square" rtlCol="0" anchor="ctr"/>
           <a:lstStyle/>
           <a:p>
-            <a:pPr indent="0" marL="0">
+            <a:pPr marL="0" indent="0">
               <a:lnSpc>
                 <a:spcPts val="2200"/>
               </a:lnSpc>
@@ -7264,13 +7679,20 @@
             <a:prstDash val="solid"/>
           </a:ln>
           <a:effectLst>
-            <a:outerShdw sx="100000" sy="100000" kx="0" ky="0" algn="bl" rotWithShape="0" blurRad="127000" dist="25400" dir="5400000">
+            <a:outerShdw blurRad="127000" dist="25400" dir="5400000" algn="bl" rotWithShape="0">
               <a:srgbClr val="0C1A1A">
                 <a:alpha val="10000"/>
               </a:srgbClr>
             </a:outerShdw>
           </a:effectLst>
         </p:spPr>
+        <p:txBody>
+          <a:bodyPr/>
+          <a:lstStyle/>
+          <a:p>
+            <a:endParaRPr lang="en-PK"/>
+          </a:p>
+        </p:txBody>
       </p:sp>
       <p:sp>
         <p:nvSpPr>
@@ -7293,6 +7715,13 @@
           </a:solidFill>
           <a:ln/>
         </p:spPr>
+        <p:txBody>
+          <a:bodyPr/>
+          <a:lstStyle/>
+          <a:p>
+            <a:endParaRPr lang="en-PK"/>
+          </a:p>
+        </p:txBody>
       </p:sp>
       <p:sp>
         <p:nvSpPr>
@@ -7315,7 +7744,7 @@
           <a:bodyPr wrap="square" rtlCol="0" anchor="ctr"/>
           <a:lstStyle/>
           <a:p>
-            <a:pPr algn="ctr" indent="0" marL="0">
+            <a:pPr marL="0" indent="0" algn="ctr">
               <a:buNone/>
             </a:pPr>
             <a:r>
@@ -7354,7 +7783,7 @@
           <a:bodyPr wrap="square" rtlCol="0" anchor="ctr"/>
           <a:lstStyle/>
           <a:p>
-            <a:pPr indent="0" marL="0">
+            <a:pPr marL="0" indent="0">
               <a:lnSpc>
                 <a:spcPts val="2200"/>
               </a:lnSpc>
@@ -7401,13 +7830,20 @@
             <a:prstDash val="solid"/>
           </a:ln>
           <a:effectLst>
-            <a:outerShdw sx="100000" sy="100000" kx="0" ky="0" algn="bl" rotWithShape="0" blurRad="127000" dist="25400" dir="5400000">
+            <a:outerShdw blurRad="127000" dist="25400" dir="5400000" algn="bl" rotWithShape="0">
               <a:srgbClr val="0C1A1A">
                 <a:alpha val="10000"/>
               </a:srgbClr>
             </a:outerShdw>
           </a:effectLst>
         </p:spPr>
+        <p:txBody>
+          <a:bodyPr/>
+          <a:lstStyle/>
+          <a:p>
+            <a:endParaRPr lang="en-PK"/>
+          </a:p>
+        </p:txBody>
       </p:sp>
       <p:sp>
         <p:nvSpPr>
@@ -7430,6 +7866,13 @@
           </a:solidFill>
           <a:ln/>
         </p:spPr>
+        <p:txBody>
+          <a:bodyPr/>
+          <a:lstStyle/>
+          <a:p>
+            <a:endParaRPr lang="en-PK"/>
+          </a:p>
+        </p:txBody>
       </p:sp>
       <p:sp>
         <p:nvSpPr>
@@ -7452,7 +7895,7 @@
           <a:bodyPr wrap="square" rtlCol="0" anchor="ctr"/>
           <a:lstStyle/>
           <a:p>
-            <a:pPr algn="ctr" indent="0" marL="0">
+            <a:pPr marL="0" indent="0" algn="ctr">
               <a:buNone/>
             </a:pPr>
             <a:r>
@@ -7491,7 +7934,7 @@
           <a:bodyPr wrap="square" rtlCol="0" anchor="ctr"/>
           <a:lstStyle/>
           <a:p>
-            <a:pPr indent="0" marL="0">
+            <a:pPr marL="0" indent="0">
               <a:lnSpc>
                 <a:spcPts val="2200"/>
               </a:lnSpc>
@@ -7538,13 +7981,20 @@
             <a:prstDash val="solid"/>
           </a:ln>
           <a:effectLst>
-            <a:outerShdw sx="100000" sy="100000" kx="0" ky="0" algn="bl" rotWithShape="0" blurRad="127000" dist="25400" dir="5400000">
+            <a:outerShdw blurRad="127000" dist="25400" dir="5400000" algn="bl" rotWithShape="0">
               <a:srgbClr val="0C1A1A">
                 <a:alpha val="10000"/>
               </a:srgbClr>
             </a:outerShdw>
           </a:effectLst>
         </p:spPr>
+        <p:txBody>
+          <a:bodyPr/>
+          <a:lstStyle/>
+          <a:p>
+            <a:endParaRPr lang="en-PK"/>
+          </a:p>
+        </p:txBody>
       </p:sp>
       <p:sp>
         <p:nvSpPr>
@@ -7567,6 +8017,13 @@
           </a:solidFill>
           <a:ln/>
         </p:spPr>
+        <p:txBody>
+          <a:bodyPr/>
+          <a:lstStyle/>
+          <a:p>
+            <a:endParaRPr lang="en-PK"/>
+          </a:p>
+        </p:txBody>
       </p:sp>
       <p:sp>
         <p:nvSpPr>
@@ -7589,7 +8046,7 @@
           <a:bodyPr wrap="square" rtlCol="0" anchor="ctr"/>
           <a:lstStyle/>
           <a:p>
-            <a:pPr algn="ctr" indent="0" marL="0">
+            <a:pPr marL="0" indent="0" algn="ctr">
               <a:buNone/>
             </a:pPr>
             <a:r>
@@ -7628,7 +8085,7 @@
           <a:bodyPr wrap="square" rtlCol="0" anchor="ctr"/>
           <a:lstStyle/>
           <a:p>
-            <a:pPr indent="0" marL="0">
+            <a:pPr marL="0" indent="0">
               <a:lnSpc>
                 <a:spcPts val="2200"/>
               </a:lnSpc>
@@ -7675,13 +8132,20 @@
             <a:prstDash val="solid"/>
           </a:ln>
           <a:effectLst>
-            <a:outerShdw sx="100000" sy="100000" kx="0" ky="0" algn="bl" rotWithShape="0" blurRad="127000" dist="25400" dir="5400000">
+            <a:outerShdw blurRad="127000" dist="25400" dir="5400000" algn="bl" rotWithShape="0">
               <a:srgbClr val="0C1A1A">
                 <a:alpha val="10000"/>
               </a:srgbClr>
             </a:outerShdw>
           </a:effectLst>
         </p:spPr>
+        <p:txBody>
+          <a:bodyPr/>
+          <a:lstStyle/>
+          <a:p>
+            <a:endParaRPr lang="en-PK"/>
+          </a:p>
+        </p:txBody>
       </p:sp>
       <p:sp>
         <p:nvSpPr>
@@ -7704,6 +8168,13 @@
           </a:solidFill>
           <a:ln/>
         </p:spPr>
+        <p:txBody>
+          <a:bodyPr/>
+          <a:lstStyle/>
+          <a:p>
+            <a:endParaRPr lang="en-PK"/>
+          </a:p>
+        </p:txBody>
       </p:sp>
       <p:sp>
         <p:nvSpPr>
@@ -7726,7 +8197,7 @@
           <a:bodyPr wrap="square" rtlCol="0" anchor="ctr"/>
           <a:lstStyle/>
           <a:p>
-            <a:pPr algn="ctr" indent="0" marL="0">
+            <a:pPr marL="0" indent="0" algn="ctr">
               <a:buNone/>
             </a:pPr>
             <a:r>
@@ -7765,7 +8236,7 @@
           <a:bodyPr wrap="square" rtlCol="0" anchor="ctr"/>
           <a:lstStyle/>
           <a:p>
-            <a:pPr indent="0" marL="0">
+            <a:pPr marL="0" indent="0">
               <a:lnSpc>
                 <a:spcPts val="2200"/>
               </a:lnSpc>
@@ -7812,13 +8283,20 @@
             <a:prstDash val="solid"/>
           </a:ln>
           <a:effectLst>
-            <a:outerShdw sx="100000" sy="100000" kx="0" ky="0" algn="bl" rotWithShape="0" blurRad="127000" dist="25400" dir="5400000">
+            <a:outerShdw blurRad="127000" dist="25400" dir="5400000" algn="bl" rotWithShape="0">
               <a:srgbClr val="0C1A1A">
                 <a:alpha val="10000"/>
               </a:srgbClr>
             </a:outerShdw>
           </a:effectLst>
         </p:spPr>
+        <p:txBody>
+          <a:bodyPr/>
+          <a:lstStyle/>
+          <a:p>
+            <a:endParaRPr lang="en-PK"/>
+          </a:p>
+        </p:txBody>
       </p:sp>
       <p:sp>
         <p:nvSpPr>
@@ -7841,6 +8319,13 @@
           </a:solidFill>
           <a:ln/>
         </p:spPr>
+        <p:txBody>
+          <a:bodyPr/>
+          <a:lstStyle/>
+          <a:p>
+            <a:endParaRPr lang="en-PK"/>
+          </a:p>
+        </p:txBody>
       </p:sp>
       <p:sp>
         <p:nvSpPr>
@@ -7863,7 +8348,7 @@
           <a:bodyPr wrap="square" rtlCol="0" anchor="ctr"/>
           <a:lstStyle/>
           <a:p>
-            <a:pPr algn="ctr" indent="0" marL="0">
+            <a:pPr marL="0" indent="0" algn="ctr">
               <a:buNone/>
             </a:pPr>
             <a:r>
@@ -7902,7 +8387,7 @@
           <a:bodyPr wrap="square" rtlCol="0" anchor="ctr"/>
           <a:lstStyle/>
           <a:p>
-            <a:pPr indent="0" marL="0">
+            <a:pPr marL="0" indent="0">
               <a:lnSpc>
                 <a:spcPts val="2200"/>
               </a:lnSpc>
@@ -7949,13 +8434,20 @@
             <a:prstDash val="solid"/>
           </a:ln>
           <a:effectLst>
-            <a:outerShdw sx="100000" sy="100000" kx="0" ky="0" algn="bl" rotWithShape="0" blurRad="127000" dist="25400" dir="5400000">
+            <a:outerShdw blurRad="127000" dist="25400" dir="5400000" algn="bl" rotWithShape="0">
               <a:srgbClr val="0C1A1A">
                 <a:alpha val="10000"/>
               </a:srgbClr>
             </a:outerShdw>
           </a:effectLst>
         </p:spPr>
+        <p:txBody>
+          <a:bodyPr/>
+          <a:lstStyle/>
+          <a:p>
+            <a:endParaRPr lang="en-PK"/>
+          </a:p>
+        </p:txBody>
       </p:sp>
       <p:sp>
         <p:nvSpPr>
@@ -7978,6 +8470,13 @@
           </a:solidFill>
           <a:ln/>
         </p:spPr>
+        <p:txBody>
+          <a:bodyPr/>
+          <a:lstStyle/>
+          <a:p>
+            <a:endParaRPr lang="en-PK"/>
+          </a:p>
+        </p:txBody>
       </p:sp>
       <p:sp>
         <p:nvSpPr>
@@ -8000,7 +8499,7 @@
           <a:bodyPr wrap="square" rtlCol="0" anchor="ctr"/>
           <a:lstStyle/>
           <a:p>
-            <a:pPr algn="ctr" indent="0" marL="0">
+            <a:pPr marL="0" indent="0" algn="ctr">
               <a:buNone/>
             </a:pPr>
             <a:r>
@@ -8039,7 +8538,7 @@
           <a:bodyPr wrap="square" rtlCol="0" anchor="ctr"/>
           <a:lstStyle/>
           <a:p>
-            <a:pPr indent="0" marL="0">
+            <a:pPr marL="0" indent="0">
               <a:lnSpc>
                 <a:spcPts val="2200"/>
               </a:lnSpc>
@@ -8086,13 +8585,20 @@
             <a:prstDash val="solid"/>
           </a:ln>
           <a:effectLst>
-            <a:outerShdw sx="100000" sy="100000" kx="0" ky="0" algn="bl" rotWithShape="0" blurRad="127000" dist="25400" dir="5400000">
+            <a:outerShdw blurRad="127000" dist="25400" dir="5400000" algn="bl" rotWithShape="0">
               <a:srgbClr val="0C1A1A">
                 <a:alpha val="10000"/>
               </a:srgbClr>
             </a:outerShdw>
           </a:effectLst>
         </p:spPr>
+        <p:txBody>
+          <a:bodyPr/>
+          <a:lstStyle/>
+          <a:p>
+            <a:endParaRPr lang="en-PK"/>
+          </a:p>
+        </p:txBody>
       </p:sp>
       <p:sp>
         <p:nvSpPr>
@@ -8115,6 +8621,13 @@
           </a:solidFill>
           <a:ln/>
         </p:spPr>
+        <p:txBody>
+          <a:bodyPr/>
+          <a:lstStyle/>
+          <a:p>
+            <a:endParaRPr lang="en-PK"/>
+          </a:p>
+        </p:txBody>
       </p:sp>
       <p:sp>
         <p:nvSpPr>
@@ -8137,7 +8650,7 @@
           <a:bodyPr wrap="square" rtlCol="0" anchor="ctr"/>
           <a:lstStyle/>
           <a:p>
-            <a:pPr algn="ctr" indent="0" marL="0">
+            <a:pPr marL="0" indent="0" algn="ctr">
               <a:buNone/>
             </a:pPr>
             <a:r>
@@ -8176,7 +8689,7 @@
           <a:bodyPr wrap="square" rtlCol="0" anchor="ctr"/>
           <a:lstStyle/>
           <a:p>
-            <a:pPr indent="0" marL="0">
+            <a:pPr marL="0" indent="0">
               <a:lnSpc>
                 <a:spcPts val="2200"/>
               </a:lnSpc>
@@ -8213,6 +8726,7 @@
         <a:solidFill>
           <a:srgbClr val="F4F7F6"/>
         </a:solidFill>
+        <a:effectLst/>
       </p:bgPr>
     </p:bg>
     <p:spTree>
@@ -8248,6 +8762,13 @@
           </a:solidFill>
           <a:ln/>
         </p:spPr>
+        <p:txBody>
+          <a:bodyPr/>
+          <a:lstStyle/>
+          <a:p>
+            <a:endParaRPr lang="en-PK"/>
+          </a:p>
+        </p:txBody>
       </p:sp>
       <p:sp>
         <p:nvSpPr>
@@ -8268,6 +8789,13 @@
           </a:solidFill>
           <a:ln/>
         </p:spPr>
+        <p:txBody>
+          <a:bodyPr/>
+          <a:lstStyle/>
+          <a:p>
+            <a:endParaRPr lang="en-PK"/>
+          </a:p>
+        </p:txBody>
       </p:sp>
       <p:sp>
         <p:nvSpPr>
@@ -8288,6 +8816,13 @@
           </a:solidFill>
           <a:ln/>
         </p:spPr>
+        <p:txBody>
+          <a:bodyPr/>
+          <a:lstStyle/>
+          <a:p>
+            <a:endParaRPr lang="en-PK"/>
+          </a:p>
+        </p:txBody>
       </p:sp>
       <p:sp>
         <p:nvSpPr>
@@ -8310,11 +8845,11 @@
           <a:bodyPr wrap="square" rtlCol="0" anchor="ctr"/>
           <a:lstStyle/>
           <a:p>
-            <a:pPr indent="0" marL="0">
+            <a:pPr marL="0" indent="0">
               <a:buNone/>
             </a:pPr>
             <a:r>
-              <a:rPr lang="en-US" sz="1150" b="1" spc="200" kern="0" dirty="0">
+              <a:rPr lang="en-US" sz="1150" b="1" kern="0" spc="200" dirty="0">
                 <a:solidFill>
                   <a:srgbClr val="5EEAD4"/>
                 </a:solidFill>
@@ -8349,7 +8884,7 @@
           <a:bodyPr wrap="square" rtlCol="0" anchor="ctr"/>
           <a:lstStyle/>
           <a:p>
-            <a:pPr indent="0" marL="0">
+            <a:pPr marL="0" indent="0">
               <a:buNone/>
             </a:pPr>
             <a:r>
@@ -8388,6 +8923,13 @@
           </a:solidFill>
           <a:ln/>
         </p:spPr>
+        <p:txBody>
+          <a:bodyPr/>
+          <a:lstStyle/>
+          <a:p>
+            <a:endParaRPr lang="en-PK"/>
+          </a:p>
+        </p:txBody>
       </p:sp>
       <p:sp>
         <p:nvSpPr>
@@ -8408,6 +8950,13 @@
           </a:solidFill>
           <a:ln/>
         </p:spPr>
+        <p:txBody>
+          <a:bodyPr/>
+          <a:lstStyle/>
+          <a:p>
+            <a:endParaRPr lang="en-PK"/>
+          </a:p>
+        </p:txBody>
       </p:sp>
       <p:sp>
         <p:nvSpPr>
@@ -8428,6 +8977,13 @@
           </a:solidFill>
           <a:ln/>
         </p:spPr>
+        <p:txBody>
+          <a:bodyPr/>
+          <a:lstStyle/>
+          <a:p>
+            <a:endParaRPr lang="en-PK"/>
+          </a:p>
+        </p:txBody>
       </p:sp>
       <p:sp>
         <p:nvSpPr>
@@ -8448,6 +9004,13 @@
           </a:solidFill>
           <a:ln/>
         </p:spPr>
+        <p:txBody>
+          <a:bodyPr/>
+          <a:lstStyle/>
+          <a:p>
+            <a:endParaRPr lang="en-PK"/>
+          </a:p>
+        </p:txBody>
       </p:sp>
       <p:sp>
         <p:nvSpPr>
@@ -8468,6 +9031,13 @@
           </a:solidFill>
           <a:ln/>
         </p:spPr>
+        <p:txBody>
+          <a:bodyPr/>
+          <a:lstStyle/>
+          <a:p>
+            <a:endParaRPr lang="en-PK"/>
+          </a:p>
+        </p:txBody>
       </p:sp>
       <p:sp>
         <p:nvSpPr>
@@ -8488,6 +9058,13 @@
           </a:solidFill>
           <a:ln/>
         </p:spPr>
+        <p:txBody>
+          <a:bodyPr/>
+          <a:lstStyle/>
+          <a:p>
+            <a:endParaRPr lang="en-PK"/>
+          </a:p>
+        </p:txBody>
       </p:sp>
       <p:sp>
         <p:nvSpPr>
@@ -8508,6 +9085,13 @@
           </a:solidFill>
           <a:ln/>
         </p:spPr>
+        <p:txBody>
+          <a:bodyPr/>
+          <a:lstStyle/>
+          <a:p>
+            <a:endParaRPr lang="en-PK"/>
+          </a:p>
+        </p:txBody>
       </p:sp>
       <p:sp>
         <p:nvSpPr>
@@ -8530,7 +9114,7 @@
           <a:bodyPr wrap="square" rtlCol="0" anchor="ctr"/>
           <a:lstStyle/>
           <a:p>
-            <a:pPr indent="0" marL="0">
+            <a:pPr marL="0" indent="0">
               <a:buNone/>
             </a:pPr>
             <a:r>
@@ -8569,6 +9153,13 @@
           </a:solidFill>
           <a:ln/>
         </p:spPr>
+        <p:txBody>
+          <a:bodyPr/>
+          <a:lstStyle/>
+          <a:p>
+            <a:endParaRPr lang="en-PK"/>
+          </a:p>
+        </p:txBody>
       </p:sp>
       <p:sp>
         <p:nvSpPr>
@@ -8591,7 +9182,7 @@
           <a:bodyPr wrap="square" rtlCol="0" anchor="ctr"/>
           <a:lstStyle/>
           <a:p>
-            <a:pPr algn="ctr" indent="0" marL="0">
+            <a:pPr marL="0" indent="0" algn="ctr">
               <a:buNone/>
             </a:pPr>
             <a:r>
@@ -8635,13 +9226,20 @@
             <a:prstDash val="solid"/>
           </a:ln>
           <a:effectLst>
-            <a:outerShdw sx="100000" sy="100000" kx="0" ky="0" algn="bl" rotWithShape="0" blurRad="127000" dist="25400" dir="5400000">
+            <a:outerShdw blurRad="127000" dist="25400" dir="5400000" algn="bl" rotWithShape="0">
               <a:srgbClr val="0C1A1A">
                 <a:alpha val="10000"/>
               </a:srgbClr>
             </a:outerShdw>
           </a:effectLst>
         </p:spPr>
+        <p:txBody>
+          <a:bodyPr/>
+          <a:lstStyle/>
+          <a:p>
+            <a:endParaRPr lang="en-PK"/>
+          </a:p>
+        </p:txBody>
       </p:sp>
       <p:sp>
         <p:nvSpPr>
@@ -8664,6 +9262,13 @@
           </a:solidFill>
           <a:ln/>
         </p:spPr>
+        <p:txBody>
+          <a:bodyPr/>
+          <a:lstStyle/>
+          <a:p>
+            <a:endParaRPr lang="en-PK"/>
+          </a:p>
+        </p:txBody>
       </p:sp>
       <p:sp>
         <p:nvSpPr>
@@ -8686,7 +9291,7 @@
           <a:bodyPr wrap="square" rtlCol="0" anchor="ctr"/>
           <a:lstStyle/>
           <a:p>
-            <a:pPr algn="ctr" indent="0" marL="0">
+            <a:pPr marL="0" indent="0" algn="ctr">
               <a:buNone/>
             </a:pPr>
             <a:r>
@@ -8712,8 +9317,8 @@
         </p:nvSpPr>
         <p:spPr>
           <a:xfrm>
-            <a:off x="1271016" y="1874520"/>
-            <a:ext cx="4462272" cy="365760"/>
+            <a:off x="1271016" y="1764792"/>
+            <a:ext cx="4462272" cy="475488"/>
           </a:xfrm>
           <a:prstGeom prst="rect">
             <a:avLst/>
@@ -8725,7 +9330,7 @@
           <a:bodyPr wrap="square" rtlCol="0" anchor="ctr"/>
           <a:lstStyle/>
           <a:p>
-            <a:pPr indent="0" marL="0">
+            <a:pPr marL="0" indent="0">
               <a:buNone/>
             </a:pPr>
             <a:r>
@@ -8764,14 +9369,14 @@
           <a:bodyPr wrap="square" rtlCol="0" anchor="ctr"/>
           <a:lstStyle/>
           <a:p>
-            <a:pPr indent="0" marL="0">
+            <a:pPr marL="0" indent="0">
               <a:lnSpc>
                 <a:spcPts val="1800"/>
               </a:lnSpc>
               <a:buNone/>
             </a:pPr>
             <a:r>
-              <a:rPr lang="en-US" sz="1300" dirty="0">
+              <a:rPr lang="en-US" sz="1400" dirty="0">
                 <a:solidFill>
                   <a:srgbClr val="2E3B3D"/>
                 </a:solidFill>
@@ -8781,7 +9386,7 @@
               </a:rPr>
               <a:t>Retrieval grounds every ad in past campaigns and Meta policy; compliance rewrites violations.</a:t>
             </a:r>
-            <a:endParaRPr lang="en-US" sz="1300" dirty="0"/>
+            <a:endParaRPr lang="en-US" sz="1400" dirty="0"/>
           </a:p>
         </p:txBody>
       </p:sp>
@@ -8811,13 +9416,20 @@
             <a:prstDash val="solid"/>
           </a:ln>
           <a:effectLst>
-            <a:outerShdw sx="100000" sy="100000" kx="0" ky="0" algn="bl" rotWithShape="0" blurRad="127000" dist="25400" dir="5400000">
+            <a:outerShdw blurRad="127000" dist="25400" dir="5400000" algn="bl" rotWithShape="0">
               <a:srgbClr val="0C1A1A">
                 <a:alpha val="10000"/>
               </a:srgbClr>
             </a:outerShdw>
           </a:effectLst>
         </p:spPr>
+        <p:txBody>
+          <a:bodyPr/>
+          <a:lstStyle/>
+          <a:p>
+            <a:endParaRPr lang="en-PK"/>
+          </a:p>
+        </p:txBody>
       </p:sp>
       <p:sp>
         <p:nvSpPr>
@@ -8840,6 +9452,13 @@
           </a:solidFill>
           <a:ln/>
         </p:spPr>
+        <p:txBody>
+          <a:bodyPr/>
+          <a:lstStyle/>
+          <a:p>
+            <a:endParaRPr lang="en-PK"/>
+          </a:p>
+        </p:txBody>
       </p:sp>
       <p:sp>
         <p:nvSpPr>
@@ -8862,7 +9481,7 @@
           <a:bodyPr wrap="square" rtlCol="0" anchor="ctr"/>
           <a:lstStyle/>
           <a:p>
-            <a:pPr algn="ctr" indent="0" marL="0">
+            <a:pPr marL="0" indent="0" algn="ctr">
               <a:buNone/>
             </a:pPr>
             <a:r>
@@ -8901,7 +9520,7 @@
           <a:bodyPr wrap="square" rtlCol="0" anchor="ctr"/>
           <a:lstStyle/>
           <a:p>
-            <a:pPr indent="0" marL="0">
+            <a:pPr marL="0" indent="0">
               <a:buNone/>
             </a:pPr>
             <a:r>
@@ -8940,7 +9559,7 @@
           <a:bodyPr wrap="square" rtlCol="0" anchor="ctr"/>
           <a:lstStyle/>
           <a:p>
-            <a:pPr indent="0" marL="0">
+            <a:pPr marL="0" indent="0">
               <a:lnSpc>
                 <a:spcPts val="1800"/>
               </a:lnSpc>
@@ -8987,13 +9606,20 @@
             <a:prstDash val="solid"/>
           </a:ln>
           <a:effectLst>
-            <a:outerShdw sx="100000" sy="100000" kx="0" ky="0" algn="bl" rotWithShape="0" blurRad="127000" dist="25400" dir="5400000">
+            <a:outerShdw blurRad="127000" dist="25400" dir="5400000" algn="bl" rotWithShape="0">
               <a:srgbClr val="0C1A1A">
                 <a:alpha val="10000"/>
               </a:srgbClr>
             </a:outerShdw>
           </a:effectLst>
         </p:spPr>
+        <p:txBody>
+          <a:bodyPr/>
+          <a:lstStyle/>
+          <a:p>
+            <a:endParaRPr lang="en-PK"/>
+          </a:p>
+        </p:txBody>
       </p:sp>
       <p:sp>
         <p:nvSpPr>
@@ -9016,6 +9642,13 @@
           </a:solidFill>
           <a:ln/>
         </p:spPr>
+        <p:txBody>
+          <a:bodyPr/>
+          <a:lstStyle/>
+          <a:p>
+            <a:endParaRPr lang="en-PK"/>
+          </a:p>
+        </p:txBody>
       </p:sp>
       <p:sp>
         <p:nvSpPr>
@@ -9038,7 +9671,7 @@
           <a:bodyPr wrap="square" rtlCol="0" anchor="ctr"/>
           <a:lstStyle/>
           <a:p>
-            <a:pPr algn="ctr" indent="0" marL="0">
+            <a:pPr marL="0" indent="0" algn="ctr">
               <a:buNone/>
             </a:pPr>
             <a:r>
@@ -9077,7 +9710,7 @@
           <a:bodyPr wrap="square" rtlCol="0" anchor="ctr"/>
           <a:lstStyle/>
           <a:p>
-            <a:pPr indent="0" marL="0">
+            <a:pPr marL="0" indent="0">
               <a:buNone/>
             </a:pPr>
             <a:r>
@@ -9116,7 +9749,7 @@
           <a:bodyPr wrap="square" rtlCol="0" anchor="ctr"/>
           <a:lstStyle/>
           <a:p>
-            <a:pPr indent="0" marL="0">
+            <a:pPr marL="0" indent="0">
               <a:lnSpc>
                 <a:spcPts val="1800"/>
               </a:lnSpc>
@@ -9163,13 +9796,20 @@
             <a:prstDash val="solid"/>
           </a:ln>
           <a:effectLst>
-            <a:outerShdw sx="100000" sy="100000" kx="0" ky="0" algn="bl" rotWithShape="0" blurRad="127000" dist="25400" dir="5400000">
+            <a:outerShdw blurRad="127000" dist="25400" dir="5400000" algn="bl" rotWithShape="0">
               <a:srgbClr val="0C1A1A">
                 <a:alpha val="10000"/>
               </a:srgbClr>
             </a:outerShdw>
           </a:effectLst>
         </p:spPr>
+        <p:txBody>
+          <a:bodyPr/>
+          <a:lstStyle/>
+          <a:p>
+            <a:endParaRPr lang="en-PK"/>
+          </a:p>
+        </p:txBody>
       </p:sp>
       <p:sp>
         <p:nvSpPr>
@@ -9192,6 +9832,13 @@
           </a:solidFill>
           <a:ln/>
         </p:spPr>
+        <p:txBody>
+          <a:bodyPr/>
+          <a:lstStyle/>
+          <a:p>
+            <a:endParaRPr lang="en-PK"/>
+          </a:p>
+        </p:txBody>
       </p:sp>
       <p:sp>
         <p:nvSpPr>
@@ -9214,7 +9861,7 @@
           <a:bodyPr wrap="square" rtlCol="0" anchor="ctr"/>
           <a:lstStyle/>
           <a:p>
-            <a:pPr algn="ctr" indent="0" marL="0">
+            <a:pPr marL="0" indent="0" algn="ctr">
               <a:buNone/>
             </a:pPr>
             <a:r>
@@ -9253,7 +9900,7 @@
           <a:bodyPr wrap="square" rtlCol="0" anchor="ctr"/>
           <a:lstStyle/>
           <a:p>
-            <a:pPr indent="0" marL="0">
+            <a:pPr marL="0" indent="0">
               <a:buNone/>
             </a:pPr>
             <a:r>
@@ -9292,7 +9939,7 @@
           <a:bodyPr wrap="square" rtlCol="0" anchor="ctr"/>
           <a:lstStyle/>
           <a:p>
-            <a:pPr indent="0" marL="0">
+            <a:pPr marL="0" indent="0">
               <a:lnSpc>
                 <a:spcPts val="1800"/>
               </a:lnSpc>
@@ -9339,13 +9986,20 @@
             <a:prstDash val="solid"/>
           </a:ln>
           <a:effectLst>
-            <a:outerShdw sx="100000" sy="100000" kx="0" ky="0" algn="bl" rotWithShape="0" blurRad="127000" dist="25400" dir="5400000">
+            <a:outerShdw blurRad="127000" dist="25400" dir="5400000" algn="bl" rotWithShape="0">
               <a:srgbClr val="0C1A1A">
                 <a:alpha val="10000"/>
               </a:srgbClr>
             </a:outerShdw>
           </a:effectLst>
         </p:spPr>
+        <p:txBody>
+          <a:bodyPr/>
+          <a:lstStyle/>
+          <a:p>
+            <a:endParaRPr lang="en-PK"/>
+          </a:p>
+        </p:txBody>
       </p:sp>
       <p:sp>
         <p:nvSpPr>
@@ -9368,6 +10022,13 @@
           </a:solidFill>
           <a:ln/>
         </p:spPr>
+        <p:txBody>
+          <a:bodyPr/>
+          <a:lstStyle/>
+          <a:p>
+            <a:endParaRPr lang="en-PK"/>
+          </a:p>
+        </p:txBody>
       </p:sp>
       <p:sp>
         <p:nvSpPr>
@@ -9390,7 +10051,7 @@
           <a:bodyPr wrap="square" rtlCol="0" anchor="ctr"/>
           <a:lstStyle/>
           <a:p>
-            <a:pPr algn="ctr" indent="0" marL="0">
+            <a:pPr marL="0" indent="0" algn="ctr">
               <a:buNone/>
             </a:pPr>
             <a:r>
@@ -9429,7 +10090,7 @@
           <a:bodyPr wrap="square" rtlCol="0" anchor="ctr"/>
           <a:lstStyle/>
           <a:p>
-            <a:pPr indent="0" marL="0">
+            <a:pPr marL="0" indent="0">
               <a:buNone/>
             </a:pPr>
             <a:r>
@@ -9468,7 +10129,7 @@
           <a:bodyPr wrap="square" rtlCol="0" anchor="ctr"/>
           <a:lstStyle/>
           <a:p>
-            <a:pPr indent="0" marL="0">
+            <a:pPr marL="0" indent="0">
               <a:lnSpc>
                 <a:spcPts val="1800"/>
               </a:lnSpc>
@@ -9515,13 +10176,20 @@
             <a:prstDash val="solid"/>
           </a:ln>
           <a:effectLst>
-            <a:outerShdw sx="100000" sy="100000" kx="0" ky="0" algn="bl" rotWithShape="0" blurRad="127000" dist="25400" dir="5400000">
+            <a:outerShdw blurRad="127000" dist="25400" dir="5400000" algn="bl" rotWithShape="0">
               <a:srgbClr val="0C1A1A">
                 <a:alpha val="10000"/>
               </a:srgbClr>
             </a:outerShdw>
           </a:effectLst>
         </p:spPr>
+        <p:txBody>
+          <a:bodyPr/>
+          <a:lstStyle/>
+          <a:p>
+            <a:endParaRPr lang="en-PK" dirty="0"/>
+          </a:p>
+        </p:txBody>
       </p:sp>
       <p:sp>
         <p:nvSpPr>
@@ -9544,7 +10212,7 @@
           <a:bodyPr wrap="square" rtlCol="0" anchor="ctr"/>
           <a:lstStyle/>
           <a:p>
-            <a:pPr indent="0" marL="0">
+            <a:pPr marL="0" indent="0">
               <a:buNone/>
             </a:pPr>
             <a:r>
@@ -9578,6 +10246,7 @@
         <a:solidFill>
           <a:srgbClr val="F4F7F6"/>
         </a:solidFill>
+        <a:effectLst/>
       </p:bgPr>
     </p:bg>
     <p:spTree>
@@ -9613,6 +10282,13 @@
           </a:solidFill>
           <a:ln/>
         </p:spPr>
+        <p:txBody>
+          <a:bodyPr/>
+          <a:lstStyle/>
+          <a:p>
+            <a:endParaRPr lang="en-PK"/>
+          </a:p>
+        </p:txBody>
       </p:sp>
       <p:sp>
         <p:nvSpPr>
@@ -9633,6 +10309,13 @@
           </a:solidFill>
           <a:ln/>
         </p:spPr>
+        <p:txBody>
+          <a:bodyPr/>
+          <a:lstStyle/>
+          <a:p>
+            <a:endParaRPr lang="en-PK"/>
+          </a:p>
+        </p:txBody>
       </p:sp>
       <p:sp>
         <p:nvSpPr>
@@ -9653,6 +10336,13 @@
           </a:solidFill>
           <a:ln/>
         </p:spPr>
+        <p:txBody>
+          <a:bodyPr/>
+          <a:lstStyle/>
+          <a:p>
+            <a:endParaRPr lang="en-PK"/>
+          </a:p>
+        </p:txBody>
       </p:sp>
       <p:sp>
         <p:nvSpPr>
@@ -9675,11 +10365,11 @@
           <a:bodyPr wrap="square" rtlCol="0" anchor="ctr"/>
           <a:lstStyle/>
           <a:p>
-            <a:pPr indent="0" marL="0">
+            <a:pPr marL="0" indent="0">
               <a:buNone/>
             </a:pPr>
             <a:r>
-              <a:rPr lang="en-US" sz="1150" b="1" spc="200" kern="0" dirty="0">
+              <a:rPr lang="en-US" sz="1150" b="1" kern="0" spc="200" dirty="0">
                 <a:solidFill>
                   <a:srgbClr val="5EEAD4"/>
                 </a:solidFill>
@@ -9714,7 +10404,7 @@
           <a:bodyPr wrap="square" rtlCol="0" anchor="ctr"/>
           <a:lstStyle/>
           <a:p>
-            <a:pPr indent="0" marL="0">
+            <a:pPr marL="0" indent="0">
               <a:buNone/>
             </a:pPr>
             <a:r>
@@ -9753,6 +10443,13 @@
           </a:solidFill>
           <a:ln/>
         </p:spPr>
+        <p:txBody>
+          <a:bodyPr/>
+          <a:lstStyle/>
+          <a:p>
+            <a:endParaRPr lang="en-PK"/>
+          </a:p>
+        </p:txBody>
       </p:sp>
       <p:sp>
         <p:nvSpPr>
@@ -9773,6 +10470,13 @@
           </a:solidFill>
           <a:ln/>
         </p:spPr>
+        <p:txBody>
+          <a:bodyPr/>
+          <a:lstStyle/>
+          <a:p>
+            <a:endParaRPr lang="en-PK"/>
+          </a:p>
+        </p:txBody>
       </p:sp>
       <p:sp>
         <p:nvSpPr>
@@ -9793,6 +10497,13 @@
           </a:solidFill>
           <a:ln/>
         </p:spPr>
+        <p:txBody>
+          <a:bodyPr/>
+          <a:lstStyle/>
+          <a:p>
+            <a:endParaRPr lang="en-PK"/>
+          </a:p>
+        </p:txBody>
       </p:sp>
       <p:sp>
         <p:nvSpPr>
@@ -9813,6 +10524,13 @@
           </a:solidFill>
           <a:ln/>
         </p:spPr>
+        <p:txBody>
+          <a:bodyPr/>
+          <a:lstStyle/>
+          <a:p>
+            <a:endParaRPr lang="en-PK"/>
+          </a:p>
+        </p:txBody>
       </p:sp>
       <p:sp>
         <p:nvSpPr>
@@ -9833,6 +10551,13 @@
           </a:solidFill>
           <a:ln/>
         </p:spPr>
+        <p:txBody>
+          <a:bodyPr/>
+          <a:lstStyle/>
+          <a:p>
+            <a:endParaRPr lang="en-PK"/>
+          </a:p>
+        </p:txBody>
       </p:sp>
       <p:sp>
         <p:nvSpPr>
@@ -9853,6 +10578,13 @@
           </a:solidFill>
           <a:ln/>
         </p:spPr>
+        <p:txBody>
+          <a:bodyPr/>
+          <a:lstStyle/>
+          <a:p>
+            <a:endParaRPr lang="en-PK"/>
+          </a:p>
+        </p:txBody>
       </p:sp>
       <p:sp>
         <p:nvSpPr>
@@ -9873,6 +10605,13 @@
           </a:solidFill>
           <a:ln/>
         </p:spPr>
+        <p:txBody>
+          <a:bodyPr/>
+          <a:lstStyle/>
+          <a:p>
+            <a:endParaRPr lang="en-PK"/>
+          </a:p>
+        </p:txBody>
       </p:sp>
       <p:sp>
         <p:nvSpPr>
@@ -9895,7 +10634,7 @@
           <a:bodyPr wrap="square" rtlCol="0" anchor="ctr"/>
           <a:lstStyle/>
           <a:p>
-            <a:pPr indent="0" marL="0">
+            <a:pPr marL="0" indent="0">
               <a:buNone/>
             </a:pPr>
             <a:r>
@@ -9934,6 +10673,13 @@
           </a:solidFill>
           <a:ln/>
         </p:spPr>
+        <p:txBody>
+          <a:bodyPr/>
+          <a:lstStyle/>
+          <a:p>
+            <a:endParaRPr lang="en-PK"/>
+          </a:p>
+        </p:txBody>
       </p:sp>
       <p:sp>
         <p:nvSpPr>
@@ -9956,7 +10702,7 @@
           <a:bodyPr wrap="square" rtlCol="0" anchor="ctr"/>
           <a:lstStyle/>
           <a:p>
-            <a:pPr algn="ctr" indent="0" marL="0">
+            <a:pPr marL="0" indent="0" algn="ctr">
               <a:buNone/>
             </a:pPr>
             <a:r>
@@ -10000,13 +10746,20 @@
             <a:prstDash val="solid"/>
           </a:ln>
           <a:effectLst>
-            <a:outerShdw sx="100000" sy="100000" kx="0" ky="0" algn="bl" rotWithShape="0" blurRad="127000" dist="25400" dir="5400000">
+            <a:outerShdw blurRad="127000" dist="25400" dir="5400000" algn="bl" rotWithShape="0">
               <a:srgbClr val="0C1A1A">
                 <a:alpha val="10000"/>
               </a:srgbClr>
             </a:outerShdw>
           </a:effectLst>
         </p:spPr>
+        <p:txBody>
+          <a:bodyPr/>
+          <a:lstStyle/>
+          <a:p>
+            <a:endParaRPr lang="en-PK"/>
+          </a:p>
+        </p:txBody>
       </p:sp>
       <p:sp>
         <p:nvSpPr>
@@ -10027,6 +10780,13 @@
           </a:solidFill>
           <a:ln/>
         </p:spPr>
+        <p:txBody>
+          <a:bodyPr/>
+          <a:lstStyle/>
+          <a:p>
+            <a:endParaRPr lang="en-PK"/>
+          </a:p>
+        </p:txBody>
       </p:sp>
       <p:sp>
         <p:nvSpPr>
@@ -10049,6 +10809,13 @@
           </a:solidFill>
           <a:ln/>
         </p:spPr>
+        <p:txBody>
+          <a:bodyPr/>
+          <a:lstStyle/>
+          <a:p>
+            <a:endParaRPr lang="en-PK"/>
+          </a:p>
+        </p:txBody>
       </p:sp>
       <p:sp>
         <p:nvSpPr>
@@ -10071,7 +10838,7 @@
           <a:bodyPr wrap="square" rtlCol="0" anchor="ctr"/>
           <a:lstStyle/>
           <a:p>
-            <a:pPr algn="ctr" indent="0" marL="0">
+            <a:pPr marL="0" indent="0" algn="ctr">
               <a:buNone/>
             </a:pPr>
             <a:r>
@@ -10110,7 +10877,7 @@
           <a:bodyPr wrap="square" rtlCol="0" anchor="t"/>
           <a:lstStyle/>
           <a:p>
-            <a:pPr algn="ctr" indent="0" marL="0">
+            <a:pPr marL="0" indent="0" algn="ctr">
               <a:lnSpc>
                 <a:spcPts val="1600"/>
               </a:lnSpc>
@@ -10152,14 +10919,14 @@
           <a:bodyPr wrap="square" rtlCol="0" anchor="t"/>
           <a:lstStyle/>
           <a:p>
-            <a:pPr algn="ctr" indent="0" marL="0">
+            <a:pPr marL="0" indent="0" algn="ctr">
               <a:lnSpc>
                 <a:spcPts val="1500"/>
               </a:lnSpc>
               <a:buNone/>
             </a:pPr>
             <a:r>
-              <a:rPr lang="en-US" sz="1050" dirty="0">
+              <a:rPr lang="en-US" sz="1300" dirty="0">
                 <a:solidFill>
                   <a:srgbClr val="2E3B3D"/>
                 </a:solidFill>
@@ -10169,7 +10936,7 @@
               </a:rPr>
               <a:t>Interviews, competitor analysis, SRS.</a:t>
             </a:r>
-            <a:endParaRPr lang="en-US" sz="1050" dirty="0"/>
+            <a:endParaRPr lang="en-US" sz="1300" dirty="0"/>
           </a:p>
         </p:txBody>
       </p:sp>
@@ -10199,13 +10966,20 @@
             <a:prstDash val="solid"/>
           </a:ln>
           <a:effectLst>
-            <a:outerShdw sx="100000" sy="100000" kx="0" ky="0" algn="bl" rotWithShape="0" blurRad="127000" dist="25400" dir="5400000">
+            <a:outerShdw blurRad="127000" dist="25400" dir="5400000" algn="bl" rotWithShape="0">
               <a:srgbClr val="0C1A1A">
                 <a:alpha val="10000"/>
               </a:srgbClr>
             </a:outerShdw>
           </a:effectLst>
         </p:spPr>
+        <p:txBody>
+          <a:bodyPr/>
+          <a:lstStyle/>
+          <a:p>
+            <a:endParaRPr lang="en-PK"/>
+          </a:p>
+        </p:txBody>
       </p:sp>
       <p:sp>
         <p:nvSpPr>
@@ -10226,6 +11000,13 @@
           </a:solidFill>
           <a:ln/>
         </p:spPr>
+        <p:txBody>
+          <a:bodyPr/>
+          <a:lstStyle/>
+          <a:p>
+            <a:endParaRPr lang="en-PK"/>
+          </a:p>
+        </p:txBody>
       </p:sp>
       <p:sp>
         <p:nvSpPr>
@@ -10248,6 +11029,13 @@
           </a:solidFill>
           <a:ln/>
         </p:spPr>
+        <p:txBody>
+          <a:bodyPr/>
+          <a:lstStyle/>
+          <a:p>
+            <a:endParaRPr lang="en-PK"/>
+          </a:p>
+        </p:txBody>
       </p:sp>
       <p:sp>
         <p:nvSpPr>
@@ -10270,7 +11058,7 @@
           <a:bodyPr wrap="square" rtlCol="0" anchor="ctr"/>
           <a:lstStyle/>
           <a:p>
-            <a:pPr algn="ctr" indent="0" marL="0">
+            <a:pPr marL="0" indent="0" algn="ctr">
               <a:buNone/>
             </a:pPr>
             <a:r>
@@ -10309,7 +11097,7 @@
           <a:bodyPr wrap="square" rtlCol="0" anchor="t"/>
           <a:lstStyle/>
           <a:p>
-            <a:pPr algn="ctr" indent="0" marL="0">
+            <a:pPr marL="0" indent="0" algn="ctr">
               <a:lnSpc>
                 <a:spcPts val="1600"/>
               </a:lnSpc>
@@ -10351,14 +11139,14 @@
           <a:bodyPr wrap="square" rtlCol="0" anchor="t"/>
           <a:lstStyle/>
           <a:p>
-            <a:pPr algn="ctr" indent="0" marL="0">
+            <a:pPr marL="0" indent="0" algn="ctr">
               <a:lnSpc>
                 <a:spcPts val="1500"/>
               </a:lnSpc>
               <a:buNone/>
             </a:pPr>
             <a:r>
-              <a:rPr lang="en-US" sz="1050" dirty="0">
+              <a:rPr lang="en-US" sz="1300" dirty="0">
                 <a:solidFill>
                   <a:srgbClr val="2E3B3D"/>
                 </a:solidFill>
@@ -10368,7 +11156,7 @@
               </a:rPr>
               <a:t>Architecture, schema, Figma prototypes.</a:t>
             </a:r>
-            <a:endParaRPr lang="en-US" sz="1050" dirty="0"/>
+            <a:endParaRPr lang="en-US" sz="1300" dirty="0"/>
           </a:p>
         </p:txBody>
       </p:sp>
@@ -10398,13 +11186,20 @@
             <a:prstDash val="solid"/>
           </a:ln>
           <a:effectLst>
-            <a:outerShdw sx="100000" sy="100000" kx="0" ky="0" algn="bl" rotWithShape="0" blurRad="127000" dist="25400" dir="5400000">
+            <a:outerShdw blurRad="127000" dist="25400" dir="5400000" algn="bl" rotWithShape="0">
               <a:srgbClr val="0C1A1A">
                 <a:alpha val="10000"/>
               </a:srgbClr>
             </a:outerShdw>
           </a:effectLst>
         </p:spPr>
+        <p:txBody>
+          <a:bodyPr/>
+          <a:lstStyle/>
+          <a:p>
+            <a:endParaRPr lang="en-PK"/>
+          </a:p>
+        </p:txBody>
       </p:sp>
       <p:sp>
         <p:nvSpPr>
@@ -10425,6 +11220,13 @@
           </a:solidFill>
           <a:ln/>
         </p:spPr>
+        <p:txBody>
+          <a:bodyPr/>
+          <a:lstStyle/>
+          <a:p>
+            <a:endParaRPr lang="en-PK"/>
+          </a:p>
+        </p:txBody>
       </p:sp>
       <p:sp>
         <p:nvSpPr>
@@ -10447,6 +11249,13 @@
           </a:solidFill>
           <a:ln/>
         </p:spPr>
+        <p:txBody>
+          <a:bodyPr/>
+          <a:lstStyle/>
+          <a:p>
+            <a:endParaRPr lang="en-PK"/>
+          </a:p>
+        </p:txBody>
       </p:sp>
       <p:sp>
         <p:nvSpPr>
@@ -10469,7 +11278,7 @@
           <a:bodyPr wrap="square" rtlCol="0" anchor="ctr"/>
           <a:lstStyle/>
           <a:p>
-            <a:pPr algn="ctr" indent="0" marL="0">
+            <a:pPr marL="0" indent="0" algn="ctr">
               <a:buNone/>
             </a:pPr>
             <a:r>
@@ -10508,7 +11317,7 @@
           <a:bodyPr wrap="square" rtlCol="0" anchor="t"/>
           <a:lstStyle/>
           <a:p>
-            <a:pPr algn="ctr" indent="0" marL="0">
+            <a:pPr marL="0" indent="0" algn="ctr">
               <a:lnSpc>
                 <a:spcPts val="1600"/>
               </a:lnSpc>
@@ -10550,14 +11359,14 @@
           <a:bodyPr wrap="square" rtlCol="0" anchor="t"/>
           <a:lstStyle/>
           <a:p>
-            <a:pPr algn="ctr" indent="0" marL="0">
+            <a:pPr marL="0" indent="0" algn="ctr">
               <a:lnSpc>
                 <a:spcPts val="1500"/>
               </a:lnSpc>
               <a:buNone/>
             </a:pPr>
             <a:r>
-              <a:rPr lang="en-US" sz="1050" dirty="0">
+              <a:rPr lang="en-US" sz="1300" dirty="0">
                 <a:solidFill>
                   <a:srgbClr val="2E3B3D"/>
                 </a:solidFill>
@@ -10567,7 +11376,7 @@
               </a:rPr>
               <a:t>Embed top ads and Meta policy as vectors.</a:t>
             </a:r>
-            <a:endParaRPr lang="en-US" sz="1050" dirty="0"/>
+            <a:endParaRPr lang="en-US" sz="1300" dirty="0"/>
           </a:p>
         </p:txBody>
       </p:sp>
@@ -10597,13 +11406,20 @@
             <a:prstDash val="solid"/>
           </a:ln>
           <a:effectLst>
-            <a:outerShdw sx="100000" sy="100000" kx="0" ky="0" algn="bl" rotWithShape="0" blurRad="127000" dist="25400" dir="5400000">
+            <a:outerShdw blurRad="127000" dist="25400" dir="5400000" algn="bl" rotWithShape="0">
               <a:srgbClr val="0C1A1A">
                 <a:alpha val="10000"/>
               </a:srgbClr>
             </a:outerShdw>
           </a:effectLst>
         </p:spPr>
+        <p:txBody>
+          <a:bodyPr/>
+          <a:lstStyle/>
+          <a:p>
+            <a:endParaRPr lang="en-PK"/>
+          </a:p>
+        </p:txBody>
       </p:sp>
       <p:sp>
         <p:nvSpPr>
@@ -10624,6 +11440,13 @@
           </a:solidFill>
           <a:ln/>
         </p:spPr>
+        <p:txBody>
+          <a:bodyPr/>
+          <a:lstStyle/>
+          <a:p>
+            <a:endParaRPr lang="en-PK"/>
+          </a:p>
+        </p:txBody>
       </p:sp>
       <p:sp>
         <p:nvSpPr>
@@ -10646,6 +11469,13 @@
           </a:solidFill>
           <a:ln/>
         </p:spPr>
+        <p:txBody>
+          <a:bodyPr/>
+          <a:lstStyle/>
+          <a:p>
+            <a:endParaRPr lang="en-PK"/>
+          </a:p>
+        </p:txBody>
       </p:sp>
       <p:sp>
         <p:nvSpPr>
@@ -10668,7 +11498,7 @@
           <a:bodyPr wrap="square" rtlCol="0" anchor="ctr"/>
           <a:lstStyle/>
           <a:p>
-            <a:pPr algn="ctr" indent="0" marL="0">
+            <a:pPr marL="0" indent="0" algn="ctr">
               <a:buNone/>
             </a:pPr>
             <a:r>
@@ -10707,7 +11537,7 @@
           <a:bodyPr wrap="square" rtlCol="0" anchor="t"/>
           <a:lstStyle/>
           <a:p>
-            <a:pPr algn="ctr" indent="0" marL="0">
+            <a:pPr marL="0" indent="0" algn="ctr">
               <a:lnSpc>
                 <a:spcPts val="1600"/>
               </a:lnSpc>
@@ -10749,14 +11579,14 @@
           <a:bodyPr wrap="square" rtlCol="0" anchor="t"/>
           <a:lstStyle/>
           <a:p>
-            <a:pPr algn="ctr" indent="0" marL="0">
+            <a:pPr marL="0" indent="0" algn="ctr">
               <a:lnSpc>
                 <a:spcPts val="1500"/>
               </a:lnSpc>
               <a:buNone/>
             </a:pPr>
             <a:r>
-              <a:rPr lang="en-US" sz="1050" dirty="0">
+              <a:rPr lang="en-US" sz="1300" dirty="0">
                 <a:solidFill>
                   <a:srgbClr val="2E3B3D"/>
                 </a:solidFill>
@@ -10766,7 +11596,7 @@
               </a:rPr>
               <a:t>Prompts, RAG pipeline, Bradley Filter.</a:t>
             </a:r>
-            <a:endParaRPr lang="en-US" sz="1050" dirty="0"/>
+            <a:endParaRPr lang="en-US" sz="1300" dirty="0"/>
           </a:p>
         </p:txBody>
       </p:sp>
@@ -10796,13 +11626,20 @@
             <a:prstDash val="solid"/>
           </a:ln>
           <a:effectLst>
-            <a:outerShdw sx="100000" sy="100000" kx="0" ky="0" algn="bl" rotWithShape="0" blurRad="127000" dist="25400" dir="5400000">
+            <a:outerShdw blurRad="127000" dist="25400" dir="5400000" algn="bl" rotWithShape="0">
               <a:srgbClr val="0C1A1A">
                 <a:alpha val="10000"/>
               </a:srgbClr>
             </a:outerShdw>
           </a:effectLst>
         </p:spPr>
+        <p:txBody>
+          <a:bodyPr/>
+          <a:lstStyle/>
+          <a:p>
+            <a:endParaRPr lang="en-PK"/>
+          </a:p>
+        </p:txBody>
       </p:sp>
       <p:sp>
         <p:nvSpPr>
@@ -10823,6 +11660,13 @@
           </a:solidFill>
           <a:ln/>
         </p:spPr>
+        <p:txBody>
+          <a:bodyPr/>
+          <a:lstStyle/>
+          <a:p>
+            <a:endParaRPr lang="en-PK"/>
+          </a:p>
+        </p:txBody>
       </p:sp>
       <p:sp>
         <p:nvSpPr>
@@ -10845,6 +11689,13 @@
           </a:solidFill>
           <a:ln/>
         </p:spPr>
+        <p:txBody>
+          <a:bodyPr/>
+          <a:lstStyle/>
+          <a:p>
+            <a:endParaRPr lang="en-PK"/>
+          </a:p>
+        </p:txBody>
       </p:sp>
       <p:sp>
         <p:nvSpPr>
@@ -10867,7 +11718,7 @@
           <a:bodyPr wrap="square" rtlCol="0" anchor="ctr"/>
           <a:lstStyle/>
           <a:p>
-            <a:pPr algn="ctr" indent="0" marL="0">
+            <a:pPr marL="0" indent="0" algn="ctr">
               <a:buNone/>
             </a:pPr>
             <a:r>
@@ -10906,7 +11757,7 @@
           <a:bodyPr wrap="square" rtlCol="0" anchor="t"/>
           <a:lstStyle/>
           <a:p>
-            <a:pPr algn="ctr" indent="0" marL="0">
+            <a:pPr marL="0" indent="0" algn="ctr">
               <a:lnSpc>
                 <a:spcPts val="1600"/>
               </a:lnSpc>
@@ -10948,14 +11799,14 @@
           <a:bodyPr wrap="square" rtlCol="0" anchor="t"/>
           <a:lstStyle/>
           <a:p>
-            <a:pPr algn="ctr" indent="0" marL="0">
+            <a:pPr marL="0" indent="0" algn="ctr">
               <a:lnSpc>
                 <a:spcPts val="1500"/>
               </a:lnSpc>
               <a:buNone/>
             </a:pPr>
             <a:r>
-              <a:rPr lang="en-US" sz="1050" dirty="0">
+              <a:rPr lang="en-US" sz="1300" dirty="0">
                 <a:solidFill>
                   <a:srgbClr val="2E3B3D"/>
                 </a:solidFill>
@@ -10963,9 +11814,31 @@
                 <a:ea typeface="Verdana" pitchFamily="34" charset="-122"/>
                 <a:cs typeface="Verdana" pitchFamily="34" charset="-120"/>
               </a:rPr>
-              <a:t>Meta, Stripe, WhatsApp, S3, BullMQ.</a:t>
-            </a:r>
-            <a:endParaRPr lang="en-US" sz="1050" dirty="0"/>
+              <a:t>Meta, Stripe, WhatsApp, S3, </a:t>
+            </a:r>
+            <a:r>
+              <a:rPr lang="en-US" sz="1300" dirty="0" err="1">
+                <a:solidFill>
+                  <a:srgbClr val="2E3B3D"/>
+                </a:solidFill>
+                <a:latin typeface="Verdana" pitchFamily="34" charset="0"/>
+                <a:ea typeface="Verdana" pitchFamily="34" charset="-122"/>
+                <a:cs typeface="Verdana" pitchFamily="34" charset="-120"/>
+              </a:rPr>
+              <a:t>BullMQ</a:t>
+            </a:r>
+            <a:r>
+              <a:rPr lang="en-US" sz="1300" dirty="0">
+                <a:solidFill>
+                  <a:srgbClr val="2E3B3D"/>
+                </a:solidFill>
+                <a:latin typeface="Verdana" pitchFamily="34" charset="0"/>
+                <a:ea typeface="Verdana" pitchFamily="34" charset="-122"/>
+                <a:cs typeface="Verdana" pitchFamily="34" charset="-120"/>
+              </a:rPr>
+              <a:t>.</a:t>
+            </a:r>
+            <a:endParaRPr lang="en-US" sz="1300" dirty="0"/>
           </a:p>
         </p:txBody>
       </p:sp>
@@ -10995,13 +11868,20 @@
             <a:prstDash val="solid"/>
           </a:ln>
           <a:effectLst>
-            <a:outerShdw sx="100000" sy="100000" kx="0" ky="0" algn="bl" rotWithShape="0" blurRad="127000" dist="25400" dir="5400000">
+            <a:outerShdw blurRad="127000" dist="25400" dir="5400000" algn="bl" rotWithShape="0">
               <a:srgbClr val="0C1A1A">
                 <a:alpha val="10000"/>
               </a:srgbClr>
             </a:outerShdw>
           </a:effectLst>
         </p:spPr>
+        <p:txBody>
+          <a:bodyPr/>
+          <a:lstStyle/>
+          <a:p>
+            <a:endParaRPr lang="en-PK"/>
+          </a:p>
+        </p:txBody>
       </p:sp>
       <p:sp>
         <p:nvSpPr>
@@ -11022,6 +11902,13 @@
           </a:solidFill>
           <a:ln/>
         </p:spPr>
+        <p:txBody>
+          <a:bodyPr/>
+          <a:lstStyle/>
+          <a:p>
+            <a:endParaRPr lang="en-PK"/>
+          </a:p>
+        </p:txBody>
       </p:sp>
       <p:sp>
         <p:nvSpPr>
@@ -11044,6 +11931,13 @@
           </a:solidFill>
           <a:ln/>
         </p:spPr>
+        <p:txBody>
+          <a:bodyPr/>
+          <a:lstStyle/>
+          <a:p>
+            <a:endParaRPr lang="en-PK"/>
+          </a:p>
+        </p:txBody>
       </p:sp>
       <p:sp>
         <p:nvSpPr>
@@ -11066,7 +11960,7 @@
           <a:bodyPr wrap="square" rtlCol="0" anchor="ctr"/>
           <a:lstStyle/>
           <a:p>
-            <a:pPr algn="ctr" indent="0" marL="0">
+            <a:pPr marL="0" indent="0" algn="ctr">
               <a:buNone/>
             </a:pPr>
             <a:r>
@@ -11105,7 +11999,7 @@
           <a:bodyPr wrap="square" rtlCol="0" anchor="t"/>
           <a:lstStyle/>
           <a:p>
-            <a:pPr algn="ctr" indent="0" marL="0">
+            <a:pPr marL="0" indent="0" algn="ctr">
               <a:lnSpc>
                 <a:spcPts val="1600"/>
               </a:lnSpc>
@@ -11147,14 +12041,14 @@
           <a:bodyPr wrap="square" rtlCol="0" anchor="t"/>
           <a:lstStyle/>
           <a:p>
-            <a:pPr algn="ctr" indent="0" marL="0">
+            <a:pPr marL="0" indent="0" algn="ctr">
               <a:lnSpc>
                 <a:spcPts val="1500"/>
               </a:lnSpc>
               <a:buNone/>
             </a:pPr>
             <a:r>
-              <a:rPr lang="en-US" sz="1050" dirty="0">
+              <a:rPr lang="en-US" sz="1300" dirty="0">
                 <a:solidFill>
                   <a:srgbClr val="2E3B3D"/>
                 </a:solidFill>
@@ -11164,7 +12058,7 @@
               </a:rPr>
               <a:t>Compliance rate, latency, scoring accuracy.</a:t>
             </a:r>
-            <a:endParaRPr lang="en-US" sz="1050" dirty="0"/>
+            <a:endParaRPr lang="en-US" sz="1300" dirty="0"/>
           </a:p>
         </p:txBody>
       </p:sp>
@@ -11194,13 +12088,20 @@
             <a:prstDash val="solid"/>
           </a:ln>
           <a:effectLst>
-            <a:outerShdw sx="100000" sy="100000" kx="0" ky="0" algn="bl" rotWithShape="0" blurRad="127000" dist="25400" dir="5400000">
+            <a:outerShdw blurRad="127000" dist="25400" dir="5400000" algn="bl" rotWithShape="0">
               <a:srgbClr val="0C1A1A">
                 <a:alpha val="10000"/>
               </a:srgbClr>
             </a:outerShdw>
           </a:effectLst>
         </p:spPr>
+        <p:txBody>
+          <a:bodyPr/>
+          <a:lstStyle/>
+          <a:p>
+            <a:endParaRPr lang="en-PK"/>
+          </a:p>
+        </p:txBody>
       </p:sp>
       <p:sp>
         <p:nvSpPr>
@@ -11221,6 +12122,13 @@
           </a:solidFill>
           <a:ln/>
         </p:spPr>
+        <p:txBody>
+          <a:bodyPr/>
+          <a:lstStyle/>
+          <a:p>
+            <a:endParaRPr lang="en-PK"/>
+          </a:p>
+        </p:txBody>
       </p:sp>
       <p:sp>
         <p:nvSpPr>
@@ -11243,6 +12151,13 @@
           </a:solidFill>
           <a:ln/>
         </p:spPr>
+        <p:txBody>
+          <a:bodyPr/>
+          <a:lstStyle/>
+          <a:p>
+            <a:endParaRPr lang="en-PK"/>
+          </a:p>
+        </p:txBody>
       </p:sp>
       <p:sp>
         <p:nvSpPr>
@@ -11265,7 +12180,7 @@
           <a:bodyPr wrap="square" rtlCol="0" anchor="ctr"/>
           <a:lstStyle/>
           <a:p>
-            <a:pPr algn="ctr" indent="0" marL="0">
+            <a:pPr marL="0" indent="0" algn="ctr">
               <a:buNone/>
             </a:pPr>
             <a:r>
@@ -11304,7 +12219,7 @@
           <a:bodyPr wrap="square" rtlCol="0" anchor="t"/>
           <a:lstStyle/>
           <a:p>
-            <a:pPr algn="ctr" indent="0" marL="0">
+            <a:pPr marL="0" indent="0" algn="ctr">
               <a:lnSpc>
                 <a:spcPts val="1600"/>
               </a:lnSpc>
@@ -11346,14 +12261,14 @@
           <a:bodyPr wrap="square" rtlCol="0" anchor="t"/>
           <a:lstStyle/>
           <a:p>
-            <a:pPr algn="ctr" indent="0" marL="0">
+            <a:pPr marL="0" indent="0" algn="ctr">
               <a:lnSpc>
                 <a:spcPts val="1500"/>
               </a:lnSpc>
               <a:buNone/>
             </a:pPr>
             <a:r>
-              <a:rPr lang="en-US" sz="1050" dirty="0">
+              <a:rPr lang="en-US" sz="1300" dirty="0">
                 <a:solidFill>
                   <a:srgbClr val="2E3B3D"/>
                 </a:solidFill>
@@ -11363,7 +12278,7 @@
               </a:rPr>
               <a:t>Docker on AWS, GitHub Actions CI/CD.</a:t>
             </a:r>
-            <a:endParaRPr lang="en-US" sz="1050" dirty="0"/>
+            <a:endParaRPr lang="en-US" sz="1300" dirty="0"/>
           </a:p>
         </p:txBody>
       </p:sp>
@@ -11386,6 +12301,13 @@
           </a:solidFill>
           <a:ln/>
         </p:spPr>
+        <p:txBody>
+          <a:bodyPr/>
+          <a:lstStyle/>
+          <a:p>
+            <a:endParaRPr lang="en-PK"/>
+          </a:p>
+        </p:txBody>
       </p:sp>
       <p:sp>
         <p:nvSpPr>
@@ -11406,6 +12328,13 @@
           </a:solidFill>
           <a:ln/>
         </p:spPr>
+        <p:txBody>
+          <a:bodyPr/>
+          <a:lstStyle/>
+          <a:p>
+            <a:endParaRPr lang="en-PK"/>
+          </a:p>
+        </p:txBody>
       </p:sp>
       <p:sp>
         <p:nvSpPr>
@@ -11426,6 +12355,13 @@
           </a:solidFill>
           <a:ln/>
         </p:spPr>
+        <p:txBody>
+          <a:bodyPr/>
+          <a:lstStyle/>
+          <a:p>
+            <a:endParaRPr lang="en-PK"/>
+          </a:p>
+        </p:txBody>
       </p:sp>
       <p:sp>
         <p:nvSpPr>
@@ -11446,6 +12382,13 @@
           </a:solidFill>
           <a:ln/>
         </p:spPr>
+        <p:txBody>
+          <a:bodyPr/>
+          <a:lstStyle/>
+          <a:p>
+            <a:endParaRPr lang="en-PK"/>
+          </a:p>
+        </p:txBody>
       </p:sp>
       <p:sp>
         <p:nvSpPr>
@@ -11466,6 +12409,13 @@
           </a:solidFill>
           <a:ln/>
         </p:spPr>
+        <p:txBody>
+          <a:bodyPr/>
+          <a:lstStyle/>
+          <a:p>
+            <a:endParaRPr lang="en-PK"/>
+          </a:p>
+        </p:txBody>
       </p:sp>
       <p:sp>
         <p:nvSpPr>
@@ -11486,6 +12436,13 @@
           </a:solidFill>
           <a:ln/>
         </p:spPr>
+        <p:txBody>
+          <a:bodyPr/>
+          <a:lstStyle/>
+          <a:p>
+            <a:endParaRPr lang="en-PK"/>
+          </a:p>
+        </p:txBody>
       </p:sp>
       <p:sp>
         <p:nvSpPr>
@@ -11513,13 +12470,20 @@
             <a:prstDash val="solid"/>
           </a:ln>
           <a:effectLst>
-            <a:outerShdw sx="100000" sy="100000" kx="0" ky="0" algn="bl" rotWithShape="0" blurRad="127000" dist="25400" dir="5400000">
+            <a:outerShdw blurRad="127000" dist="25400" dir="5400000" algn="bl" rotWithShape="0">
               <a:srgbClr val="0C1A1A">
                 <a:alpha val="10000"/>
               </a:srgbClr>
             </a:outerShdw>
           </a:effectLst>
         </p:spPr>
+        <p:txBody>
+          <a:bodyPr/>
+          <a:lstStyle/>
+          <a:p>
+            <a:endParaRPr lang="en-PK"/>
+          </a:p>
+        </p:txBody>
       </p:sp>
       <p:sp>
         <p:nvSpPr>
@@ -11542,7 +12506,7 @@
           <a:bodyPr wrap="square" rtlCol="0" anchor="ctr"/>
           <a:lstStyle/>
           <a:p>
-            <a:pPr indent="0" marL="0">
+            <a:pPr marL="0" indent="0">
               <a:buNone/>
             </a:pPr>
             <a:r>
@@ -11581,7 +12545,7 @@
           <a:bodyPr wrap="square" rtlCol="0" anchor="t"/>
           <a:lstStyle/>
           <a:p>
-            <a:pPr indent="0" marL="0">
+            <a:pPr marL="0" indent="0">
               <a:lnSpc>
                 <a:spcPts val="2200"/>
               </a:lnSpc>
@@ -11618,6 +12582,7 @@
         <a:solidFill>
           <a:srgbClr val="F4F7F6"/>
         </a:solidFill>
+        <a:effectLst/>
       </p:bgPr>
     </p:bg>
     <p:spTree>
@@ -11653,6 +12618,13 @@
           </a:solidFill>
           <a:ln/>
         </p:spPr>
+        <p:txBody>
+          <a:bodyPr/>
+          <a:lstStyle/>
+          <a:p>
+            <a:endParaRPr lang="en-PK"/>
+          </a:p>
+        </p:txBody>
       </p:sp>
       <p:sp>
         <p:nvSpPr>
@@ -11673,6 +12645,13 @@
           </a:solidFill>
           <a:ln/>
         </p:spPr>
+        <p:txBody>
+          <a:bodyPr/>
+          <a:lstStyle/>
+          <a:p>
+            <a:endParaRPr lang="en-PK"/>
+          </a:p>
+        </p:txBody>
       </p:sp>
       <p:sp>
         <p:nvSpPr>
@@ -11693,6 +12672,13 @@
           </a:solidFill>
           <a:ln/>
         </p:spPr>
+        <p:txBody>
+          <a:bodyPr/>
+          <a:lstStyle/>
+          <a:p>
+            <a:endParaRPr lang="en-PK"/>
+          </a:p>
+        </p:txBody>
       </p:sp>
       <p:sp>
         <p:nvSpPr>
@@ -11715,11 +12701,11 @@
           <a:bodyPr wrap="square" rtlCol="0" anchor="ctr"/>
           <a:lstStyle/>
           <a:p>
-            <a:pPr indent="0" marL="0">
+            <a:pPr marL="0" indent="0">
               <a:buNone/>
             </a:pPr>
             <a:r>
-              <a:rPr lang="en-US" sz="1150" b="1" spc="200" kern="0" dirty="0">
+              <a:rPr lang="en-US" sz="1150" b="1" kern="0" spc="200" dirty="0">
                 <a:solidFill>
                   <a:srgbClr val="5EEAD4"/>
                 </a:solidFill>
@@ -11754,7 +12740,7 @@
           <a:bodyPr wrap="square" rtlCol="0" anchor="ctr"/>
           <a:lstStyle/>
           <a:p>
-            <a:pPr indent="0" marL="0">
+            <a:pPr marL="0" indent="0">
               <a:buNone/>
             </a:pPr>
             <a:r>
@@ -11793,6 +12779,13 @@
           </a:solidFill>
           <a:ln/>
         </p:spPr>
+        <p:txBody>
+          <a:bodyPr/>
+          <a:lstStyle/>
+          <a:p>
+            <a:endParaRPr lang="en-PK"/>
+          </a:p>
+        </p:txBody>
       </p:sp>
       <p:sp>
         <p:nvSpPr>
@@ -11813,6 +12806,13 @@
           </a:solidFill>
           <a:ln/>
         </p:spPr>
+        <p:txBody>
+          <a:bodyPr/>
+          <a:lstStyle/>
+          <a:p>
+            <a:endParaRPr lang="en-PK"/>
+          </a:p>
+        </p:txBody>
       </p:sp>
       <p:sp>
         <p:nvSpPr>
@@ -11833,6 +12833,13 @@
           </a:solidFill>
           <a:ln/>
         </p:spPr>
+        <p:txBody>
+          <a:bodyPr/>
+          <a:lstStyle/>
+          <a:p>
+            <a:endParaRPr lang="en-PK"/>
+          </a:p>
+        </p:txBody>
       </p:sp>
       <p:sp>
         <p:nvSpPr>
@@ -11853,6 +12860,13 @@
           </a:solidFill>
           <a:ln/>
         </p:spPr>
+        <p:txBody>
+          <a:bodyPr/>
+          <a:lstStyle/>
+          <a:p>
+            <a:endParaRPr lang="en-PK"/>
+          </a:p>
+        </p:txBody>
       </p:sp>
       <p:sp>
         <p:nvSpPr>
@@ -11873,6 +12887,13 @@
           </a:solidFill>
           <a:ln/>
         </p:spPr>
+        <p:txBody>
+          <a:bodyPr/>
+          <a:lstStyle/>
+          <a:p>
+            <a:endParaRPr lang="en-PK"/>
+          </a:p>
+        </p:txBody>
       </p:sp>
       <p:sp>
         <p:nvSpPr>
@@ -11893,6 +12914,13 @@
           </a:solidFill>
           <a:ln/>
         </p:spPr>
+        <p:txBody>
+          <a:bodyPr/>
+          <a:lstStyle/>
+          <a:p>
+            <a:endParaRPr lang="en-PK"/>
+          </a:p>
+        </p:txBody>
       </p:sp>
       <p:sp>
         <p:nvSpPr>
@@ -11913,6 +12941,13 @@
           </a:solidFill>
           <a:ln/>
         </p:spPr>
+        <p:txBody>
+          <a:bodyPr/>
+          <a:lstStyle/>
+          <a:p>
+            <a:endParaRPr lang="en-PK"/>
+          </a:p>
+        </p:txBody>
       </p:sp>
       <p:sp>
         <p:nvSpPr>
@@ -11935,7 +12970,7 @@
           <a:bodyPr wrap="square" rtlCol="0" anchor="ctr"/>
           <a:lstStyle/>
           <a:p>
-            <a:pPr indent="0" marL="0">
+            <a:pPr marL="0" indent="0">
               <a:buNone/>
             </a:pPr>
             <a:r>
@@ -11974,6 +13009,13 @@
           </a:solidFill>
           <a:ln/>
         </p:spPr>
+        <p:txBody>
+          <a:bodyPr/>
+          <a:lstStyle/>
+          <a:p>
+            <a:endParaRPr lang="en-PK"/>
+          </a:p>
+        </p:txBody>
       </p:sp>
       <p:sp>
         <p:nvSpPr>
@@ -11996,7 +13038,7 @@
           <a:bodyPr wrap="square" rtlCol="0" anchor="ctr"/>
           <a:lstStyle/>
           <a:p>
-            <a:pPr algn="ctr" indent="0" marL="0">
+            <a:pPr marL="0" indent="0" algn="ctr">
               <a:buNone/>
             </a:pPr>
             <a:r>
@@ -12040,13 +13082,20 @@
             <a:prstDash val="solid"/>
           </a:ln>
           <a:effectLst>
-            <a:outerShdw sx="100000" sy="100000" kx="0" ky="0" algn="bl" rotWithShape="0" blurRad="127000" dist="25400" dir="5400000">
+            <a:outerShdw blurRad="127000" dist="25400" dir="5400000" algn="bl" rotWithShape="0">
               <a:srgbClr val="0C1A1A">
                 <a:alpha val="10000"/>
               </a:srgbClr>
             </a:outerShdw>
           </a:effectLst>
         </p:spPr>
+        <p:txBody>
+          <a:bodyPr/>
+          <a:lstStyle/>
+          <a:p>
+            <a:endParaRPr lang="en-PK"/>
+          </a:p>
+        </p:txBody>
       </p:sp>
       <p:sp>
         <p:nvSpPr>
@@ -12067,6 +13116,13 @@
           </a:solidFill>
           <a:ln/>
         </p:spPr>
+        <p:txBody>
+          <a:bodyPr/>
+          <a:lstStyle/>
+          <a:p>
+            <a:endParaRPr lang="en-PK"/>
+          </a:p>
+        </p:txBody>
       </p:sp>
       <p:sp>
         <p:nvSpPr>
@@ -12089,7 +13145,7 @@
           <a:bodyPr wrap="square" rtlCol="0" anchor="ctr"/>
           <a:lstStyle/>
           <a:p>
-            <a:pPr algn="ctr" indent="0" marL="0">
+            <a:pPr marL="0" indent="0" algn="ctr">
               <a:buNone/>
             </a:pPr>
             <a:r>
@@ -12128,7 +13184,7 @@
           <a:bodyPr wrap="square" rtlCol="0" anchor="ctr"/>
           <a:lstStyle/>
           <a:p>
-            <a:pPr indent="0" marL="0">
+            <a:pPr marL="0" indent="0">
               <a:buNone/>
             </a:pPr>
             <a:r>
@@ -12167,7 +13223,7 @@
           <a:bodyPr wrap="square" rtlCol="0" anchor="ctr"/>
           <a:lstStyle/>
           <a:p>
-            <a:pPr indent="0" marL="0">
+            <a:pPr marL="0" indent="0">
               <a:buNone/>
             </a:pPr>
             <a:r>
@@ -12211,13 +13267,20 @@
             <a:prstDash val="solid"/>
           </a:ln>
           <a:effectLst>
-            <a:outerShdw sx="100000" sy="100000" kx="0" ky="0" algn="bl" rotWithShape="0" blurRad="127000" dist="25400" dir="5400000">
+            <a:outerShdw blurRad="127000" dist="25400" dir="5400000" algn="bl" rotWithShape="0">
               <a:srgbClr val="0C1A1A">
                 <a:alpha val="10000"/>
               </a:srgbClr>
             </a:outerShdw>
           </a:effectLst>
         </p:spPr>
+        <p:txBody>
+          <a:bodyPr/>
+          <a:lstStyle/>
+          <a:p>
+            <a:endParaRPr lang="en-PK"/>
+          </a:p>
+        </p:txBody>
       </p:sp>
       <p:sp>
         <p:nvSpPr>
@@ -12238,6 +13301,13 @@
           </a:solidFill>
           <a:ln/>
         </p:spPr>
+        <p:txBody>
+          <a:bodyPr/>
+          <a:lstStyle/>
+          <a:p>
+            <a:endParaRPr lang="en-PK"/>
+          </a:p>
+        </p:txBody>
       </p:sp>
       <p:sp>
         <p:nvSpPr>
@@ -12260,7 +13330,7 @@
           <a:bodyPr wrap="square" rtlCol="0" anchor="ctr"/>
           <a:lstStyle/>
           <a:p>
-            <a:pPr algn="ctr" indent="0" marL="0">
+            <a:pPr marL="0" indent="0" algn="ctr">
               <a:buNone/>
             </a:pPr>
             <a:r>
@@ -12299,7 +13369,7 @@
           <a:bodyPr wrap="square" rtlCol="0" anchor="ctr"/>
           <a:lstStyle/>
           <a:p>
-            <a:pPr indent="0" marL="0">
+            <a:pPr marL="0" indent="0">
               <a:buNone/>
             </a:pPr>
             <a:r>
@@ -12338,7 +13408,7 @@
           <a:bodyPr wrap="square" rtlCol="0" anchor="ctr"/>
           <a:lstStyle/>
           <a:p>
-            <a:pPr indent="0" marL="0">
+            <a:pPr marL="0" indent="0">
               <a:buNone/>
             </a:pPr>
             <a:r>
@@ -12382,13 +13452,20 @@
             <a:prstDash val="solid"/>
           </a:ln>
           <a:effectLst>
-            <a:outerShdw sx="100000" sy="100000" kx="0" ky="0" algn="bl" rotWithShape="0" blurRad="127000" dist="25400" dir="5400000">
+            <a:outerShdw blurRad="127000" dist="25400" dir="5400000" algn="bl" rotWithShape="0">
               <a:srgbClr val="0C1A1A">
                 <a:alpha val="10000"/>
               </a:srgbClr>
             </a:outerShdw>
           </a:effectLst>
         </p:spPr>
+        <p:txBody>
+          <a:bodyPr/>
+          <a:lstStyle/>
+          <a:p>
+            <a:endParaRPr lang="en-PK"/>
+          </a:p>
+        </p:txBody>
       </p:sp>
       <p:sp>
         <p:nvSpPr>
@@ -12409,6 +13486,13 @@
           </a:solidFill>
           <a:ln/>
         </p:spPr>
+        <p:txBody>
+          <a:bodyPr/>
+          <a:lstStyle/>
+          <a:p>
+            <a:endParaRPr lang="en-PK"/>
+          </a:p>
+        </p:txBody>
       </p:sp>
       <p:sp>
         <p:nvSpPr>
@@ -12431,7 +13515,7 @@
           <a:bodyPr wrap="square" rtlCol="0" anchor="ctr"/>
           <a:lstStyle/>
           <a:p>
-            <a:pPr algn="ctr" indent="0" marL="0">
+            <a:pPr marL="0" indent="0" algn="ctr">
               <a:buNone/>
             </a:pPr>
             <a:r>
@@ -12470,7 +13554,7 @@
           <a:bodyPr wrap="square" rtlCol="0" anchor="ctr"/>
           <a:lstStyle/>
           <a:p>
-            <a:pPr indent="0" marL="0">
+            <a:pPr marL="0" indent="0">
               <a:buNone/>
             </a:pPr>
             <a:r>
@@ -12509,7 +13593,7 @@
           <a:bodyPr wrap="square" rtlCol="0" anchor="ctr"/>
           <a:lstStyle/>
           <a:p>
-            <a:pPr indent="0" marL="0">
+            <a:pPr marL="0" indent="0">
               <a:buNone/>
             </a:pPr>
             <a:r>
@@ -12553,13 +13637,20 @@
             <a:prstDash val="solid"/>
           </a:ln>
           <a:effectLst>
-            <a:outerShdw sx="100000" sy="100000" kx="0" ky="0" algn="bl" rotWithShape="0" blurRad="127000" dist="25400" dir="5400000">
+            <a:outerShdw blurRad="127000" dist="25400" dir="5400000" algn="bl" rotWithShape="0">
               <a:srgbClr val="0C1A1A">
                 <a:alpha val="10000"/>
               </a:srgbClr>
             </a:outerShdw>
           </a:effectLst>
         </p:spPr>
+        <p:txBody>
+          <a:bodyPr/>
+          <a:lstStyle/>
+          <a:p>
+            <a:endParaRPr lang="en-PK"/>
+          </a:p>
+        </p:txBody>
       </p:sp>
       <p:sp>
         <p:nvSpPr>
@@ -12580,6 +13671,13 @@
           </a:solidFill>
           <a:ln/>
         </p:spPr>
+        <p:txBody>
+          <a:bodyPr/>
+          <a:lstStyle/>
+          <a:p>
+            <a:endParaRPr lang="en-PK"/>
+          </a:p>
+        </p:txBody>
       </p:sp>
       <p:sp>
         <p:nvSpPr>
@@ -12602,7 +13700,7 @@
           <a:bodyPr wrap="square" rtlCol="0" anchor="ctr"/>
           <a:lstStyle/>
           <a:p>
-            <a:pPr algn="ctr" indent="0" marL="0">
+            <a:pPr marL="0" indent="0" algn="ctr">
               <a:buNone/>
             </a:pPr>
             <a:r>
@@ -12641,7 +13739,7 @@
           <a:bodyPr wrap="square" rtlCol="0" anchor="ctr"/>
           <a:lstStyle/>
           <a:p>
-            <a:pPr indent="0" marL="0">
+            <a:pPr marL="0" indent="0">
               <a:buNone/>
             </a:pPr>
             <a:r>
@@ -12680,7 +13778,7 @@
           <a:bodyPr wrap="square" rtlCol="0" anchor="ctr"/>
           <a:lstStyle/>
           <a:p>
-            <a:pPr indent="0" marL="0">
+            <a:pPr marL="0" indent="0">
               <a:buNone/>
             </a:pPr>
             <a:r>
@@ -12724,13 +13822,20 @@
             <a:prstDash val="solid"/>
           </a:ln>
           <a:effectLst>
-            <a:outerShdw sx="100000" sy="100000" kx="0" ky="0" algn="bl" rotWithShape="0" blurRad="127000" dist="25400" dir="5400000">
+            <a:outerShdw blurRad="127000" dist="25400" dir="5400000" algn="bl" rotWithShape="0">
               <a:srgbClr val="0C1A1A">
                 <a:alpha val="10000"/>
               </a:srgbClr>
             </a:outerShdw>
           </a:effectLst>
         </p:spPr>
+        <p:txBody>
+          <a:bodyPr/>
+          <a:lstStyle/>
+          <a:p>
+            <a:endParaRPr lang="en-PK"/>
+          </a:p>
+        </p:txBody>
       </p:sp>
       <p:sp>
         <p:nvSpPr>
@@ -12751,6 +13856,13 @@
           </a:solidFill>
           <a:ln/>
         </p:spPr>
+        <p:txBody>
+          <a:bodyPr/>
+          <a:lstStyle/>
+          <a:p>
+            <a:endParaRPr lang="en-PK"/>
+          </a:p>
+        </p:txBody>
       </p:sp>
       <p:sp>
         <p:nvSpPr>
@@ -12773,7 +13885,7 @@
           <a:bodyPr wrap="square" rtlCol="0" anchor="ctr"/>
           <a:lstStyle/>
           <a:p>
-            <a:pPr algn="ctr" indent="0" marL="0">
+            <a:pPr marL="0" indent="0" algn="ctr">
               <a:buNone/>
             </a:pPr>
             <a:r>
@@ -12812,7 +13924,7 @@
           <a:bodyPr wrap="square" rtlCol="0" anchor="ctr"/>
           <a:lstStyle/>
           <a:p>
-            <a:pPr indent="0" marL="0">
+            <a:pPr marL="0" indent="0">
               <a:buNone/>
             </a:pPr>
             <a:r>
@@ -12851,7 +13963,7 @@
           <a:bodyPr wrap="square" rtlCol="0" anchor="ctr"/>
           <a:lstStyle/>
           <a:p>
-            <a:pPr indent="0" marL="0">
+            <a:pPr marL="0" indent="0">
               <a:buNone/>
             </a:pPr>
             <a:r>
@@ -12895,13 +14007,20 @@
             <a:prstDash val="solid"/>
           </a:ln>
           <a:effectLst>
-            <a:outerShdw sx="100000" sy="100000" kx="0" ky="0" algn="bl" rotWithShape="0" blurRad="127000" dist="25400" dir="5400000">
+            <a:outerShdw blurRad="127000" dist="25400" dir="5400000" algn="bl" rotWithShape="0">
               <a:srgbClr val="0C1A1A">
                 <a:alpha val="10000"/>
               </a:srgbClr>
             </a:outerShdw>
           </a:effectLst>
         </p:spPr>
+        <p:txBody>
+          <a:bodyPr/>
+          <a:lstStyle/>
+          <a:p>
+            <a:endParaRPr lang="en-PK"/>
+          </a:p>
+        </p:txBody>
       </p:sp>
       <p:sp>
         <p:nvSpPr>
@@ -12922,6 +14041,13 @@
           </a:solidFill>
           <a:ln/>
         </p:spPr>
+        <p:txBody>
+          <a:bodyPr/>
+          <a:lstStyle/>
+          <a:p>
+            <a:endParaRPr lang="en-PK"/>
+          </a:p>
+        </p:txBody>
       </p:sp>
       <p:sp>
         <p:nvSpPr>
@@ -12944,7 +14070,7 @@
           <a:bodyPr wrap="square" rtlCol="0" anchor="ctr"/>
           <a:lstStyle/>
           <a:p>
-            <a:pPr algn="ctr" indent="0" marL="0">
+            <a:pPr marL="0" indent="0" algn="ctr">
               <a:buNone/>
             </a:pPr>
             <a:r>
@@ -12983,7 +14109,7 @@
           <a:bodyPr wrap="square" rtlCol="0" anchor="ctr"/>
           <a:lstStyle/>
           <a:p>
-            <a:pPr indent="0" marL="0">
+            <a:pPr marL="0" indent="0">
               <a:buNone/>
             </a:pPr>
             <a:r>
@@ -13022,7 +14148,7 @@
           <a:bodyPr wrap="square" rtlCol="0" anchor="ctr"/>
           <a:lstStyle/>
           <a:p>
-            <a:pPr indent="0" marL="0">
+            <a:pPr marL="0" indent="0">
               <a:buNone/>
             </a:pPr>
             <a:r>
@@ -13066,13 +14192,20 @@
             <a:prstDash val="solid"/>
           </a:ln>
           <a:effectLst>
-            <a:outerShdw sx="100000" sy="100000" kx="0" ky="0" algn="bl" rotWithShape="0" blurRad="127000" dist="25400" dir="5400000">
+            <a:outerShdw blurRad="127000" dist="25400" dir="5400000" algn="bl" rotWithShape="0">
               <a:srgbClr val="0C1A1A">
                 <a:alpha val="10000"/>
               </a:srgbClr>
             </a:outerShdw>
           </a:effectLst>
         </p:spPr>
+        <p:txBody>
+          <a:bodyPr/>
+          <a:lstStyle/>
+          <a:p>
+            <a:endParaRPr lang="en-PK"/>
+          </a:p>
+        </p:txBody>
       </p:sp>
       <p:sp>
         <p:nvSpPr>
@@ -13093,6 +14226,13 @@
           </a:solidFill>
           <a:ln/>
         </p:spPr>
+        <p:txBody>
+          <a:bodyPr/>
+          <a:lstStyle/>
+          <a:p>
+            <a:endParaRPr lang="en-PK"/>
+          </a:p>
+        </p:txBody>
       </p:sp>
       <p:sp>
         <p:nvSpPr>
@@ -13115,7 +14255,7 @@
           <a:bodyPr wrap="square" rtlCol="0" anchor="ctr"/>
           <a:lstStyle/>
           <a:p>
-            <a:pPr algn="ctr" indent="0" marL="0">
+            <a:pPr marL="0" indent="0" algn="ctr">
               <a:buNone/>
             </a:pPr>
             <a:r>
@@ -13154,7 +14294,7 @@
           <a:bodyPr wrap="square" rtlCol="0" anchor="ctr"/>
           <a:lstStyle/>
           <a:p>
-            <a:pPr indent="0" marL="0">
+            <a:pPr marL="0" indent="0">
               <a:buNone/>
             </a:pPr>
             <a:r>
@@ -13193,7 +14333,7 @@
           <a:bodyPr wrap="square" rtlCol="0" anchor="ctr"/>
           <a:lstStyle/>
           <a:p>
-            <a:pPr indent="0" marL="0">
+            <a:pPr marL="0" indent="0">
               <a:buNone/>
             </a:pPr>
             <a:r>
@@ -13237,13 +14377,20 @@
             <a:prstDash val="solid"/>
           </a:ln>
           <a:effectLst>
-            <a:outerShdw sx="100000" sy="100000" kx="0" ky="0" algn="bl" rotWithShape="0" blurRad="127000" dist="25400" dir="5400000">
+            <a:outerShdw blurRad="127000" dist="25400" dir="5400000" algn="bl" rotWithShape="0">
               <a:srgbClr val="0C1A1A">
                 <a:alpha val="10000"/>
               </a:srgbClr>
             </a:outerShdw>
           </a:effectLst>
         </p:spPr>
+        <p:txBody>
+          <a:bodyPr/>
+          <a:lstStyle/>
+          <a:p>
+            <a:endParaRPr lang="en-PK"/>
+          </a:p>
+        </p:txBody>
       </p:sp>
       <p:sp>
         <p:nvSpPr>
@@ -13264,6 +14411,13 @@
           </a:solidFill>
           <a:ln/>
         </p:spPr>
+        <p:txBody>
+          <a:bodyPr/>
+          <a:lstStyle/>
+          <a:p>
+            <a:endParaRPr lang="en-PK"/>
+          </a:p>
+        </p:txBody>
       </p:sp>
       <p:sp>
         <p:nvSpPr>
@@ -13286,7 +14440,7 @@
           <a:bodyPr wrap="square" rtlCol="0" anchor="ctr"/>
           <a:lstStyle/>
           <a:p>
-            <a:pPr algn="ctr" indent="0" marL="0">
+            <a:pPr marL="0" indent="0" algn="ctr">
               <a:buNone/>
             </a:pPr>
             <a:r>
@@ -13325,7 +14479,7 @@
           <a:bodyPr wrap="square" rtlCol="0" anchor="ctr"/>
           <a:lstStyle/>
           <a:p>
-            <a:pPr indent="0" marL="0">
+            <a:pPr marL="0" indent="0">
               <a:buNone/>
             </a:pPr>
             <a:r>
@@ -13364,7 +14518,7 @@
           <a:bodyPr wrap="square" rtlCol="0" anchor="ctr"/>
           <a:lstStyle/>
           <a:p>
-            <a:pPr indent="0" marL="0">
+            <a:pPr marL="0" indent="0">
               <a:buNone/>
             </a:pPr>
             <a:r>
@@ -13408,13 +14562,20 @@
             <a:prstDash val="solid"/>
           </a:ln>
           <a:effectLst>
-            <a:outerShdw sx="100000" sy="100000" kx="0" ky="0" algn="bl" rotWithShape="0" blurRad="127000" dist="25400" dir="5400000">
+            <a:outerShdw blurRad="127000" dist="25400" dir="5400000" algn="bl" rotWithShape="0">
               <a:srgbClr val="0C1A1A">
                 <a:alpha val="10000"/>
               </a:srgbClr>
             </a:outerShdw>
           </a:effectLst>
         </p:spPr>
+        <p:txBody>
+          <a:bodyPr/>
+          <a:lstStyle/>
+          <a:p>
+            <a:endParaRPr lang="en-PK"/>
+          </a:p>
+        </p:txBody>
       </p:sp>
       <p:sp>
         <p:nvSpPr>
@@ -13435,6 +14596,13 @@
           </a:solidFill>
           <a:ln/>
         </p:spPr>
+        <p:txBody>
+          <a:bodyPr/>
+          <a:lstStyle/>
+          <a:p>
+            <a:endParaRPr lang="en-PK"/>
+          </a:p>
+        </p:txBody>
       </p:sp>
       <p:sp>
         <p:nvSpPr>
@@ -13457,7 +14625,7 @@
           <a:bodyPr wrap="square" rtlCol="0" anchor="ctr"/>
           <a:lstStyle/>
           <a:p>
-            <a:pPr algn="ctr" indent="0" marL="0">
+            <a:pPr marL="0" indent="0" algn="ctr">
               <a:buNone/>
             </a:pPr>
             <a:r>
@@ -13496,7 +14664,7 @@
           <a:bodyPr wrap="square" rtlCol="0" anchor="ctr"/>
           <a:lstStyle/>
           <a:p>
-            <a:pPr indent="0" marL="0">
+            <a:pPr marL="0" indent="0">
               <a:buNone/>
             </a:pPr>
             <a:r>
@@ -13535,7 +14703,7 @@
           <a:bodyPr wrap="square" rtlCol="0" anchor="ctr"/>
           <a:lstStyle/>
           <a:p>
-            <a:pPr indent="0" marL="0">
+            <a:pPr marL="0" indent="0">
               <a:buNone/>
             </a:pPr>
             <a:r>
@@ -13579,13 +14747,20 @@
             <a:prstDash val="solid"/>
           </a:ln>
           <a:effectLst>
-            <a:outerShdw sx="100000" sy="100000" kx="0" ky="0" algn="bl" rotWithShape="0" blurRad="127000" dist="25400" dir="5400000">
+            <a:outerShdw blurRad="127000" dist="25400" dir="5400000" algn="bl" rotWithShape="0">
               <a:srgbClr val="0C1A1A">
                 <a:alpha val="10000"/>
               </a:srgbClr>
             </a:outerShdw>
           </a:effectLst>
         </p:spPr>
+        <p:txBody>
+          <a:bodyPr/>
+          <a:lstStyle/>
+          <a:p>
+            <a:endParaRPr lang="en-PK"/>
+          </a:p>
+        </p:txBody>
       </p:sp>
       <p:sp>
         <p:nvSpPr>
@@ -13606,6 +14781,13 @@
           </a:solidFill>
           <a:ln/>
         </p:spPr>
+        <p:txBody>
+          <a:bodyPr/>
+          <a:lstStyle/>
+          <a:p>
+            <a:endParaRPr lang="en-PK"/>
+          </a:p>
+        </p:txBody>
       </p:sp>
       <p:sp>
         <p:nvSpPr>
@@ -13628,7 +14810,7 @@
           <a:bodyPr wrap="square" rtlCol="0" anchor="ctr"/>
           <a:lstStyle/>
           <a:p>
-            <a:pPr algn="ctr" indent="0" marL="0">
+            <a:pPr marL="0" indent="0" algn="ctr">
               <a:buNone/>
             </a:pPr>
             <a:r>
@@ -13667,7 +14849,7 @@
           <a:bodyPr wrap="square" rtlCol="0" anchor="ctr"/>
           <a:lstStyle/>
           <a:p>
-            <a:pPr indent="0" marL="0">
+            <a:pPr marL="0" indent="0">
               <a:buNone/>
             </a:pPr>
             <a:r>
@@ -13706,7 +14888,7 @@
           <a:bodyPr wrap="square" rtlCol="0" anchor="ctr"/>
           <a:lstStyle/>
           <a:p>
-            <a:pPr indent="0" marL="0">
+            <a:pPr marL="0" indent="0">
               <a:buNone/>
             </a:pPr>
             <a:r>
@@ -13745,7 +14927,7 @@
           <a:bodyPr wrap="square" rtlCol="0" anchor="ctr"/>
           <a:lstStyle/>
           <a:p>
-            <a:pPr indent="0" marL="0">
+            <a:pPr marL="0" indent="0">
               <a:buNone/>
             </a:pPr>
             <a:r>
@@ -13782,6 +14964,13 @@
           </a:solidFill>
           <a:ln/>
         </p:spPr>
+        <p:txBody>
+          <a:bodyPr/>
+          <a:lstStyle/>
+          <a:p>
+            <a:endParaRPr lang="en-PK"/>
+          </a:p>
+        </p:txBody>
       </p:sp>
       <p:sp>
         <p:nvSpPr>
@@ -13804,7 +14993,7 @@
           <a:bodyPr wrap="square" rtlCol="0" anchor="ctr"/>
           <a:lstStyle/>
           <a:p>
-            <a:pPr indent="0" marL="0">
+            <a:pPr marL="0" indent="0">
               <a:buNone/>
             </a:pPr>
             <a:r>
@@ -13841,6 +15030,13 @@
           </a:solidFill>
           <a:ln/>
         </p:spPr>
+        <p:txBody>
+          <a:bodyPr/>
+          <a:lstStyle/>
+          <a:p>
+            <a:endParaRPr lang="en-PK"/>
+          </a:p>
+        </p:txBody>
       </p:sp>
       <p:sp>
         <p:nvSpPr>
@@ -13863,7 +15059,7 @@
           <a:bodyPr wrap="square" rtlCol="0" anchor="ctr"/>
           <a:lstStyle/>
           <a:p>
-            <a:pPr indent="0" marL="0">
+            <a:pPr marL="0" indent="0">
               <a:buNone/>
             </a:pPr>
             <a:r>
@@ -13897,6 +15093,7 @@
         <a:solidFill>
           <a:srgbClr val="F4F7F6"/>
         </a:solidFill>
+        <a:effectLst/>
       </p:bgPr>
     </p:bg>
     <p:spTree>
@@ -13932,6 +15129,13 @@
           </a:solidFill>
           <a:ln/>
         </p:spPr>
+        <p:txBody>
+          <a:bodyPr/>
+          <a:lstStyle/>
+          <a:p>
+            <a:endParaRPr lang="en-PK"/>
+          </a:p>
+        </p:txBody>
       </p:sp>
       <p:sp>
         <p:nvSpPr>
@@ -13952,6 +15156,13 @@
           </a:solidFill>
           <a:ln/>
         </p:spPr>
+        <p:txBody>
+          <a:bodyPr/>
+          <a:lstStyle/>
+          <a:p>
+            <a:endParaRPr lang="en-PK"/>
+          </a:p>
+        </p:txBody>
       </p:sp>
       <p:sp>
         <p:nvSpPr>
@@ -13972,6 +15183,13 @@
           </a:solidFill>
           <a:ln/>
         </p:spPr>
+        <p:txBody>
+          <a:bodyPr/>
+          <a:lstStyle/>
+          <a:p>
+            <a:endParaRPr lang="en-PK"/>
+          </a:p>
+        </p:txBody>
       </p:sp>
       <p:sp>
         <p:nvSpPr>
@@ -13994,11 +15212,11 @@
           <a:bodyPr wrap="square" rtlCol="0" anchor="ctr"/>
           <a:lstStyle/>
           <a:p>
-            <a:pPr indent="0" marL="0">
+            <a:pPr marL="0" indent="0">
               <a:buNone/>
             </a:pPr>
             <a:r>
-              <a:rPr lang="en-US" sz="1150" b="1" spc="200" kern="0" dirty="0">
+              <a:rPr lang="en-US" sz="1150" b="1" kern="0" spc="200" dirty="0">
                 <a:solidFill>
                   <a:srgbClr val="5EEAD4"/>
                 </a:solidFill>
@@ -14033,7 +15251,7 @@
           <a:bodyPr wrap="square" rtlCol="0" anchor="ctr"/>
           <a:lstStyle/>
           <a:p>
-            <a:pPr indent="0" marL="0">
+            <a:pPr marL="0" indent="0">
               <a:buNone/>
             </a:pPr>
             <a:r>
@@ -14072,6 +15290,13 @@
           </a:solidFill>
           <a:ln/>
         </p:spPr>
+        <p:txBody>
+          <a:bodyPr/>
+          <a:lstStyle/>
+          <a:p>
+            <a:endParaRPr lang="en-PK"/>
+          </a:p>
+        </p:txBody>
       </p:sp>
       <p:sp>
         <p:nvSpPr>
@@ -14092,6 +15317,13 @@
           </a:solidFill>
           <a:ln/>
         </p:spPr>
+        <p:txBody>
+          <a:bodyPr/>
+          <a:lstStyle/>
+          <a:p>
+            <a:endParaRPr lang="en-PK"/>
+          </a:p>
+        </p:txBody>
       </p:sp>
       <p:sp>
         <p:nvSpPr>
@@ -14112,6 +15344,13 @@
           </a:solidFill>
           <a:ln/>
         </p:spPr>
+        <p:txBody>
+          <a:bodyPr/>
+          <a:lstStyle/>
+          <a:p>
+            <a:endParaRPr lang="en-PK"/>
+          </a:p>
+        </p:txBody>
       </p:sp>
       <p:sp>
         <p:nvSpPr>
@@ -14132,6 +15371,13 @@
           </a:solidFill>
           <a:ln/>
         </p:spPr>
+        <p:txBody>
+          <a:bodyPr/>
+          <a:lstStyle/>
+          <a:p>
+            <a:endParaRPr lang="en-PK"/>
+          </a:p>
+        </p:txBody>
       </p:sp>
       <p:sp>
         <p:nvSpPr>
@@ -14152,6 +15398,13 @@
           </a:solidFill>
           <a:ln/>
         </p:spPr>
+        <p:txBody>
+          <a:bodyPr/>
+          <a:lstStyle/>
+          <a:p>
+            <a:endParaRPr lang="en-PK"/>
+          </a:p>
+        </p:txBody>
       </p:sp>
       <p:sp>
         <p:nvSpPr>
@@ -14172,6 +15425,13 @@
           </a:solidFill>
           <a:ln/>
         </p:spPr>
+        <p:txBody>
+          <a:bodyPr/>
+          <a:lstStyle/>
+          <a:p>
+            <a:endParaRPr lang="en-PK"/>
+          </a:p>
+        </p:txBody>
       </p:sp>
       <p:sp>
         <p:nvSpPr>
@@ -14192,6 +15452,13 @@
           </a:solidFill>
           <a:ln/>
         </p:spPr>
+        <p:txBody>
+          <a:bodyPr/>
+          <a:lstStyle/>
+          <a:p>
+            <a:endParaRPr lang="en-PK"/>
+          </a:p>
+        </p:txBody>
       </p:sp>
       <p:sp>
         <p:nvSpPr>
@@ -14214,7 +15481,7 @@
           <a:bodyPr wrap="square" rtlCol="0" anchor="ctr"/>
           <a:lstStyle/>
           <a:p>
-            <a:pPr indent="0" marL="0">
+            <a:pPr marL="0" indent="0">
               <a:buNone/>
             </a:pPr>
             <a:r>
@@ -14253,6 +15520,13 @@
           </a:solidFill>
           <a:ln/>
         </p:spPr>
+        <p:txBody>
+          <a:bodyPr/>
+          <a:lstStyle/>
+          <a:p>
+            <a:endParaRPr lang="en-PK"/>
+          </a:p>
+        </p:txBody>
       </p:sp>
       <p:sp>
         <p:nvSpPr>
@@ -14275,7 +15549,7 @@
           <a:bodyPr wrap="square" rtlCol="0" anchor="ctr"/>
           <a:lstStyle/>
           <a:p>
-            <a:pPr algn="ctr" indent="0" marL="0">
+            <a:pPr marL="0" indent="0" algn="ctr">
               <a:buNone/>
             </a:pPr>
             <a:r>
@@ -14319,13 +15593,20 @@
             <a:prstDash val="solid"/>
           </a:ln>
           <a:effectLst>
-            <a:outerShdw sx="100000" sy="100000" kx="0" ky="0" algn="bl" rotWithShape="0" blurRad="127000" dist="25400" dir="5400000">
+            <a:outerShdw blurRad="127000" dist="25400" dir="5400000" algn="bl" rotWithShape="0">
               <a:srgbClr val="0C1A1A">
                 <a:alpha val="10000"/>
               </a:srgbClr>
             </a:outerShdw>
           </a:effectLst>
         </p:spPr>
+        <p:txBody>
+          <a:bodyPr/>
+          <a:lstStyle/>
+          <a:p>
+            <a:endParaRPr lang="en-PK"/>
+          </a:p>
+        </p:txBody>
       </p:sp>
       <p:sp>
         <p:nvSpPr>
@@ -14346,6 +15627,13 @@
           </a:solidFill>
           <a:ln/>
         </p:spPr>
+        <p:txBody>
+          <a:bodyPr/>
+          <a:lstStyle/>
+          <a:p>
+            <a:endParaRPr lang="en-PK"/>
+          </a:p>
+        </p:txBody>
       </p:sp>
       <p:sp>
         <p:nvSpPr>
@@ -14368,7 +15656,7 @@
           <a:bodyPr wrap="square" rtlCol="0" anchor="ctr"/>
           <a:lstStyle/>
           <a:p>
-            <a:pPr indent="0" marL="0">
+            <a:pPr marL="0" indent="0">
               <a:buNone/>
             </a:pPr>
             <a:r>
@@ -14497,13 +15785,20 @@
             <a:prstDash val="solid"/>
           </a:ln>
           <a:effectLst>
-            <a:outerShdw sx="100000" sy="100000" kx="0" ky="0" algn="bl" rotWithShape="0" blurRad="127000" dist="25400" dir="5400000">
+            <a:outerShdw blurRad="127000" dist="25400" dir="5400000" algn="bl" rotWithShape="0">
               <a:srgbClr val="0C1A1A">
                 <a:alpha val="10000"/>
               </a:srgbClr>
             </a:outerShdw>
           </a:effectLst>
         </p:spPr>
+        <p:txBody>
+          <a:bodyPr/>
+          <a:lstStyle/>
+          <a:p>
+            <a:endParaRPr lang="en-PK"/>
+          </a:p>
+        </p:txBody>
       </p:sp>
       <p:sp>
         <p:nvSpPr>
@@ -14524,6 +15819,13 @@
           </a:solidFill>
           <a:ln/>
         </p:spPr>
+        <p:txBody>
+          <a:bodyPr/>
+          <a:lstStyle/>
+          <a:p>
+            <a:endParaRPr lang="en-PK"/>
+          </a:p>
+        </p:txBody>
       </p:sp>
       <p:sp>
         <p:nvSpPr>
@@ -14546,7 +15848,7 @@
           <a:bodyPr wrap="square" rtlCol="0" anchor="ctr"/>
           <a:lstStyle/>
           <a:p>
-            <a:pPr indent="0" marL="0">
+            <a:pPr marL="0" indent="0">
               <a:buNone/>
             </a:pPr>
             <a:r>
@@ -14675,13 +15977,20 @@
             <a:prstDash val="solid"/>
           </a:ln>
           <a:effectLst>
-            <a:outerShdw sx="100000" sy="100000" kx="0" ky="0" algn="bl" rotWithShape="0" blurRad="127000" dist="25400" dir="5400000">
+            <a:outerShdw blurRad="127000" dist="25400" dir="5400000" algn="bl" rotWithShape="0">
               <a:srgbClr val="0C1A1A">
                 <a:alpha val="10000"/>
               </a:srgbClr>
             </a:outerShdw>
           </a:effectLst>
         </p:spPr>
+        <p:txBody>
+          <a:bodyPr/>
+          <a:lstStyle/>
+          <a:p>
+            <a:endParaRPr lang="en-PK"/>
+          </a:p>
+        </p:txBody>
       </p:sp>
       <p:sp>
         <p:nvSpPr>
@@ -14702,6 +16011,13 @@
           </a:solidFill>
           <a:ln/>
         </p:spPr>
+        <p:txBody>
+          <a:bodyPr/>
+          <a:lstStyle/>
+          <a:p>
+            <a:endParaRPr lang="en-PK"/>
+          </a:p>
+        </p:txBody>
       </p:sp>
       <p:sp>
         <p:nvSpPr>
@@ -14724,7 +16040,7 @@
           <a:bodyPr wrap="square" rtlCol="0" anchor="ctr"/>
           <a:lstStyle/>
           <a:p>
-            <a:pPr indent="0" marL="0">
+            <a:pPr marL="0" indent="0">
               <a:buNone/>
             </a:pPr>
             <a:r>
@@ -14853,13 +16169,20 @@
             <a:prstDash val="solid"/>
           </a:ln>
           <a:effectLst>
-            <a:outerShdw sx="100000" sy="100000" kx="0" ky="0" algn="bl" rotWithShape="0" blurRad="127000" dist="25400" dir="5400000">
+            <a:outerShdw blurRad="127000" dist="25400" dir="5400000" algn="bl" rotWithShape="0">
               <a:srgbClr val="0C1A1A">
                 <a:alpha val="10000"/>
               </a:srgbClr>
             </a:outerShdw>
           </a:effectLst>
         </p:spPr>
+        <p:txBody>
+          <a:bodyPr/>
+          <a:lstStyle/>
+          <a:p>
+            <a:endParaRPr lang="en-PK"/>
+          </a:p>
+        </p:txBody>
       </p:sp>
       <p:sp>
         <p:nvSpPr>
@@ -14880,6 +16203,13 @@
           </a:solidFill>
           <a:ln/>
         </p:spPr>
+        <p:txBody>
+          <a:bodyPr/>
+          <a:lstStyle/>
+          <a:p>
+            <a:endParaRPr lang="en-PK"/>
+          </a:p>
+        </p:txBody>
       </p:sp>
       <p:sp>
         <p:nvSpPr>
@@ -14902,7 +16232,7 @@
           <a:bodyPr wrap="square" rtlCol="0" anchor="ctr"/>
           <a:lstStyle/>
           <a:p>
-            <a:pPr indent="0" marL="0">
+            <a:pPr marL="0" indent="0">
               <a:buNone/>
             </a:pPr>
             <a:r>
@@ -15031,13 +16361,20 @@
             <a:prstDash val="solid"/>
           </a:ln>
           <a:effectLst>
-            <a:outerShdw sx="100000" sy="100000" kx="0" ky="0" algn="bl" rotWithShape="0" blurRad="127000" dist="25400" dir="5400000">
+            <a:outerShdw blurRad="127000" dist="25400" dir="5400000" algn="bl" rotWithShape="0">
               <a:srgbClr val="0C1A1A">
                 <a:alpha val="10000"/>
               </a:srgbClr>
             </a:outerShdw>
           </a:effectLst>
         </p:spPr>
+        <p:txBody>
+          <a:bodyPr/>
+          <a:lstStyle/>
+          <a:p>
+            <a:endParaRPr lang="en-PK"/>
+          </a:p>
+        </p:txBody>
       </p:sp>
       <p:sp>
         <p:nvSpPr>
@@ -15058,6 +16395,13 @@
           </a:solidFill>
           <a:ln/>
         </p:spPr>
+        <p:txBody>
+          <a:bodyPr/>
+          <a:lstStyle/>
+          <a:p>
+            <a:endParaRPr lang="en-PK"/>
+          </a:p>
+        </p:txBody>
       </p:sp>
       <p:sp>
         <p:nvSpPr>
@@ -15080,7 +16424,7 @@
           <a:bodyPr wrap="square" rtlCol="0" anchor="ctr"/>
           <a:lstStyle/>
           <a:p>
-            <a:pPr indent="0" marL="0">
+            <a:pPr marL="0" indent="0">
               <a:buNone/>
             </a:pPr>
             <a:r>
@@ -15209,13 +16553,20 @@
             <a:prstDash val="solid"/>
           </a:ln>
           <a:effectLst>
-            <a:outerShdw sx="100000" sy="100000" kx="0" ky="0" algn="bl" rotWithShape="0" blurRad="127000" dist="25400" dir="5400000">
+            <a:outerShdw blurRad="127000" dist="25400" dir="5400000" algn="bl" rotWithShape="0">
               <a:srgbClr val="0C1A1A">
                 <a:alpha val="10000"/>
               </a:srgbClr>
             </a:outerShdw>
           </a:effectLst>
         </p:spPr>
+        <p:txBody>
+          <a:bodyPr/>
+          <a:lstStyle/>
+          <a:p>
+            <a:endParaRPr lang="en-PK"/>
+          </a:p>
+        </p:txBody>
       </p:sp>
       <p:sp>
         <p:nvSpPr>
@@ -15236,6 +16587,13 @@
           </a:solidFill>
           <a:ln/>
         </p:spPr>
+        <p:txBody>
+          <a:bodyPr/>
+          <a:lstStyle/>
+          <a:p>
+            <a:endParaRPr lang="en-PK"/>
+          </a:p>
+        </p:txBody>
       </p:sp>
       <p:sp>
         <p:nvSpPr>
@@ -15258,7 +16616,7 @@
           <a:bodyPr wrap="square" rtlCol="0" anchor="ctr"/>
           <a:lstStyle/>
           <a:p>
-            <a:pPr indent="0" marL="0">
+            <a:pPr marL="0" indent="0">
               <a:buNone/>
             </a:pPr>
             <a:r>
@@ -15377,6 +16735,7 @@
         <a:solidFill>
           <a:srgbClr val="F4F7F6"/>
         </a:solidFill>
+        <a:effectLst/>
       </p:bgPr>
     </p:bg>
     <p:spTree>
@@ -15412,6 +16771,13 @@
           </a:solidFill>
           <a:ln/>
         </p:spPr>
+        <p:txBody>
+          <a:bodyPr/>
+          <a:lstStyle/>
+          <a:p>
+            <a:endParaRPr lang="en-PK"/>
+          </a:p>
+        </p:txBody>
       </p:sp>
       <p:sp>
         <p:nvSpPr>
@@ -15432,6 +16798,13 @@
           </a:solidFill>
           <a:ln/>
         </p:spPr>
+        <p:txBody>
+          <a:bodyPr/>
+          <a:lstStyle/>
+          <a:p>
+            <a:endParaRPr lang="en-PK"/>
+          </a:p>
+        </p:txBody>
       </p:sp>
       <p:sp>
         <p:nvSpPr>
@@ -15452,6 +16825,13 @@
           </a:solidFill>
           <a:ln/>
         </p:spPr>
+        <p:txBody>
+          <a:bodyPr/>
+          <a:lstStyle/>
+          <a:p>
+            <a:endParaRPr lang="en-PK"/>
+          </a:p>
+        </p:txBody>
       </p:sp>
       <p:sp>
         <p:nvSpPr>
@@ -15474,11 +16854,11 @@
           <a:bodyPr wrap="square" rtlCol="0" anchor="ctr"/>
           <a:lstStyle/>
           <a:p>
-            <a:pPr indent="0" marL="0">
+            <a:pPr marL="0" indent="0">
               <a:buNone/>
             </a:pPr>
             <a:r>
-              <a:rPr lang="en-US" sz="1150" b="1" spc="200" kern="0" dirty="0">
+              <a:rPr lang="en-US" sz="1150" b="1" kern="0" spc="200" dirty="0">
                 <a:solidFill>
                   <a:srgbClr val="5EEAD4"/>
                 </a:solidFill>
@@ -15513,7 +16893,7 @@
           <a:bodyPr wrap="square" rtlCol="0" anchor="ctr"/>
           <a:lstStyle/>
           <a:p>
-            <a:pPr indent="0" marL="0">
+            <a:pPr marL="0" indent="0">
               <a:buNone/>
             </a:pPr>
             <a:r>
@@ -15552,6 +16932,13 @@
           </a:solidFill>
           <a:ln/>
         </p:spPr>
+        <p:txBody>
+          <a:bodyPr/>
+          <a:lstStyle/>
+          <a:p>
+            <a:endParaRPr lang="en-PK"/>
+          </a:p>
+        </p:txBody>
       </p:sp>
       <p:sp>
         <p:nvSpPr>
@@ -15572,6 +16959,13 @@
           </a:solidFill>
           <a:ln/>
         </p:spPr>
+        <p:txBody>
+          <a:bodyPr/>
+          <a:lstStyle/>
+          <a:p>
+            <a:endParaRPr lang="en-PK"/>
+          </a:p>
+        </p:txBody>
       </p:sp>
       <p:sp>
         <p:nvSpPr>
@@ -15592,6 +16986,13 @@
           </a:solidFill>
           <a:ln/>
         </p:spPr>
+        <p:txBody>
+          <a:bodyPr/>
+          <a:lstStyle/>
+          <a:p>
+            <a:endParaRPr lang="en-PK"/>
+          </a:p>
+        </p:txBody>
       </p:sp>
       <p:sp>
         <p:nvSpPr>
@@ -15612,6 +17013,13 @@
           </a:solidFill>
           <a:ln/>
         </p:spPr>
+        <p:txBody>
+          <a:bodyPr/>
+          <a:lstStyle/>
+          <a:p>
+            <a:endParaRPr lang="en-PK"/>
+          </a:p>
+        </p:txBody>
       </p:sp>
       <p:sp>
         <p:nvSpPr>
@@ -15632,6 +17040,13 @@
           </a:solidFill>
           <a:ln/>
         </p:spPr>
+        <p:txBody>
+          <a:bodyPr/>
+          <a:lstStyle/>
+          <a:p>
+            <a:endParaRPr lang="en-PK"/>
+          </a:p>
+        </p:txBody>
       </p:sp>
       <p:sp>
         <p:nvSpPr>
@@ -15652,6 +17067,13 @@
           </a:solidFill>
           <a:ln/>
         </p:spPr>
+        <p:txBody>
+          <a:bodyPr/>
+          <a:lstStyle/>
+          <a:p>
+            <a:endParaRPr lang="en-PK"/>
+          </a:p>
+        </p:txBody>
       </p:sp>
       <p:sp>
         <p:nvSpPr>
@@ -15672,6 +17094,13 @@
           </a:solidFill>
           <a:ln/>
         </p:spPr>
+        <p:txBody>
+          <a:bodyPr/>
+          <a:lstStyle/>
+          <a:p>
+            <a:endParaRPr lang="en-PK"/>
+          </a:p>
+        </p:txBody>
       </p:sp>
       <p:sp>
         <p:nvSpPr>
@@ -15694,7 +17123,7 @@
           <a:bodyPr wrap="square" rtlCol="0" anchor="ctr"/>
           <a:lstStyle/>
           <a:p>
-            <a:pPr indent="0" marL="0">
+            <a:pPr marL="0" indent="0">
               <a:buNone/>
             </a:pPr>
             <a:r>
@@ -15733,6 +17162,13 @@
           </a:solidFill>
           <a:ln/>
         </p:spPr>
+        <p:txBody>
+          <a:bodyPr/>
+          <a:lstStyle/>
+          <a:p>
+            <a:endParaRPr lang="en-PK"/>
+          </a:p>
+        </p:txBody>
       </p:sp>
       <p:sp>
         <p:nvSpPr>
@@ -15755,7 +17191,7 @@
           <a:bodyPr wrap="square" rtlCol="0" anchor="ctr"/>
           <a:lstStyle/>
           <a:p>
-            <a:pPr algn="ctr" indent="0" marL="0">
+            <a:pPr marL="0" indent="0" algn="ctr">
               <a:buNone/>
             </a:pPr>
             <a:r>
@@ -15799,13 +17235,20 @@
             <a:prstDash val="solid"/>
           </a:ln>
           <a:effectLst>
-            <a:outerShdw sx="100000" sy="100000" kx="0" ky="0" algn="bl" rotWithShape="0" blurRad="127000" dist="25400" dir="5400000">
+            <a:outerShdw blurRad="127000" dist="25400" dir="5400000" algn="bl" rotWithShape="0">
               <a:srgbClr val="0C1A1A">
                 <a:alpha val="10000"/>
               </a:srgbClr>
             </a:outerShdw>
           </a:effectLst>
         </p:spPr>
+        <p:txBody>
+          <a:bodyPr/>
+          <a:lstStyle/>
+          <a:p>
+            <a:endParaRPr lang="en-PK"/>
+          </a:p>
+        </p:txBody>
       </p:sp>
       <p:sp>
         <p:nvSpPr>
@@ -15826,6 +17269,13 @@
           </a:solidFill>
           <a:ln/>
         </p:spPr>
+        <p:txBody>
+          <a:bodyPr/>
+          <a:lstStyle/>
+          <a:p>
+            <a:endParaRPr lang="en-PK"/>
+          </a:p>
+        </p:txBody>
       </p:sp>
       <p:sp>
         <p:nvSpPr>
@@ -15848,7 +17298,7 @@
           <a:bodyPr wrap="square" rtlCol="0" anchor="ctr"/>
           <a:lstStyle/>
           <a:p>
-            <a:pPr indent="0" marL="0">
+            <a:pPr marL="0" indent="0">
               <a:buNone/>
             </a:pPr>
             <a:r>
@@ -15899,13 +17349,16 @@
                 <a:solidFill>
                   <a:srgbClr val="2E3B3D"/>
                 </a:solidFill>
-                <a:latin typeface="Verdana" pitchFamily="34" charset="0"/>
-                <a:ea typeface="Verdana" pitchFamily="34" charset="-122"/>
+                <a:latin typeface="Verdana" panose="020B0604030504040204" pitchFamily="34" charset="0"/>
+                <a:ea typeface="Verdana" panose="020B0604030504040204" pitchFamily="34" charset="0"/>
                 <a:cs typeface="Verdana" pitchFamily="34" charset="-120"/>
               </a:rPr>
               <a:t>Multi-tenant SaaS platform on AWS</a:t>
             </a:r>
-            <a:endParaRPr lang="en-US" sz="1450" dirty="0"/>
+            <a:endParaRPr lang="en-US" sz="1450" dirty="0">
+              <a:latin typeface="Verdana" panose="020B0604030504040204" pitchFamily="34" charset="0"/>
+              <a:ea typeface="Verdana" panose="020B0604030504040204" pitchFamily="34" charset="0"/>
+            </a:endParaRPr>
           </a:p>
           <a:p>
             <a:pPr marL="177800" indent="-177800">
@@ -15920,13 +17373,16 @@
                 <a:solidFill>
                   <a:srgbClr val="2E3B3D"/>
                 </a:solidFill>
-                <a:latin typeface="Verdana" pitchFamily="34" charset="0"/>
-                <a:ea typeface="Verdana" pitchFamily="34" charset="-122"/>
+                <a:latin typeface="Verdana" panose="020B0604030504040204" pitchFamily="34" charset="0"/>
+                <a:ea typeface="Verdana" panose="020B0604030504040204" pitchFamily="34" charset="0"/>
                 <a:cs typeface="Verdana" pitchFamily="34" charset="-120"/>
               </a:rPr>
               <a:t>AI ad engine with RAG and compliance</a:t>
             </a:r>
-            <a:endParaRPr lang="en-US" sz="1450" dirty="0"/>
+            <a:endParaRPr lang="en-US" sz="1450" dirty="0">
+              <a:latin typeface="Verdana" panose="020B0604030504040204" pitchFamily="34" charset="0"/>
+              <a:ea typeface="Verdana" panose="020B0604030504040204" pitchFamily="34" charset="0"/>
+            </a:endParaRPr>
           </a:p>
           <a:p>
             <a:pPr marL="177800" indent="-177800">
@@ -15941,13 +17397,16 @@
                 <a:solidFill>
                   <a:srgbClr val="2E3B3D"/>
                 </a:solidFill>
-                <a:latin typeface="Verdana" pitchFamily="34" charset="0"/>
-                <a:ea typeface="Verdana" pitchFamily="34" charset="-122"/>
+                <a:latin typeface="Verdana" panose="020B0604030504040204" pitchFamily="34" charset="0"/>
+                <a:ea typeface="Verdana" panose="020B0604030504040204" pitchFamily="34" charset="0"/>
                 <a:cs typeface="Verdana" pitchFamily="34" charset="-120"/>
               </a:rPr>
               <a:t>Meta Graph API automation engine</a:t>
             </a:r>
-            <a:endParaRPr lang="en-US" sz="1450" dirty="0"/>
+            <a:endParaRPr lang="en-US" sz="1450" dirty="0">
+              <a:latin typeface="Verdana" panose="020B0604030504040204" pitchFamily="34" charset="0"/>
+              <a:ea typeface="Verdana" panose="020B0604030504040204" pitchFamily="34" charset="0"/>
+            </a:endParaRPr>
           </a:p>
           <a:p>
             <a:pPr marL="177800" indent="-177800">
@@ -15962,13 +17421,16 @@
                 <a:solidFill>
                   <a:srgbClr val="2E3B3D"/>
                 </a:solidFill>
-                <a:latin typeface="Verdana" pitchFamily="34" charset="0"/>
-                <a:ea typeface="Verdana" pitchFamily="34" charset="-122"/>
+                <a:latin typeface="Verdana" panose="020B0604030504040204" pitchFamily="34" charset="0"/>
+                <a:ea typeface="Verdana" panose="020B0604030504040204" pitchFamily="34" charset="0"/>
                 <a:cs typeface="Verdana" pitchFamily="34" charset="-120"/>
               </a:rPr>
               <a:t>Encrypted leads with conversion analytics</a:t>
             </a:r>
-            <a:endParaRPr lang="en-US" sz="1450" dirty="0"/>
+            <a:endParaRPr lang="en-US" sz="1450" dirty="0">
+              <a:latin typeface="Verdana" panose="020B0604030504040204" pitchFamily="34" charset="0"/>
+              <a:ea typeface="Verdana" panose="020B0604030504040204" pitchFamily="34" charset="0"/>
+            </a:endParaRPr>
           </a:p>
           <a:p>
             <a:pPr marL="177800" indent="-177800">
@@ -15983,13 +17445,16 @@
                 <a:solidFill>
                   <a:srgbClr val="2E3B3D"/>
                 </a:solidFill>
-                <a:latin typeface="Verdana" pitchFamily="34" charset="0"/>
-                <a:ea typeface="Verdana" pitchFamily="34" charset="-122"/>
+                <a:latin typeface="Verdana" panose="020B0604030504040204" pitchFamily="34" charset="0"/>
+                <a:ea typeface="Verdana" panose="020B0604030504040204" pitchFamily="34" charset="0"/>
                 <a:cs typeface="Verdana" pitchFamily="34" charset="-120"/>
               </a:rPr>
               <a:t>WhatsApp agent with lead scoring</a:t>
             </a:r>
-            <a:endParaRPr lang="en-US" sz="1450" dirty="0"/>
+            <a:endParaRPr lang="en-US" sz="1450" dirty="0">
+              <a:latin typeface="Verdana" panose="020B0604030504040204" pitchFamily="34" charset="0"/>
+              <a:ea typeface="Verdana" panose="020B0604030504040204" pitchFamily="34" charset="0"/>
+            </a:endParaRPr>
           </a:p>
           <a:p>
             <a:pPr marL="177800" indent="-177800">
@@ -16004,13 +17469,16 @@
                 <a:solidFill>
                   <a:srgbClr val="2E3B3D"/>
                 </a:solidFill>
-                <a:latin typeface="Verdana" pitchFamily="34" charset="0"/>
-                <a:ea typeface="Verdana" pitchFamily="34" charset="-122"/>
+                <a:latin typeface="Verdana" panose="020B0604030504040204" pitchFamily="34" charset="0"/>
+                <a:ea typeface="Verdana" panose="020B0604030504040204" pitchFamily="34" charset="0"/>
                 <a:cs typeface="Verdana" pitchFamily="34" charset="-120"/>
               </a:rPr>
               <a:t>Admin console and marketing site</a:t>
             </a:r>
-            <a:endParaRPr lang="en-US" sz="1450" dirty="0"/>
+            <a:endParaRPr lang="en-US" sz="1450" dirty="0">
+              <a:latin typeface="Verdana" panose="020B0604030504040204" pitchFamily="34" charset="0"/>
+              <a:ea typeface="Verdana" panose="020B0604030504040204" pitchFamily="34" charset="0"/>
+            </a:endParaRPr>
           </a:p>
           <a:p>
             <a:pPr marL="177800" indent="-177800">
@@ -16025,13 +17493,16 @@
                 <a:solidFill>
                   <a:srgbClr val="2E3B3D"/>
                 </a:solidFill>
-                <a:latin typeface="Verdana" pitchFamily="34" charset="0"/>
-                <a:ea typeface="Verdana" pitchFamily="34" charset="-122"/>
+                <a:latin typeface="Verdana" panose="020B0604030504040204" pitchFamily="34" charset="0"/>
+                <a:ea typeface="Verdana" panose="020B0604030504040204" pitchFamily="34" charset="0"/>
                 <a:cs typeface="Verdana" pitchFamily="34" charset="-120"/>
               </a:rPr>
               <a:t>SRS, design docs, test reports, report</a:t>
             </a:r>
-            <a:endParaRPr lang="en-US" sz="1450" dirty="0"/>
+            <a:endParaRPr lang="en-US" sz="1450" dirty="0">
+              <a:latin typeface="Verdana" panose="020B0604030504040204" pitchFamily="34" charset="0"/>
+              <a:ea typeface="Verdana" panose="020B0604030504040204" pitchFamily="34" charset="0"/>
+            </a:endParaRPr>
           </a:p>
         </p:txBody>
       </p:sp>
@@ -16061,13 +17532,20 @@
             <a:prstDash val="solid"/>
           </a:ln>
           <a:effectLst>
-            <a:outerShdw sx="100000" sy="100000" kx="0" ky="0" algn="bl" rotWithShape="0" blurRad="127000" dist="25400" dir="5400000">
+            <a:outerShdw blurRad="127000" dist="25400" dir="5400000" algn="bl" rotWithShape="0">
               <a:srgbClr val="0C1A1A">
                 <a:alpha val="10000"/>
               </a:srgbClr>
             </a:outerShdw>
           </a:effectLst>
         </p:spPr>
+        <p:txBody>
+          <a:bodyPr/>
+          <a:lstStyle/>
+          <a:p>
+            <a:endParaRPr lang="en-PK"/>
+          </a:p>
+        </p:txBody>
       </p:sp>
       <p:sp>
         <p:nvSpPr>
@@ -16088,6 +17566,13 @@
           </a:solidFill>
           <a:ln/>
         </p:spPr>
+        <p:txBody>
+          <a:bodyPr/>
+          <a:lstStyle/>
+          <a:p>
+            <a:endParaRPr lang="en-PK"/>
+          </a:p>
+        </p:txBody>
       </p:sp>
       <p:sp>
         <p:nvSpPr>
@@ -16110,7 +17595,7 @@
           <a:bodyPr wrap="square" rtlCol="0" anchor="ctr"/>
           <a:lstStyle/>
           <a:p>
-            <a:pPr indent="0" marL="0">
+            <a:pPr marL="0" indent="0">
               <a:buNone/>
             </a:pPr>
             <a:r>
@@ -16147,6 +17632,13 @@
           </a:solidFill>
           <a:ln/>
         </p:spPr>
+        <p:txBody>
+          <a:bodyPr/>
+          <a:lstStyle/>
+          <a:p>
+            <a:endParaRPr lang="en-PK"/>
+          </a:p>
+        </p:txBody>
       </p:sp>
       <p:sp>
         <p:nvSpPr>
@@ -16169,7 +17661,7 @@
           <a:bodyPr wrap="square" rtlCol="0" anchor="ctr"/>
           <a:lstStyle/>
           <a:p>
-            <a:pPr indent="0" marL="0">
+            <a:pPr marL="0" indent="0">
               <a:buNone/>
             </a:pPr>
             <a:r>
@@ -16208,7 +17700,7 @@
           <a:bodyPr wrap="square" rtlCol="0" anchor="ctr"/>
           <a:lstStyle/>
           <a:p>
-            <a:pPr indent="0" marL="0">
+            <a:pPr marL="0" indent="0">
               <a:lnSpc>
                 <a:spcPts val="2100"/>
               </a:lnSpc>
@@ -16248,6 +17740,13 @@
           </a:solidFill>
           <a:ln/>
         </p:spPr>
+        <p:txBody>
+          <a:bodyPr/>
+          <a:lstStyle/>
+          <a:p>
+            <a:endParaRPr lang="en-PK"/>
+          </a:p>
+        </p:txBody>
       </p:sp>
       <p:sp>
         <p:nvSpPr>
@@ -16270,7 +17769,7 @@
           <a:bodyPr wrap="square" rtlCol="0" anchor="ctr"/>
           <a:lstStyle/>
           <a:p>
-            <a:pPr indent="0" marL="0">
+            <a:pPr marL="0" indent="0">
               <a:buNone/>
             </a:pPr>
             <a:r>
@@ -16309,7 +17808,7 @@
           <a:bodyPr wrap="square" rtlCol="0" anchor="ctr"/>
           <a:lstStyle/>
           <a:p>
-            <a:pPr indent="0" marL="0">
+            <a:pPr marL="0" indent="0">
               <a:lnSpc>
                 <a:spcPts val="2100"/>
               </a:lnSpc>
@@ -16349,6 +17848,13 @@
           </a:solidFill>
           <a:ln/>
         </p:spPr>
+        <p:txBody>
+          <a:bodyPr/>
+          <a:lstStyle/>
+          <a:p>
+            <a:endParaRPr lang="en-PK"/>
+          </a:p>
+        </p:txBody>
       </p:sp>
       <p:sp>
         <p:nvSpPr>
@@ -16371,7 +17877,7 @@
           <a:bodyPr wrap="square" rtlCol="0" anchor="ctr"/>
           <a:lstStyle/>
           <a:p>
-            <a:pPr indent="0" marL="0">
+            <a:pPr marL="0" indent="0">
               <a:buNone/>
             </a:pPr>
             <a:r>
@@ -16410,7 +17916,7 @@
           <a:bodyPr wrap="square" rtlCol="0" anchor="ctr"/>
           <a:lstStyle/>
           <a:p>
-            <a:pPr indent="0" marL="0">
+            <a:pPr marL="0" indent="0">
               <a:lnSpc>
                 <a:spcPts val="2100"/>
               </a:lnSpc>
@@ -16732,4 +18238,319 @@
     </a:ext>
   </a:extLst>
 </a:theme>
+</file>
+
+<file path=ppt/theme/theme2.xml><?xml version="1.0" encoding="utf-8"?>
+<a:theme xmlns:a="http://schemas.openxmlformats.org/drawingml/2006/main" name="Office Theme">
+  <a:themeElements>
+    <a:clrScheme name="Office">
+      <a:dk1>
+        <a:sysClr val="windowText" lastClr="000000"/>
+      </a:dk1>
+      <a:lt1>
+        <a:sysClr val="window" lastClr="FFFFFF"/>
+      </a:lt1>
+      <a:dk2>
+        <a:srgbClr val="0E2841"/>
+      </a:dk2>
+      <a:lt2>
+        <a:srgbClr val="E8E8E8"/>
+      </a:lt2>
+      <a:accent1>
+        <a:srgbClr val="156082"/>
+      </a:accent1>
+      <a:accent2>
+        <a:srgbClr val="E97132"/>
+      </a:accent2>
+      <a:accent3>
+        <a:srgbClr val="196B24"/>
+      </a:accent3>
+      <a:accent4>
+        <a:srgbClr val="0F9ED5"/>
+      </a:accent4>
+      <a:accent5>
+        <a:srgbClr val="A02B93"/>
+      </a:accent5>
+      <a:accent6>
+        <a:srgbClr val="4EA72E"/>
+      </a:accent6>
+      <a:hlink>
+        <a:srgbClr val="467886"/>
+      </a:hlink>
+      <a:folHlink>
+        <a:srgbClr val="96607D"/>
+      </a:folHlink>
+    </a:clrScheme>
+    <a:fontScheme name="Office">
+      <a:majorFont>
+        <a:latin typeface="Aptos Display" panose="02110004020202020204"/>
+        <a:ea typeface=""/>
+        <a:cs typeface=""/>
+        <a:font script="Jpan" typeface="游ゴシック Light"/>
+        <a:font script="Hang" typeface="맑은 고딕"/>
+        <a:font script="Hans" typeface="等线 Light"/>
+        <a:font script="Hant" typeface="新細明體"/>
+        <a:font script="Arab" typeface="Times New Roman"/>
+        <a:font script="Hebr" typeface="Times New Roman"/>
+        <a:font script="Thai" typeface="Angsana New"/>
+        <a:font script="Ethi" typeface="Nyala"/>
+        <a:font script="Beng" typeface="Vrinda"/>
+        <a:font script="Gujr" typeface="Shruti"/>
+        <a:font script="Khmr" typeface="MoolBoran"/>
+        <a:font script="Knda" typeface="Tunga"/>
+        <a:font script="Guru" typeface="Raavi"/>
+        <a:font script="Cans" typeface="Euphemia"/>
+        <a:font script="Cher" typeface="Plantagenet Cherokee"/>
+        <a:font script="Yiii" typeface="Microsoft Yi Baiti"/>
+        <a:font script="Tibt" typeface="Microsoft Himalaya"/>
+        <a:font script="Thaa" typeface="MV Boli"/>
+        <a:font script="Deva" typeface="Mangal"/>
+        <a:font script="Telu" typeface="Gautami"/>
+        <a:font script="Taml" typeface="Latha"/>
+        <a:font script="Syrc" typeface="Estrangelo Edessa"/>
+        <a:font script="Orya" typeface="Kalinga"/>
+        <a:font script="Mlym" typeface="Kartika"/>
+        <a:font script="Laoo" typeface="DokChampa"/>
+        <a:font script="Sinh" typeface="Iskoola Pota"/>
+        <a:font script="Mong" typeface="Mongolian Baiti"/>
+        <a:font script="Viet" typeface="Times New Roman"/>
+        <a:font script="Uigh" typeface="Microsoft Uighur"/>
+        <a:font script="Geor" typeface="Sylfaen"/>
+        <a:font script="Armn" typeface="Arial"/>
+        <a:font script="Bugi" typeface="Leelawadee UI"/>
+        <a:font script="Bopo" typeface="Microsoft JhengHei"/>
+        <a:font script="Java" typeface="Javanese Text"/>
+        <a:font script="Lisu" typeface="Segoe UI"/>
+        <a:font script="Mymr" typeface="Myanmar Text"/>
+        <a:font script="Nkoo" typeface="Ebrima"/>
+        <a:font script="Olck" typeface="Nirmala UI"/>
+        <a:font script="Osma" typeface="Ebrima"/>
+        <a:font script="Phag" typeface="Phagspa"/>
+        <a:font script="Syrn" typeface="Estrangelo Edessa"/>
+        <a:font script="Syrj" typeface="Estrangelo Edessa"/>
+        <a:font script="Syre" typeface="Estrangelo Edessa"/>
+        <a:font script="Sora" typeface="Nirmala UI"/>
+        <a:font script="Tale" typeface="Microsoft Tai Le"/>
+        <a:font script="Talu" typeface="Microsoft New Tai Lue"/>
+        <a:font script="Tfng" typeface="Ebrima"/>
+      </a:majorFont>
+      <a:minorFont>
+        <a:latin typeface="Aptos" panose="02110004020202020204"/>
+        <a:ea typeface=""/>
+        <a:cs typeface=""/>
+        <a:font script="Jpan" typeface="游ゴシック"/>
+        <a:font script="Hang" typeface="맑은 고딕"/>
+        <a:font script="Hans" typeface="等线"/>
+        <a:font script="Hant" typeface="新細明體"/>
+        <a:font script="Arab" typeface="Arial"/>
+        <a:font script="Hebr" typeface="Arial"/>
+        <a:font script="Thai" typeface="Cordia New"/>
+        <a:font script="Ethi" typeface="Nyala"/>
+        <a:font script="Beng" typeface="Vrinda"/>
+        <a:font script="Gujr" typeface="Shruti"/>
+        <a:font script="Khmr" typeface="DaunPenh"/>
+        <a:font script="Knda" typeface="Tunga"/>
+        <a:font script="Guru" typeface="Raavi"/>
+        <a:font script="Cans" typeface="Euphemia"/>
+        <a:font script="Cher" typeface="Plantagenet Cherokee"/>
+        <a:font script="Yiii" typeface="Microsoft Yi Baiti"/>
+        <a:font script="Tibt" typeface="Microsoft Himalaya"/>
+        <a:font script="Thaa" typeface="MV Boli"/>
+        <a:font script="Deva" typeface="Mangal"/>
+        <a:font script="Telu" typeface="Gautami"/>
+        <a:font script="Taml" typeface="Latha"/>
+        <a:font script="Syrc" typeface="Estrangelo Edessa"/>
+        <a:font script="Orya" typeface="Kalinga"/>
+        <a:font script="Mlym" typeface="Kartika"/>
+        <a:font script="Laoo" typeface="DokChampa"/>
+        <a:font script="Sinh" typeface="Iskoola Pota"/>
+        <a:font script="Mong" typeface="Mongolian Baiti"/>
+        <a:font script="Viet" typeface="Arial"/>
+        <a:font script="Uigh" typeface="Microsoft Uighur"/>
+        <a:font script="Geor" typeface="Sylfaen"/>
+        <a:font script="Armn" typeface="Arial"/>
+        <a:font script="Bugi" typeface="Leelawadee UI"/>
+        <a:font script="Bopo" typeface="Microsoft JhengHei"/>
+        <a:font script="Java" typeface="Javanese Text"/>
+        <a:font script="Lisu" typeface="Segoe UI"/>
+        <a:font script="Mymr" typeface="Myanmar Text"/>
+        <a:font script="Nkoo" typeface="Ebrima"/>
+        <a:font script="Olck" typeface="Nirmala UI"/>
+        <a:font script="Osma" typeface="Ebrima"/>
+        <a:font script="Phag" typeface="Phagspa"/>
+        <a:font script="Syrn" typeface="Estrangelo Edessa"/>
+        <a:font script="Syrj" typeface="Estrangelo Edessa"/>
+        <a:font script="Syre" typeface="Estrangelo Edessa"/>
+        <a:font script="Sora" typeface="Nirmala UI"/>
+        <a:font script="Tale" typeface="Microsoft Tai Le"/>
+        <a:font script="Talu" typeface="Microsoft New Tai Lue"/>
+        <a:font script="Tfng" typeface="Ebrima"/>
+      </a:minorFont>
+    </a:fontScheme>
+    <a:fmtScheme name="Office">
+      <a:fillStyleLst>
+        <a:solidFill>
+          <a:schemeClr val="phClr"/>
+        </a:solidFill>
+        <a:gradFill rotWithShape="1">
+          <a:gsLst>
+            <a:gs pos="0">
+              <a:schemeClr val="phClr">
+                <a:lumMod val="110000"/>
+                <a:satMod val="105000"/>
+                <a:tint val="67000"/>
+              </a:schemeClr>
+            </a:gs>
+            <a:gs pos="50000">
+              <a:schemeClr val="phClr">
+                <a:lumMod val="105000"/>
+                <a:satMod val="103000"/>
+                <a:tint val="73000"/>
+              </a:schemeClr>
+            </a:gs>
+            <a:gs pos="100000">
+              <a:schemeClr val="phClr">
+                <a:lumMod val="105000"/>
+                <a:satMod val="109000"/>
+                <a:tint val="81000"/>
+              </a:schemeClr>
+            </a:gs>
+          </a:gsLst>
+          <a:lin ang="5400000" scaled="0"/>
+        </a:gradFill>
+        <a:gradFill rotWithShape="1">
+          <a:gsLst>
+            <a:gs pos="0">
+              <a:schemeClr val="phClr">
+                <a:satMod val="103000"/>
+                <a:lumMod val="102000"/>
+                <a:tint val="94000"/>
+              </a:schemeClr>
+            </a:gs>
+            <a:gs pos="50000">
+              <a:schemeClr val="phClr">
+                <a:satMod val="110000"/>
+                <a:lumMod val="100000"/>
+                <a:shade val="100000"/>
+              </a:schemeClr>
+            </a:gs>
+            <a:gs pos="100000">
+              <a:schemeClr val="phClr">
+                <a:lumMod val="99000"/>
+                <a:satMod val="120000"/>
+                <a:shade val="78000"/>
+              </a:schemeClr>
+            </a:gs>
+          </a:gsLst>
+          <a:lin ang="5400000" scaled="0"/>
+        </a:gradFill>
+      </a:fillStyleLst>
+      <a:lnStyleLst>
+        <a:ln w="12700" cap="flat" cmpd="sng" algn="ctr">
+          <a:solidFill>
+            <a:schemeClr val="phClr"/>
+          </a:solidFill>
+          <a:prstDash val="solid"/>
+          <a:miter lim="800000"/>
+        </a:ln>
+        <a:ln w="19050" cap="flat" cmpd="sng" algn="ctr">
+          <a:solidFill>
+            <a:schemeClr val="phClr"/>
+          </a:solidFill>
+          <a:prstDash val="solid"/>
+          <a:miter lim="800000"/>
+        </a:ln>
+        <a:ln w="25400" cap="flat" cmpd="sng" algn="ctr">
+          <a:solidFill>
+            <a:schemeClr val="phClr"/>
+          </a:solidFill>
+          <a:prstDash val="solid"/>
+          <a:miter lim="800000"/>
+        </a:ln>
+      </a:lnStyleLst>
+      <a:effectStyleLst>
+        <a:effectStyle>
+          <a:effectLst/>
+        </a:effectStyle>
+        <a:effectStyle>
+          <a:effectLst/>
+        </a:effectStyle>
+        <a:effectStyle>
+          <a:effectLst>
+            <a:outerShdw blurRad="57150" dist="19050" dir="5400000" algn="ctr" rotWithShape="0">
+              <a:srgbClr val="000000">
+                <a:alpha val="63000"/>
+              </a:srgbClr>
+            </a:outerShdw>
+          </a:effectLst>
+        </a:effectStyle>
+      </a:effectStyleLst>
+      <a:bgFillStyleLst>
+        <a:solidFill>
+          <a:schemeClr val="phClr"/>
+        </a:solidFill>
+        <a:solidFill>
+          <a:schemeClr val="phClr">
+            <a:tint val="95000"/>
+            <a:satMod val="170000"/>
+          </a:schemeClr>
+        </a:solidFill>
+        <a:gradFill rotWithShape="1">
+          <a:gsLst>
+            <a:gs pos="0">
+              <a:schemeClr val="phClr">
+                <a:tint val="93000"/>
+                <a:satMod val="150000"/>
+                <a:shade val="98000"/>
+                <a:lumMod val="102000"/>
+              </a:schemeClr>
+            </a:gs>
+            <a:gs pos="50000">
+              <a:schemeClr val="phClr">
+                <a:tint val="98000"/>
+                <a:satMod val="130000"/>
+                <a:shade val="90000"/>
+                <a:lumMod val="103000"/>
+              </a:schemeClr>
+            </a:gs>
+            <a:gs pos="100000">
+              <a:schemeClr val="phClr">
+                <a:shade val="63000"/>
+                <a:satMod val="120000"/>
+              </a:schemeClr>
+            </a:gs>
+          </a:gsLst>
+          <a:lin ang="5400000" scaled="0"/>
+        </a:gradFill>
+      </a:bgFillStyleLst>
+    </a:fmtScheme>
+  </a:themeElements>
+  <a:objectDefaults>
+    <a:lnDef>
+      <a:spPr/>
+      <a:bodyPr/>
+      <a:lstStyle/>
+      <a:style>
+        <a:lnRef idx="2">
+          <a:schemeClr val="accent1"/>
+        </a:lnRef>
+        <a:fillRef idx="0">
+          <a:schemeClr val="accent1"/>
+        </a:fillRef>
+        <a:effectRef idx="1">
+          <a:schemeClr val="accent1"/>
+        </a:effectRef>
+        <a:fontRef idx="minor">
+          <a:schemeClr val="tx1"/>
+        </a:fontRef>
+      </a:style>
+    </a:lnDef>
+  </a:objectDefaults>
+  <a:extraClrSchemeLst/>
+  <a:extLst>
+    <a:ext uri="{05A4C25C-085E-4340-85A3-A5531E510DB2}">
+      <thm15:themeFamily xmlns:thm15="http://schemas.microsoft.com/office/thememl/2012/main" name="Office Theme" id="{2E142A2C-CD16-42D6-873A-C26D2A0506FA}" vid="{1BDDFF52-6CD6-40A5-AB3C-68EB2F1E4D0A}"/>
+    </a:ext>
+  </a:extLst>
+</a:theme>
 </file>